--- a/PriceHawk_Presentation.pptx
+++ b/PriceHawk_Presentation.pptx
@@ -15,9 +15,10 @@
     <p:sldId id="263" r:id="rId9"/>
     <p:sldId id="264" r:id="rId10"/>
     <p:sldId id="265" r:id="rId11"/>
+    <p:sldId id="266" r:id="rId12"/>
   </p:sldIdLst>
   <p:notesMasterIdLst>
-    <p:notesMasterId r:id="rId12"/>
+    <p:notesMasterId r:id="rId13"/>
   </p:notesMasterIdLst>
   <p:sldSz cx="9144000" cy="5143500"/>
   <p:notesSz cx="5143500" cy="9144000"/>
@@ -623,6 +624,94 @@
             <a:fld id="{F7021451-1387-4CA6-816F-3879F97B5CBC}" type="slidenum">
               <a:rPr lang="en-US"/>
               <a:t>10</a:t>
+            </a:fld>
+            <a:endParaRPr lang="en-US"/>
+          </a:p>
+        </p:txBody>
+      </p:sp>
+    </p:spTree>
+    <p:extLst>
+      <p:ext uri="{BB962C8B-B14F-4D97-AF65-F5344CB8AC3E}">
+        <p14:creationId xmlns:p14="http://schemas.microsoft.com/office/powerpoint/2010/main" val="1024086991"/>
+      </p:ext>
+    </p:extLst>
+  </p:cSld>
+  <p:clrMapOvr>
+    <a:masterClrMapping/>
+  </p:clrMapOvr>
+</p:notes>
+</file>
+
+<file path=ppt/notesSlides/notesSlide11.xml><?xml version="1.0" encoding="utf-8"?>
+<p:notes xmlns:a="http://schemas.openxmlformats.org/drawingml/2006/main" xmlns:r="http://schemas.openxmlformats.org/officeDocument/2006/relationships" xmlns:p="http://schemas.openxmlformats.org/presentationml/2006/main">
+  <p:cSld>
+    <p:spTree>
+      <p:nvGrpSpPr>
+        <p:cNvPr id="1" name=""/>
+        <p:cNvGrpSpPr/>
+        <p:nvPr/>
+      </p:nvGrpSpPr>
+      <p:grpSpPr>
+        <a:xfrm>
+          <a:off x="0" y="0"/>
+          <a:ext cx="0" cy="0"/>
+          <a:chOff x="0" y="0"/>
+          <a:chExt cx="0" cy="0"/>
+        </a:xfrm>
+      </p:grpSpPr>
+      <p:sp>
+        <p:nvSpPr>
+          <p:cNvPr id="2" name="Slide Image Placeholder 1"/>
+          <p:cNvSpPr>
+            <a:spLocks noGrp="1" noRot="1" noChangeAspect="1"/>
+          </p:cNvSpPr>
+          <p:nvPr>
+            <p:ph type="sldImg"/>
+          </p:nvPr>
+        </p:nvSpPr>
+        <p:spPr/>
+      </p:sp>
+      <p:sp>
+        <p:nvSpPr>
+          <p:cNvPr id="3" name="Notes Placeholder 2"/>
+          <p:cNvSpPr>
+            <a:spLocks noGrp="1"/>
+          </p:cNvSpPr>
+          <p:nvPr>
+            <p:ph type="body" idx="1"/>
+          </p:nvPr>
+        </p:nvSpPr>
+        <p:spPr/>
+        <p:txBody>
+          <a:bodyPr/>
+          <a:lstStyle/>
+          <a:p>
+            <a:r>
+              <a:rPr lang="en-US" dirty="0"/>
+              <a:t/>
+            </a:r>
+            <a:endParaRPr lang="en-US" dirty="0"/>
+          </a:p>
+        </p:txBody>
+      </p:sp>
+      <p:sp>
+        <p:nvSpPr>
+          <p:cNvPr id="4" name="Slide Number Placeholder 3"/>
+          <p:cNvSpPr>
+            <a:spLocks noGrp="1"/>
+          </p:cNvSpPr>
+          <p:nvPr>
+            <p:ph type="sldNum" sz="quarter" idx="10"/>
+          </p:nvPr>
+        </p:nvSpPr>
+        <p:spPr/>
+        <p:txBody>
+          <a:bodyPr/>
+          <a:lstStyle/>
+          <a:p>
+            <a:fld id="{F7021451-1387-4CA6-816F-3879F97B5CBC}" type="slidenum">
+              <a:rPr lang="en-US"/>
+              <a:t>11</a:t>
             </a:fld>
             <a:endParaRPr lang="en-US"/>
           </a:p>
@@ -1910,6 +1999,720 @@
     <p:bg>
       <p:bgPr>
         <a:solidFill>
+          <a:srgbClr val="FEF9EF"/>
+        </a:solidFill>
+      </p:bgPr>
+    </p:bg>
+    <p:spTree>
+      <p:nvGrpSpPr>
+        <p:cNvPr id="1" name=""/>
+        <p:cNvGrpSpPr/>
+        <p:nvPr/>
+      </p:nvGrpSpPr>
+      <p:grpSpPr>
+        <a:xfrm>
+          <a:off x="0" y="0"/>
+          <a:ext cx="0" cy="0"/>
+          <a:chOff x="0" y="0"/>
+          <a:chExt cx="0" cy="0"/>
+        </a:xfrm>
+      </p:grpSpPr>
+      <p:sp>
+        <p:nvSpPr>
+          <p:cNvPr id="2" name="Text 0"/>
+          <p:cNvSpPr/>
+          <p:nvPr/>
+        </p:nvSpPr>
+        <p:spPr>
+          <a:xfrm>
+            <a:off x="640080" y="365760"/>
+            <a:ext cx="2743200" cy="320040"/>
+          </a:xfrm>
+          <a:prstGeom prst="rect">
+            <a:avLst/>
+          </a:prstGeom>
+          <a:noFill/>
+          <a:ln/>
+        </p:spPr>
+        <p:txBody>
+          <a:bodyPr wrap="square" lIns="0" tIns="0" rIns="0" bIns="0" rtlCol="0" anchor="ctr"/>
+          <a:lstStyle/>
+          <a:p>
+            <a:pPr indent="0" marL="0">
+              <a:buNone/>
+            </a:pPr>
+            <a:r>
+              <a:rPr lang="en-US" sz="1100" b="1" spc="300" kern="0" dirty="0">
+                <a:solidFill>
+                  <a:srgbClr val="D97706"/>
+                </a:solidFill>
+                <a:latin typeface="Calibri" pitchFamily="34" charset="0"/>
+                <a:ea typeface="Calibri" pitchFamily="34" charset="-122"/>
+                <a:cs typeface="Calibri" pitchFamily="34" charset="-120"/>
+              </a:rPr>
+              <a:t>FUTURE ROADMAP</a:t>
+            </a:r>
+            <a:endParaRPr lang="en-US" sz="1100" dirty="0"/>
+          </a:p>
+        </p:txBody>
+      </p:sp>
+      <p:sp>
+        <p:nvSpPr>
+          <p:cNvPr id="3" name="Text 1"/>
+          <p:cNvSpPr/>
+          <p:nvPr/>
+        </p:nvSpPr>
+        <p:spPr>
+          <a:xfrm>
+            <a:off x="640080" y="685800"/>
+            <a:ext cx="7772400" cy="640080"/>
+          </a:xfrm>
+          <a:prstGeom prst="rect">
+            <a:avLst/>
+          </a:prstGeom>
+          <a:noFill/>
+          <a:ln/>
+        </p:spPr>
+        <p:txBody>
+          <a:bodyPr wrap="square" lIns="0" tIns="0" rIns="0" bIns="0" rtlCol="0" anchor="ctr"/>
+          <a:lstStyle/>
+          <a:p>
+            <a:pPr indent="0" marL="0">
+              <a:buNone/>
+            </a:pPr>
+            <a:r>
+              <a:rPr lang="en-US" sz="3200" b="1" dirty="0">
+                <a:solidFill>
+                  <a:srgbClr val="1E293B"/>
+                </a:solidFill>
+                <a:latin typeface="Georgia" pitchFamily="34" charset="0"/>
+                <a:ea typeface="Georgia" pitchFamily="34" charset="-122"/>
+                <a:cs typeface="Georgia" pitchFamily="34" charset="-120"/>
+              </a:rPr>
+              <a:t>What's Next for PriceHawk</a:t>
+            </a:r>
+            <a:endParaRPr lang="en-US" sz="3200" dirty="0"/>
+          </a:p>
+        </p:txBody>
+      </p:sp>
+      <p:sp>
+        <p:nvSpPr>
+          <p:cNvPr id="4" name="Shape 2"/>
+          <p:cNvSpPr/>
+          <p:nvPr/>
+        </p:nvSpPr>
+        <p:spPr>
+          <a:xfrm>
+            <a:off x="1051560" y="2240280"/>
+            <a:ext cx="36576" cy="457200"/>
+          </a:xfrm>
+          <a:prstGeom prst="rect">
+            <a:avLst/>
+          </a:prstGeom>
+          <a:solidFill>
+            <a:srgbClr val="D97706"/>
+          </a:solidFill>
+          <a:ln/>
+        </p:spPr>
+      </p:sp>
+      <p:sp>
+        <p:nvSpPr>
+          <p:cNvPr id="5" name="Shape 3"/>
+          <p:cNvSpPr/>
+          <p:nvPr/>
+        </p:nvSpPr>
+        <p:spPr>
+          <a:xfrm>
+            <a:off x="777240" y="1645920"/>
+            <a:ext cx="594360" cy="594360"/>
+          </a:xfrm>
+          <a:prstGeom prst="ellipse">
+            <a:avLst/>
+          </a:prstGeom>
+          <a:solidFill>
+            <a:srgbClr val="D97706"/>
+          </a:solidFill>
+          <a:ln/>
+        </p:spPr>
+      </p:sp>
+      <p:pic>
+        <p:nvPicPr>
+          <p:cNvPr id="6" name="Image 0" descr="preencoded.png">    </p:cNvPr>
+          <p:cNvPicPr>
+            <a:picLocks noChangeAspect="1"/>
+          </p:cNvPicPr>
+          <p:nvPr/>
+        </p:nvPicPr>
+        <p:blipFill>
+          <a:blip r:embed="rId1"/>
+          <a:stretch>
+            <a:fillRect/>
+          </a:stretch>
+        </p:blipFill>
+        <p:spPr>
+          <a:xfrm>
+            <a:off x="886968" y="1755648"/>
+            <a:ext cx="365760" cy="365760"/>
+          </a:xfrm>
+          <a:prstGeom prst="rect">
+            <a:avLst/>
+          </a:prstGeom>
+        </p:spPr>
+      </p:pic>
+      <p:sp>
+        <p:nvSpPr>
+          <p:cNvPr id="7" name="Shape 4"/>
+          <p:cNvSpPr/>
+          <p:nvPr/>
+        </p:nvSpPr>
+        <p:spPr>
+          <a:xfrm>
+            <a:off x="1645920" y="1508760"/>
+            <a:ext cx="6675120" cy="868680"/>
+          </a:xfrm>
+          <a:prstGeom prst="rect">
+            <a:avLst/>
+          </a:prstGeom>
+          <a:solidFill>
+            <a:srgbClr val="FFFFFF"/>
+          </a:solidFill>
+          <a:ln/>
+          <a:effectLst>
+            <a:outerShdw sx="100000" sy="100000" kx="0" ky="0" algn="bl" rotWithShape="0" blurRad="50800" dist="25400" dir="8100000">
+              <a:srgbClr val="000000">
+                <a:alpha val="10000"/>
+              </a:srgbClr>
+            </a:outerShdw>
+          </a:effectLst>
+        </p:spPr>
+      </p:sp>
+      <p:sp>
+        <p:nvSpPr>
+          <p:cNvPr id="8" name="Text 5"/>
+          <p:cNvSpPr/>
+          <p:nvPr/>
+        </p:nvSpPr>
+        <p:spPr>
+          <a:xfrm>
+            <a:off x="1828800" y="1581912"/>
+            <a:ext cx="1097280" cy="228600"/>
+          </a:xfrm>
+          <a:prstGeom prst="rect">
+            <a:avLst/>
+          </a:prstGeom>
+          <a:noFill/>
+          <a:ln/>
+        </p:spPr>
+        <p:txBody>
+          <a:bodyPr wrap="square" lIns="0" tIns="0" rIns="0" bIns="0" rtlCol="0" anchor="ctr"/>
+          <a:lstStyle/>
+          <a:p>
+            <a:pPr indent="0" marL="0">
+              <a:buNone/>
+            </a:pPr>
+            <a:r>
+              <a:rPr lang="en-US" sz="1000" b="1" dirty="0">
+                <a:solidFill>
+                  <a:srgbClr val="D97706"/>
+                </a:solidFill>
+                <a:latin typeface="Calibri" pitchFamily="34" charset="0"/>
+                <a:ea typeface="Calibri" pitchFamily="34" charset="-122"/>
+                <a:cs typeface="Calibri" pitchFamily="34" charset="-120"/>
+              </a:rPr>
+              <a:t>Phase 1</a:t>
+            </a:r>
+            <a:endParaRPr lang="en-US" sz="1000" dirty="0"/>
+          </a:p>
+        </p:txBody>
+      </p:sp>
+      <p:sp>
+        <p:nvSpPr>
+          <p:cNvPr id="9" name="Text 6"/>
+          <p:cNvSpPr/>
+          <p:nvPr/>
+        </p:nvSpPr>
+        <p:spPr>
+          <a:xfrm>
+            <a:off x="1828800" y="1783080"/>
+            <a:ext cx="6309360" cy="274320"/>
+          </a:xfrm>
+          <a:prstGeom prst="rect">
+            <a:avLst/>
+          </a:prstGeom>
+          <a:noFill/>
+          <a:ln/>
+        </p:spPr>
+        <p:txBody>
+          <a:bodyPr wrap="square" lIns="0" tIns="0" rIns="0" bIns="0" rtlCol="0" anchor="ctr"/>
+          <a:lstStyle/>
+          <a:p>
+            <a:pPr indent="0" marL="0">
+              <a:buNone/>
+            </a:pPr>
+            <a:r>
+              <a:rPr lang="en-US" sz="1400" b="1" dirty="0">
+                <a:solidFill>
+                  <a:srgbClr val="1E293B"/>
+                </a:solidFill>
+                <a:latin typeface="Calibri" pitchFamily="34" charset="0"/>
+                <a:ea typeface="Calibri" pitchFamily="34" charset="-122"/>
+                <a:cs typeface="Calibri" pitchFamily="34" charset="-120"/>
+              </a:rPr>
+              <a:t>Expand Retailer Coverage</a:t>
+            </a:r>
+            <a:endParaRPr lang="en-US" sz="1400" dirty="0"/>
+          </a:p>
+        </p:txBody>
+      </p:sp>
+      <p:sp>
+        <p:nvSpPr>
+          <p:cNvPr id="10" name="Text 7"/>
+          <p:cNvSpPr/>
+          <p:nvPr/>
+        </p:nvSpPr>
+        <p:spPr>
+          <a:xfrm>
+            <a:off x="1828800" y="2057400"/>
+            <a:ext cx="6309360" cy="274320"/>
+          </a:xfrm>
+          <a:prstGeom prst="rect">
+            <a:avLst/>
+          </a:prstGeom>
+          <a:noFill/>
+          <a:ln/>
+        </p:spPr>
+        <p:txBody>
+          <a:bodyPr wrap="square" lIns="0" tIns="0" rIns="0" bIns="0" rtlCol="0" anchor="ctr"/>
+          <a:lstStyle/>
+          <a:p>
+            <a:pPr indent="0" marL="0">
+              <a:buNone/>
+            </a:pPr>
+            <a:r>
+              <a:rPr lang="en-US" sz="1100" dirty="0">
+                <a:solidFill>
+                  <a:srgbClr val="64748B"/>
+                </a:solidFill>
+                <a:latin typeface="Calibri" pitchFamily="34" charset="0"/>
+                <a:ea typeface="Calibri" pitchFamily="34" charset="-122"/>
+                <a:cs typeface="Calibri" pitchFamily="34" charset="-120"/>
+              </a:rPr>
+              <a:t>Add 10+ additional retailers and international market support.</a:t>
+            </a:r>
+            <a:endParaRPr lang="en-US" sz="1100" dirty="0"/>
+          </a:p>
+        </p:txBody>
+      </p:sp>
+      <p:sp>
+        <p:nvSpPr>
+          <p:cNvPr id="11" name="Shape 8"/>
+          <p:cNvSpPr/>
+          <p:nvPr/>
+        </p:nvSpPr>
+        <p:spPr>
+          <a:xfrm>
+            <a:off x="1051560" y="3383280"/>
+            <a:ext cx="36576" cy="457200"/>
+          </a:xfrm>
+          <a:prstGeom prst="rect">
+            <a:avLst/>
+          </a:prstGeom>
+          <a:solidFill>
+            <a:srgbClr val="D97706"/>
+          </a:solidFill>
+          <a:ln/>
+        </p:spPr>
+      </p:sp>
+      <p:sp>
+        <p:nvSpPr>
+          <p:cNvPr id="12" name="Shape 9"/>
+          <p:cNvSpPr/>
+          <p:nvPr/>
+        </p:nvSpPr>
+        <p:spPr>
+          <a:xfrm>
+            <a:off x="777240" y="2788920"/>
+            <a:ext cx="594360" cy="594360"/>
+          </a:xfrm>
+          <a:prstGeom prst="ellipse">
+            <a:avLst/>
+          </a:prstGeom>
+          <a:solidFill>
+            <a:srgbClr val="D97706"/>
+          </a:solidFill>
+          <a:ln/>
+        </p:spPr>
+      </p:sp>
+      <p:pic>
+        <p:nvPicPr>
+          <p:cNvPr id="13" name="Image 1" descr="preencoded.png">    </p:cNvPr>
+          <p:cNvPicPr>
+            <a:picLocks noChangeAspect="1"/>
+          </p:cNvPicPr>
+          <p:nvPr/>
+        </p:nvPicPr>
+        <p:blipFill>
+          <a:blip r:embed="rId2"/>
+          <a:stretch>
+            <a:fillRect/>
+          </a:stretch>
+        </p:blipFill>
+        <p:spPr>
+          <a:xfrm>
+            <a:off x="886968" y="2898648"/>
+            <a:ext cx="365760" cy="365760"/>
+          </a:xfrm>
+          <a:prstGeom prst="rect">
+            <a:avLst/>
+          </a:prstGeom>
+        </p:spPr>
+      </p:pic>
+      <p:sp>
+        <p:nvSpPr>
+          <p:cNvPr id="14" name="Shape 10"/>
+          <p:cNvSpPr/>
+          <p:nvPr/>
+        </p:nvSpPr>
+        <p:spPr>
+          <a:xfrm>
+            <a:off x="1645920" y="2651760"/>
+            <a:ext cx="6675120" cy="868680"/>
+          </a:xfrm>
+          <a:prstGeom prst="rect">
+            <a:avLst/>
+          </a:prstGeom>
+          <a:solidFill>
+            <a:srgbClr val="FFFFFF"/>
+          </a:solidFill>
+          <a:ln/>
+          <a:effectLst>
+            <a:outerShdw sx="100000" sy="100000" kx="0" ky="0" algn="bl" rotWithShape="0" blurRad="50800" dist="25400" dir="8100000">
+              <a:srgbClr val="000000">
+                <a:alpha val="10000"/>
+              </a:srgbClr>
+            </a:outerShdw>
+          </a:effectLst>
+        </p:spPr>
+      </p:sp>
+      <p:sp>
+        <p:nvSpPr>
+          <p:cNvPr id="15" name="Text 11"/>
+          <p:cNvSpPr/>
+          <p:nvPr/>
+        </p:nvSpPr>
+        <p:spPr>
+          <a:xfrm>
+            <a:off x="1828800" y="2724912"/>
+            <a:ext cx="1097280" cy="228600"/>
+          </a:xfrm>
+          <a:prstGeom prst="rect">
+            <a:avLst/>
+          </a:prstGeom>
+          <a:noFill/>
+          <a:ln/>
+        </p:spPr>
+        <p:txBody>
+          <a:bodyPr wrap="square" lIns="0" tIns="0" rIns="0" bIns="0" rtlCol="0" anchor="ctr"/>
+          <a:lstStyle/>
+          <a:p>
+            <a:pPr indent="0" marL="0">
+              <a:buNone/>
+            </a:pPr>
+            <a:r>
+              <a:rPr lang="en-US" sz="1000" b="1" dirty="0">
+                <a:solidFill>
+                  <a:srgbClr val="D97706"/>
+                </a:solidFill>
+                <a:latin typeface="Calibri" pitchFamily="34" charset="0"/>
+                <a:ea typeface="Calibri" pitchFamily="34" charset="-122"/>
+                <a:cs typeface="Calibri" pitchFamily="34" charset="-120"/>
+              </a:rPr>
+              <a:t>Phase 2</a:t>
+            </a:r>
+            <a:endParaRPr lang="en-US" sz="1000" dirty="0"/>
+          </a:p>
+        </p:txBody>
+      </p:sp>
+      <p:sp>
+        <p:nvSpPr>
+          <p:cNvPr id="16" name="Text 12"/>
+          <p:cNvSpPr/>
+          <p:nvPr/>
+        </p:nvSpPr>
+        <p:spPr>
+          <a:xfrm>
+            <a:off x="1828800" y="2926080"/>
+            <a:ext cx="6309360" cy="274320"/>
+          </a:xfrm>
+          <a:prstGeom prst="rect">
+            <a:avLst/>
+          </a:prstGeom>
+          <a:noFill/>
+          <a:ln/>
+        </p:spPr>
+        <p:txBody>
+          <a:bodyPr wrap="square" lIns="0" tIns="0" rIns="0" bIns="0" rtlCol="0" anchor="ctr"/>
+          <a:lstStyle/>
+          <a:p>
+            <a:pPr indent="0" marL="0">
+              <a:buNone/>
+            </a:pPr>
+            <a:r>
+              <a:rPr lang="en-US" sz="1400" b="1" dirty="0">
+                <a:solidFill>
+                  <a:srgbClr val="1E293B"/>
+                </a:solidFill>
+                <a:latin typeface="Calibri" pitchFamily="34" charset="0"/>
+                <a:ea typeface="Calibri" pitchFamily="34" charset="-122"/>
+                <a:cs typeface="Calibri" pitchFamily="34" charset="-120"/>
+              </a:rPr>
+              <a:t>Personalized Recommendations</a:t>
+            </a:r>
+            <a:endParaRPr lang="en-US" sz="1400" dirty="0"/>
+          </a:p>
+        </p:txBody>
+      </p:sp>
+      <p:sp>
+        <p:nvSpPr>
+          <p:cNvPr id="17" name="Text 13"/>
+          <p:cNvSpPr/>
+          <p:nvPr/>
+        </p:nvSpPr>
+        <p:spPr>
+          <a:xfrm>
+            <a:off x="1828800" y="3200400"/>
+            <a:ext cx="6309360" cy="274320"/>
+          </a:xfrm>
+          <a:prstGeom prst="rect">
+            <a:avLst/>
+          </a:prstGeom>
+          <a:noFill/>
+          <a:ln/>
+        </p:spPr>
+        <p:txBody>
+          <a:bodyPr wrap="square" lIns="0" tIns="0" rIns="0" bIns="0" rtlCol="0" anchor="ctr"/>
+          <a:lstStyle/>
+          <a:p>
+            <a:pPr indent="0" marL="0">
+              <a:buNone/>
+            </a:pPr>
+            <a:r>
+              <a:rPr lang="en-US" sz="1100" dirty="0">
+                <a:solidFill>
+                  <a:srgbClr val="64748B"/>
+                </a:solidFill>
+                <a:latin typeface="Calibri" pitchFamily="34" charset="0"/>
+                <a:ea typeface="Calibri" pitchFamily="34" charset="-122"/>
+                <a:cs typeface="Calibri" pitchFamily="34" charset="-120"/>
+              </a:rPr>
+              <a:t>ML-powered suggestions based on purchase history and preferences.</a:t>
+            </a:r>
+            <a:endParaRPr lang="en-US" sz="1100" dirty="0"/>
+          </a:p>
+        </p:txBody>
+      </p:sp>
+      <p:sp>
+        <p:nvSpPr>
+          <p:cNvPr id="18" name="Shape 14"/>
+          <p:cNvSpPr/>
+          <p:nvPr/>
+        </p:nvSpPr>
+        <p:spPr>
+          <a:xfrm>
+            <a:off x="777240" y="3931920"/>
+            <a:ext cx="594360" cy="594360"/>
+          </a:xfrm>
+          <a:prstGeom prst="ellipse">
+            <a:avLst/>
+          </a:prstGeom>
+          <a:solidFill>
+            <a:srgbClr val="D97706"/>
+          </a:solidFill>
+          <a:ln/>
+        </p:spPr>
+      </p:sp>
+      <p:pic>
+        <p:nvPicPr>
+          <p:cNvPr id="19" name="Image 2" descr="preencoded.png">    </p:cNvPr>
+          <p:cNvPicPr>
+            <a:picLocks noChangeAspect="1"/>
+          </p:cNvPicPr>
+          <p:nvPr/>
+        </p:nvPicPr>
+        <p:blipFill>
+          <a:blip r:embed="rId3"/>
+          <a:stretch>
+            <a:fillRect/>
+          </a:stretch>
+        </p:blipFill>
+        <p:spPr>
+          <a:xfrm>
+            <a:off x="886968" y="4041648"/>
+            <a:ext cx="365760" cy="365760"/>
+          </a:xfrm>
+          <a:prstGeom prst="rect">
+            <a:avLst/>
+          </a:prstGeom>
+        </p:spPr>
+      </p:pic>
+      <p:sp>
+        <p:nvSpPr>
+          <p:cNvPr id="20" name="Shape 15"/>
+          <p:cNvSpPr/>
+          <p:nvPr/>
+        </p:nvSpPr>
+        <p:spPr>
+          <a:xfrm>
+            <a:off x="1645920" y="3794760"/>
+            <a:ext cx="6675120" cy="868680"/>
+          </a:xfrm>
+          <a:prstGeom prst="rect">
+            <a:avLst/>
+          </a:prstGeom>
+          <a:solidFill>
+            <a:srgbClr val="FFFFFF"/>
+          </a:solidFill>
+          <a:ln/>
+          <a:effectLst>
+            <a:outerShdw sx="100000" sy="100000" kx="0" ky="0" algn="bl" rotWithShape="0" blurRad="50800" dist="25400" dir="8100000">
+              <a:srgbClr val="000000">
+                <a:alpha val="10000"/>
+              </a:srgbClr>
+            </a:outerShdw>
+          </a:effectLst>
+        </p:spPr>
+      </p:sp>
+      <p:sp>
+        <p:nvSpPr>
+          <p:cNvPr id="21" name="Text 16"/>
+          <p:cNvSpPr/>
+          <p:nvPr/>
+        </p:nvSpPr>
+        <p:spPr>
+          <a:xfrm>
+            <a:off x="1828800" y="3867912"/>
+            <a:ext cx="1097280" cy="228600"/>
+          </a:xfrm>
+          <a:prstGeom prst="rect">
+            <a:avLst/>
+          </a:prstGeom>
+          <a:noFill/>
+          <a:ln/>
+        </p:spPr>
+        <p:txBody>
+          <a:bodyPr wrap="square" lIns="0" tIns="0" rIns="0" bIns="0" rtlCol="0" anchor="ctr"/>
+          <a:lstStyle/>
+          <a:p>
+            <a:pPr indent="0" marL="0">
+              <a:buNone/>
+            </a:pPr>
+            <a:r>
+              <a:rPr lang="en-US" sz="1000" b="1" dirty="0">
+                <a:solidFill>
+                  <a:srgbClr val="D97706"/>
+                </a:solidFill>
+                <a:latin typeface="Calibri" pitchFamily="34" charset="0"/>
+                <a:ea typeface="Calibri" pitchFamily="34" charset="-122"/>
+                <a:cs typeface="Calibri" pitchFamily="34" charset="-120"/>
+              </a:rPr>
+              <a:t>Phase 3</a:t>
+            </a:r>
+            <a:endParaRPr lang="en-US" sz="1000" dirty="0"/>
+          </a:p>
+        </p:txBody>
+      </p:sp>
+      <p:sp>
+        <p:nvSpPr>
+          <p:cNvPr id="22" name="Text 17"/>
+          <p:cNvSpPr/>
+          <p:nvPr/>
+        </p:nvSpPr>
+        <p:spPr>
+          <a:xfrm>
+            <a:off x="1828800" y="4069080"/>
+            <a:ext cx="6309360" cy="274320"/>
+          </a:xfrm>
+          <a:prstGeom prst="rect">
+            <a:avLst/>
+          </a:prstGeom>
+          <a:noFill/>
+          <a:ln/>
+        </p:spPr>
+        <p:txBody>
+          <a:bodyPr wrap="square" lIns="0" tIns="0" rIns="0" bIns="0" rtlCol="0" anchor="ctr"/>
+          <a:lstStyle/>
+          <a:p>
+            <a:pPr indent="0" marL="0">
+              <a:buNone/>
+            </a:pPr>
+            <a:r>
+              <a:rPr lang="en-US" sz="1400" b="1" dirty="0">
+                <a:solidFill>
+                  <a:srgbClr val="1E293B"/>
+                </a:solidFill>
+                <a:latin typeface="Calibri" pitchFamily="34" charset="0"/>
+                <a:ea typeface="Calibri" pitchFamily="34" charset="-122"/>
+                <a:cs typeface="Calibri" pitchFamily="34" charset="-120"/>
+              </a:rPr>
+              <a:t>Mobile App &amp; Browser Extension</a:t>
+            </a:r>
+            <a:endParaRPr lang="en-US" sz="1400" dirty="0"/>
+          </a:p>
+        </p:txBody>
+      </p:sp>
+      <p:sp>
+        <p:nvSpPr>
+          <p:cNvPr id="23" name="Text 18"/>
+          <p:cNvSpPr/>
+          <p:nvPr/>
+        </p:nvSpPr>
+        <p:spPr>
+          <a:xfrm>
+            <a:off x="1828800" y="4343400"/>
+            <a:ext cx="6309360" cy="274320"/>
+          </a:xfrm>
+          <a:prstGeom prst="rect">
+            <a:avLst/>
+          </a:prstGeom>
+          <a:noFill/>
+          <a:ln/>
+        </p:spPr>
+        <p:txBody>
+          <a:bodyPr wrap="square" lIns="0" tIns="0" rIns="0" bIns="0" rtlCol="0" anchor="ctr"/>
+          <a:lstStyle/>
+          <a:p>
+            <a:pPr indent="0" marL="0">
+              <a:buNone/>
+            </a:pPr>
+            <a:r>
+              <a:rPr lang="en-US" sz="1100" dirty="0">
+                <a:solidFill>
+                  <a:srgbClr val="64748B"/>
+                </a:solidFill>
+                <a:latin typeface="Calibri" pitchFamily="34" charset="0"/>
+                <a:ea typeface="Calibri" pitchFamily="34" charset="-122"/>
+                <a:cs typeface="Calibri" pitchFamily="34" charset="-120"/>
+              </a:rPr>
+              <a:t>Real-time price alerts and one-click comparison while browsing.</a:t>
+            </a:r>
+            <a:endParaRPr lang="en-US" sz="1100" dirty="0"/>
+          </a:p>
+        </p:txBody>
+      </p:sp>
+    </p:spTree>
+  </p:cSld>
+  <p:clrMapOvr>
+    <a:masterClrMapping/>
+  </p:clrMapOvr>
+</p:sld>
+</file>
+
+<file path=ppt/slides/slide11.xml><?xml version="1.0" encoding="utf-8"?>
+<p:sld xmlns:a="http://schemas.openxmlformats.org/drawingml/2006/main" xmlns:r="http://schemas.openxmlformats.org/officeDocument/2006/relationships" xmlns:p="http://schemas.openxmlformats.org/presentationml/2006/main">
+  <p:cSld name="Slide 11">
+    <p:bg>
+      <p:bgPr>
+        <a:solidFill>
           <a:srgbClr val="0F172A"/>
         </a:solidFill>
       </p:bgPr>
@@ -5521,8 +6324,8 @@
         </p:nvSpPr>
         <p:spPr>
           <a:xfrm>
-            <a:off x="640080" y="365760"/>
-            <a:ext cx="3657600" cy="320040"/>
+            <a:off x="640080" y="320040"/>
+            <a:ext cx="2743200" cy="274320"/>
           </a:xfrm>
           <a:prstGeom prst="rect">
             <a:avLst/>
@@ -5546,7 +6349,7 @@
                 <a:ea typeface="Calibri" pitchFamily="34" charset="-122"/>
                 <a:cs typeface="Calibri" pitchFamily="34" charset="-120"/>
               </a:rPr>
-              <a:t>TECHNICAL APPROACH</a:t>
+              <a:t>ARCHITECTURE</a:t>
             </a:r>
             <a:endParaRPr lang="en-US" sz="1100" dirty="0"/>
           </a:p>
@@ -5560,24 +6363,24 @@
         </p:nvSpPr>
         <p:spPr>
           <a:xfrm>
-            <a:off x="640080" y="685800"/>
-            <a:ext cx="7772400" cy="640080"/>
-          </a:xfrm>
-          <a:prstGeom prst="rect">
-            <a:avLst/>
-          </a:prstGeom>
-          <a:noFill/>
-          <a:ln/>
-        </p:spPr>
-        <p:txBody>
-          <a:bodyPr wrap="square" lIns="0" tIns="0" rIns="0" bIns="0" rtlCol="0" anchor="ctr"/>
-          <a:lstStyle/>
-          <a:p>
-            <a:pPr indent="0" marL="0">
-              <a:buNone/>
-            </a:pPr>
-            <a:r>
-              <a:rPr lang="en-US" sz="3200" b="1" dirty="0">
+            <a:off x="640080" y="640080"/>
+            <a:ext cx="7772400" cy="457200"/>
+          </a:xfrm>
+          <a:prstGeom prst="rect">
+            <a:avLst/>
+          </a:prstGeom>
+          <a:noFill/>
+          <a:ln/>
+        </p:spPr>
+        <p:txBody>
+          <a:bodyPr wrap="square" lIns="0" tIns="0" rIns="0" bIns="0" rtlCol="0" anchor="ctr"/>
+          <a:lstStyle/>
+          <a:p>
+            <a:pPr indent="0" marL="0">
+              <a:buNone/>
+            </a:pPr>
+            <a:r>
+              <a:rPr lang="en-US" sz="2800" b="1" dirty="0">
                 <a:solidFill>
                   <a:srgbClr val="1E293B"/>
                 </a:solidFill>
@@ -5585,9 +6388,9 @@
                 <a:ea typeface="Georgia" pitchFamily="34" charset="-122"/>
                 <a:cs typeface="Georgia" pitchFamily="34" charset="-120"/>
               </a:rPr>
-              <a:t>How PriceHawk Works</a:t>
-            </a:r>
-            <a:endParaRPr lang="en-US" sz="3200" dirty="0"/>
+              <a:t>System Architecture</a:t>
+            </a:r>
+            <a:endParaRPr lang="en-US" sz="2800" dirty="0"/>
           </a:p>
         </p:txBody>
       </p:sp>
@@ -5599,14 +6402,14 @@
         </p:nvSpPr>
         <p:spPr>
           <a:xfrm>
-            <a:off x="457200" y="1554480"/>
-            <a:ext cx="1920240" cy="2286000"/>
+            <a:off x="1371600" y="1234440"/>
+            <a:ext cx="6400800" cy="594360"/>
           </a:xfrm>
           <a:prstGeom prst="rect">
             <a:avLst/>
           </a:prstGeom>
           <a:solidFill>
-            <a:srgbClr val="FFFFFF"/>
+            <a:srgbClr val="1E3A5F"/>
           </a:solidFill>
           <a:ln/>
           <a:effectLst>
@@ -5618,163 +6421,9 @@
           </a:effectLst>
         </p:spPr>
       </p:sp>
-      <p:sp>
-        <p:nvSpPr>
-          <p:cNvPr id="5" name="Shape 3"/>
-          <p:cNvSpPr/>
-          <p:nvPr/>
-        </p:nvSpPr>
-        <p:spPr>
-          <a:xfrm>
-            <a:off x="1143000" y="1691640"/>
-            <a:ext cx="502920" cy="502920"/>
-          </a:xfrm>
-          <a:prstGeom prst="ellipse">
-            <a:avLst/>
-          </a:prstGeom>
-          <a:solidFill>
-            <a:srgbClr val="D97706"/>
-          </a:solidFill>
-          <a:ln/>
-        </p:spPr>
-      </p:sp>
-      <p:sp>
-        <p:nvSpPr>
-          <p:cNvPr id="6" name="Text 4"/>
-          <p:cNvSpPr/>
-          <p:nvPr/>
-        </p:nvSpPr>
-        <p:spPr>
-          <a:xfrm>
-            <a:off x="1143000" y="1691640"/>
-            <a:ext cx="502920" cy="502920"/>
-          </a:xfrm>
-          <a:prstGeom prst="rect">
-            <a:avLst/>
-          </a:prstGeom>
-          <a:noFill/>
-          <a:ln/>
-        </p:spPr>
-        <p:txBody>
-          <a:bodyPr wrap="square" lIns="0" tIns="0" rIns="0" bIns="0" rtlCol="0" anchor="ctr"/>
-          <a:lstStyle/>
-          <a:p>
-            <a:pPr algn="ctr" indent="0" marL="0">
-              <a:buNone/>
-            </a:pPr>
-            <a:r>
-              <a:rPr lang="en-US" sz="1400" b="1" dirty="0">
-                <a:solidFill>
-                  <a:srgbClr val="FFFFFF"/>
-                </a:solidFill>
-                <a:latin typeface="Calibri" pitchFamily="34" charset="0"/>
-                <a:ea typeface="Calibri" pitchFamily="34" charset="-122"/>
-                <a:cs typeface="Calibri" pitchFamily="34" charset="-120"/>
-              </a:rPr>
-              <a:t>01</a:t>
-            </a:r>
-            <a:endParaRPr lang="en-US" sz="1400" dirty="0"/>
-          </a:p>
-        </p:txBody>
-      </p:sp>
-      <p:sp>
-        <p:nvSpPr>
-          <p:cNvPr id="7" name="Text 5"/>
-          <p:cNvSpPr/>
-          <p:nvPr/>
-        </p:nvSpPr>
-        <p:spPr>
-          <a:xfrm>
-            <a:off x="594360" y="2331720"/>
-            <a:ext cx="1645920" cy="457200"/>
-          </a:xfrm>
-          <a:prstGeom prst="rect">
-            <a:avLst/>
-          </a:prstGeom>
-          <a:noFill/>
-          <a:ln/>
-        </p:spPr>
-        <p:txBody>
-          <a:bodyPr wrap="square" lIns="0" tIns="0" rIns="0" bIns="0" rtlCol="0" anchor="ctr"/>
-          <a:lstStyle/>
-          <a:p>
-            <a:pPr algn="ctr" indent="0" marL="0">
-              <a:buNone/>
-            </a:pPr>
-            <a:r>
-              <a:rPr lang="en-US" sz="1300" b="1" dirty="0">
-                <a:solidFill>
-                  <a:srgbClr val="1E293B"/>
-                </a:solidFill>
-                <a:latin typeface="Calibri" pitchFamily="34" charset="0"/>
-                <a:ea typeface="Calibri" pitchFamily="34" charset="-122"/>
-                <a:cs typeface="Calibri" pitchFamily="34" charset="-120"/>
-              </a:rPr>
-              <a:t>Data</a:t>
-            </a:r>
-            <a:endParaRPr lang="en-US" sz="1300" dirty="0"/>
-          </a:p>
-          <a:p>
-            <a:pPr algn="ctr" indent="0" marL="0">
-              <a:buNone/>
-            </a:pPr>
-            <a:r>
-              <a:rPr lang="en-US" sz="1300" b="1" dirty="0">
-                <a:solidFill>
-                  <a:srgbClr val="1E293B"/>
-                </a:solidFill>
-                <a:latin typeface="Calibri" pitchFamily="34" charset="0"/>
-                <a:ea typeface="Calibri" pitchFamily="34" charset="-122"/>
-                <a:cs typeface="Calibri" pitchFamily="34" charset="-120"/>
-              </a:rPr>
-              <a:t>Collection</a:t>
-            </a:r>
-            <a:endParaRPr lang="en-US" sz="1300" dirty="0"/>
-          </a:p>
-        </p:txBody>
-      </p:sp>
-      <p:sp>
-        <p:nvSpPr>
-          <p:cNvPr id="8" name="Text 6"/>
-          <p:cNvSpPr/>
-          <p:nvPr/>
-        </p:nvSpPr>
-        <p:spPr>
-          <a:xfrm>
-            <a:off x="594360" y="2834640"/>
-            <a:ext cx="1645920" cy="822960"/>
-          </a:xfrm>
-          <a:prstGeom prst="rect">
-            <a:avLst/>
-          </a:prstGeom>
-          <a:noFill/>
-          <a:ln/>
-        </p:spPr>
-        <p:txBody>
-          <a:bodyPr wrap="square" lIns="0" tIns="0" rIns="0" bIns="0" rtlCol="0" anchor="ctr"/>
-          <a:lstStyle/>
-          <a:p>
-            <a:pPr algn="ctr" indent="0" marL="0">
-              <a:buNone/>
-            </a:pPr>
-            <a:r>
-              <a:rPr lang="en-US" sz="1050" dirty="0">
-                <a:solidFill>
-                  <a:srgbClr val="64748B"/>
-                </a:solidFill>
-                <a:latin typeface="Calibri" pitchFamily="34" charset="0"/>
-                <a:ea typeface="Calibri" pitchFamily="34" charset="-122"/>
-                <a:cs typeface="Calibri" pitchFamily="34" charset="-120"/>
-              </a:rPr>
-              <a:t>Web scraping product listings, prices &amp; reviews from retailers</a:t>
-            </a:r>
-            <a:endParaRPr lang="en-US" sz="1050" dirty="0"/>
-          </a:p>
-        </p:txBody>
-      </p:sp>
       <p:pic>
         <p:nvPicPr>
-          <p:cNvPr id="9" name="Image 0" descr="preencoded.png">    </p:cNvPr>
+          <p:cNvPr id="5" name="Image 0" descr="preencoded.png">    </p:cNvPr>
           <p:cNvPicPr>
             <a:picLocks noChangeAspect="1"/>
           </p:cNvPicPr>
@@ -5788,8 +6437,8 @@
         </p:blipFill>
         <p:spPr>
           <a:xfrm>
-            <a:off x="2377440" y="2468880"/>
-            <a:ext cx="274320" cy="274320"/>
+            <a:off x="3246120" y="1298448"/>
+            <a:ext cx="320040" cy="320040"/>
           </a:xfrm>
           <a:prstGeom prst="rect">
             <a:avLst/>
@@ -5798,14 +6447,132 @@
       </p:pic>
       <p:sp>
         <p:nvSpPr>
+          <p:cNvPr id="6" name="Text 3"/>
+          <p:cNvSpPr/>
+          <p:nvPr/>
+        </p:nvSpPr>
+        <p:spPr>
+          <a:xfrm>
+            <a:off x="3611880" y="1280160"/>
+            <a:ext cx="3931920" cy="256032"/>
+          </a:xfrm>
+          <a:prstGeom prst="rect">
+            <a:avLst/>
+          </a:prstGeom>
+          <a:noFill/>
+          <a:ln/>
+        </p:spPr>
+        <p:txBody>
+          <a:bodyPr wrap="square" lIns="0" tIns="0" rIns="0" bIns="0" rtlCol="0" anchor="ctr"/>
+          <a:lstStyle/>
+          <a:p>
+            <a:pPr indent="0" marL="0">
+              <a:buNone/>
+            </a:pPr>
+            <a:r>
+              <a:rPr lang="en-US" sz="1300" b="1" dirty="0">
+                <a:solidFill>
+                  <a:srgbClr val="FFFFFF"/>
+                </a:solidFill>
+                <a:latin typeface="Calibri" pitchFamily="34" charset="0"/>
+                <a:ea typeface="Calibri" pitchFamily="34" charset="-122"/>
+                <a:cs typeface="Calibri" pitchFamily="34" charset="-120"/>
+              </a:rPr>
+              <a:t>PriceHawk  (app.py)  —  Streamlit Frontend</a:t>
+            </a:r>
+            <a:endParaRPr lang="en-US" sz="1300" dirty="0"/>
+          </a:p>
+        </p:txBody>
+      </p:sp>
+      <p:sp>
+        <p:nvSpPr>
+          <p:cNvPr id="7" name="Text 4"/>
+          <p:cNvSpPr/>
+          <p:nvPr/>
+        </p:nvSpPr>
+        <p:spPr>
+          <a:xfrm>
+            <a:off x="2286000" y="1554480"/>
+            <a:ext cx="4572000" cy="201168"/>
+          </a:xfrm>
+          <a:prstGeom prst="rect">
+            <a:avLst/>
+          </a:prstGeom>
+          <a:noFill/>
+          <a:ln/>
+        </p:spPr>
+        <p:txBody>
+          <a:bodyPr wrap="square" lIns="0" tIns="0" rIns="0" bIns="0" rtlCol="0" anchor="ctr"/>
+          <a:lstStyle/>
+          <a:p>
+            <a:pPr algn="ctr" indent="0" marL="0">
+              <a:buNone/>
+            </a:pPr>
+            <a:r>
+              <a:rPr lang="en-US" sz="950" dirty="0">
+                <a:solidFill>
+                  <a:srgbClr val="94A3B8"/>
+                </a:solidFill>
+                <a:latin typeface="Calibri" pitchFamily="34" charset="0"/>
+                <a:ea typeface="Calibri" pitchFamily="34" charset="-122"/>
+                <a:cs typeface="Calibri" pitchFamily="34" charset="-120"/>
+              </a:rPr>
+              <a:t>Upload CSV  •  Filter &amp; Configure  •  Results Dashboard  •  Export</a:t>
+            </a:r>
+            <a:endParaRPr lang="en-US" sz="950" dirty="0"/>
+          </a:p>
+        </p:txBody>
+      </p:sp>
+      <p:sp>
+        <p:nvSpPr>
+          <p:cNvPr id="8" name="Shape 5"/>
+          <p:cNvSpPr/>
+          <p:nvPr/>
+        </p:nvSpPr>
+        <p:spPr>
+          <a:xfrm>
+            <a:off x="2926080" y="1828800"/>
+            <a:ext cx="36576" cy="320040"/>
+          </a:xfrm>
+          <a:prstGeom prst="rect">
+            <a:avLst/>
+          </a:prstGeom>
+          <a:solidFill>
+            <a:srgbClr val="D97706"/>
+          </a:solidFill>
+          <a:ln/>
+        </p:spPr>
+      </p:sp>
+      <p:sp>
+        <p:nvSpPr>
+          <p:cNvPr id="9" name="Shape 6"/>
+          <p:cNvSpPr/>
+          <p:nvPr/>
+        </p:nvSpPr>
+        <p:spPr>
+          <a:xfrm>
+            <a:off x="6172200" y="1828800"/>
+            <a:ext cx="36576" cy="320040"/>
+          </a:xfrm>
+          <a:prstGeom prst="rect">
+            <a:avLst/>
+          </a:prstGeom>
+          <a:solidFill>
+            <a:srgbClr val="D97706"/>
+          </a:solidFill>
+          <a:ln/>
+        </p:spPr>
+      </p:sp>
+      <p:sp>
+        <p:nvSpPr>
           <p:cNvPr id="10" name="Shape 7"/>
           <p:cNvSpPr/>
           <p:nvPr/>
         </p:nvSpPr>
         <p:spPr>
           <a:xfrm>
-            <a:off x="2651760" y="1554480"/>
-            <a:ext cx="1920240" cy="2286000"/>
+            <a:off x="1371600" y="2148840"/>
+            <a:ext cx="3108960" cy="1645920"/>
           </a:xfrm>
           <a:prstGeom prst="rect">
             <a:avLst/>
@@ -5831,10 +6598,10 @@
         </p:nvSpPr>
         <p:spPr>
           <a:xfrm>
-            <a:off x="3337560" y="1691640"/>
-            <a:ext cx="502920" cy="502920"/>
-          </a:xfrm>
-          <a:prstGeom prst="ellipse">
+            <a:off x="1371600" y="2148840"/>
+            <a:ext cx="3108960" cy="45720"/>
+          </a:xfrm>
+          <a:prstGeom prst="rect">
             <a:avLst/>
           </a:prstGeom>
           <a:solidFill>
@@ -5843,143 +6610,9 @@
           <a:ln/>
         </p:spPr>
       </p:sp>
-      <p:sp>
-        <p:nvSpPr>
-          <p:cNvPr id="12" name="Text 9"/>
-          <p:cNvSpPr/>
-          <p:nvPr/>
-        </p:nvSpPr>
-        <p:spPr>
-          <a:xfrm>
-            <a:off x="3337560" y="1691640"/>
-            <a:ext cx="502920" cy="502920"/>
-          </a:xfrm>
-          <a:prstGeom prst="rect">
-            <a:avLst/>
-          </a:prstGeom>
-          <a:noFill/>
-          <a:ln/>
-        </p:spPr>
-        <p:txBody>
-          <a:bodyPr wrap="square" lIns="0" tIns="0" rIns="0" bIns="0" rtlCol="0" anchor="ctr"/>
-          <a:lstStyle/>
-          <a:p>
-            <a:pPr algn="ctr" indent="0" marL="0">
-              <a:buNone/>
-            </a:pPr>
-            <a:r>
-              <a:rPr lang="en-US" sz="1400" b="1" dirty="0">
-                <a:solidFill>
-                  <a:srgbClr val="FFFFFF"/>
-                </a:solidFill>
-                <a:latin typeface="Calibri" pitchFamily="34" charset="0"/>
-                <a:ea typeface="Calibri" pitchFamily="34" charset="-122"/>
-                <a:cs typeface="Calibri" pitchFamily="34" charset="-120"/>
-              </a:rPr>
-              <a:t>02</a:t>
-            </a:r>
-            <a:endParaRPr lang="en-US" sz="1400" dirty="0"/>
-          </a:p>
-        </p:txBody>
-      </p:sp>
-      <p:sp>
-        <p:nvSpPr>
-          <p:cNvPr id="13" name="Text 10"/>
-          <p:cNvSpPr/>
-          <p:nvPr/>
-        </p:nvSpPr>
-        <p:spPr>
-          <a:xfrm>
-            <a:off x="2788920" y="2331720"/>
-            <a:ext cx="1645920" cy="457200"/>
-          </a:xfrm>
-          <a:prstGeom prst="rect">
-            <a:avLst/>
-          </a:prstGeom>
-          <a:noFill/>
-          <a:ln/>
-        </p:spPr>
-        <p:txBody>
-          <a:bodyPr wrap="square" lIns="0" tIns="0" rIns="0" bIns="0" rtlCol="0" anchor="ctr"/>
-          <a:lstStyle/>
-          <a:p>
-            <a:pPr algn="ctr" indent="0" marL="0">
-              <a:buNone/>
-            </a:pPr>
-            <a:r>
-              <a:rPr lang="en-US" sz="1300" b="1" dirty="0">
-                <a:solidFill>
-                  <a:srgbClr val="1E293B"/>
-                </a:solidFill>
-                <a:latin typeface="Calibri" pitchFamily="34" charset="0"/>
-                <a:ea typeface="Calibri" pitchFamily="34" charset="-122"/>
-                <a:cs typeface="Calibri" pitchFamily="34" charset="-120"/>
-              </a:rPr>
-              <a:t>NLP</a:t>
-            </a:r>
-            <a:endParaRPr lang="en-US" sz="1300" dirty="0"/>
-          </a:p>
-          <a:p>
-            <a:pPr algn="ctr" indent="0" marL="0">
-              <a:buNone/>
-            </a:pPr>
-            <a:r>
-              <a:rPr lang="en-US" sz="1300" b="1" dirty="0">
-                <a:solidFill>
-                  <a:srgbClr val="1E293B"/>
-                </a:solidFill>
-                <a:latin typeface="Calibri" pitchFamily="34" charset="0"/>
-                <a:ea typeface="Calibri" pitchFamily="34" charset="-122"/>
-                <a:cs typeface="Calibri" pitchFamily="34" charset="-120"/>
-              </a:rPr>
-              <a:t>Processing</a:t>
-            </a:r>
-            <a:endParaRPr lang="en-US" sz="1300" dirty="0"/>
-          </a:p>
-        </p:txBody>
-      </p:sp>
-      <p:sp>
-        <p:nvSpPr>
-          <p:cNvPr id="14" name="Text 11"/>
-          <p:cNvSpPr/>
-          <p:nvPr/>
-        </p:nvSpPr>
-        <p:spPr>
-          <a:xfrm>
-            <a:off x="2788920" y="2834640"/>
-            <a:ext cx="1645920" cy="822960"/>
-          </a:xfrm>
-          <a:prstGeom prst="rect">
-            <a:avLst/>
-          </a:prstGeom>
-          <a:noFill/>
-          <a:ln/>
-        </p:spPr>
-        <p:txBody>
-          <a:bodyPr wrap="square" lIns="0" tIns="0" rIns="0" bIns="0" rtlCol="0" anchor="ctr"/>
-          <a:lstStyle/>
-          <a:p>
-            <a:pPr algn="ctr" indent="0" marL="0">
-              <a:buNone/>
-            </a:pPr>
-            <a:r>
-              <a:rPr lang="en-US" sz="1050" dirty="0">
-                <a:solidFill>
-                  <a:srgbClr val="64748B"/>
-                </a:solidFill>
-                <a:latin typeface="Calibri" pitchFamily="34" charset="0"/>
-                <a:ea typeface="Calibri" pitchFamily="34" charset="-122"/>
-                <a:cs typeface="Calibri" pitchFamily="34" charset="-120"/>
-              </a:rPr>
-              <a:t>Text cleaning, tokenization, entity extraction using BERT embeddings</a:t>
-            </a:r>
-            <a:endParaRPr lang="en-US" sz="1050" dirty="0"/>
-          </a:p>
-        </p:txBody>
-      </p:sp>
       <p:pic>
         <p:nvPicPr>
-          <p:cNvPr id="15" name="Image 1" descr="preencoded.png">    </p:cNvPr>
+          <p:cNvPr id="12" name="Image 1" descr="preencoded.png">    </p:cNvPr>
           <p:cNvPicPr>
             <a:picLocks noChangeAspect="1"/>
           </p:cNvPicPr>
@@ -5993,8 +6626,8 @@
         </p:blipFill>
         <p:spPr>
           <a:xfrm>
-            <a:off x="4572000" y="2468880"/>
-            <a:ext cx="274320" cy="274320"/>
+            <a:off x="1554480" y="2331720"/>
+            <a:ext cx="320040" cy="320040"/>
           </a:xfrm>
           <a:prstGeom prst="rect">
             <a:avLst/>
@@ -6003,14 +6636,159 @@
       </p:pic>
       <p:sp>
         <p:nvSpPr>
-          <p:cNvPr id="16" name="Shape 12"/>
-          <p:cNvSpPr/>
-          <p:nvPr/>
-        </p:nvSpPr>
-        <p:spPr>
-          <a:xfrm>
-            <a:off x="4846320" y="1554480"/>
-            <a:ext cx="1920240" cy="2286000"/>
+          <p:cNvPr id="13" name="Text 9"/>
+          <p:cNvSpPr/>
+          <p:nvPr/>
+        </p:nvSpPr>
+        <p:spPr>
+          <a:xfrm>
+            <a:off x="1965960" y="2331720"/>
+            <a:ext cx="2331720" cy="320040"/>
+          </a:xfrm>
+          <a:prstGeom prst="rect">
+            <a:avLst/>
+          </a:prstGeom>
+          <a:noFill/>
+          <a:ln/>
+        </p:spPr>
+        <p:txBody>
+          <a:bodyPr wrap="square" lIns="0" tIns="0" rIns="0" bIns="0" rtlCol="0" anchor="ctr"/>
+          <a:lstStyle/>
+          <a:p>
+            <a:pPr indent="0" marL="0">
+              <a:buNone/>
+            </a:pPr>
+            <a:r>
+              <a:rPr lang="en-US" sz="1200" b="1" dirty="0">
+                <a:solidFill>
+                  <a:srgbClr val="1E293B"/>
+                </a:solidFill>
+                <a:latin typeface="Calibri" pitchFamily="34" charset="0"/>
+                <a:ea typeface="Calibri" pitchFamily="34" charset="-122"/>
+                <a:cs typeface="Calibri" pitchFamily="34" charset="-120"/>
+              </a:rPr>
+              <a:t>scraper.py — Price Engine</a:t>
+            </a:r>
+            <a:endParaRPr lang="en-US" sz="1200" dirty="0"/>
+          </a:p>
+        </p:txBody>
+      </p:sp>
+      <p:sp>
+        <p:nvSpPr>
+          <p:cNvPr id="14" name="Text 10"/>
+          <p:cNvSpPr/>
+          <p:nvPr/>
+        </p:nvSpPr>
+        <p:spPr>
+          <a:xfrm>
+            <a:off x="1554480" y="2743200"/>
+            <a:ext cx="2743200" cy="914400"/>
+          </a:xfrm>
+          <a:prstGeom prst="rect">
+            <a:avLst/>
+          </a:prstGeom>
+          <a:noFill/>
+          <a:ln/>
+        </p:spPr>
+        <p:txBody>
+          <a:bodyPr wrap="square" lIns="0" tIns="0" rIns="0" bIns="0" rtlCol="0" anchor="ctr"/>
+          <a:lstStyle/>
+          <a:p>
+            <a:pPr marL="342900" indent="-342900">
+              <a:spcAft>
+                <a:spcPts val="200"/>
+              </a:spcAft>
+              <a:buSzPct val="100000"/>
+              <a:buChar char="•"/>
+            </a:pPr>
+            <a:r>
+              <a:rPr lang="en-US" sz="950" dirty="0">
+                <a:solidFill>
+                  <a:srgbClr val="64748B"/>
+                </a:solidFill>
+                <a:latin typeface="Calibri" pitchFamily="34" charset="0"/>
+                <a:ea typeface="Calibri" pitchFamily="34" charset="-122"/>
+                <a:cs typeface="Calibri" pitchFamily="34" charset="-120"/>
+              </a:rPr>
+              <a:t>DDG search (3 strategies per product)</a:t>
+            </a:r>
+            <a:endParaRPr lang="en-US" sz="950" dirty="0"/>
+          </a:p>
+          <a:p>
+            <a:pPr marL="342900" indent="-342900">
+              <a:spcAft>
+                <a:spcPts val="200"/>
+              </a:spcAft>
+              <a:buSzPct val="100000"/>
+              <a:buChar char="•"/>
+            </a:pPr>
+            <a:r>
+              <a:rPr lang="en-US" sz="950" dirty="0">
+                <a:solidFill>
+                  <a:srgbClr val="64748B"/>
+                </a:solidFill>
+                <a:latin typeface="Calibri" pitchFamily="34" charset="0"/>
+                <a:ea typeface="Calibri" pitchFamily="34" charset="-122"/>
+                <a:cs typeface="Calibri" pitchFamily="34" charset="-120"/>
+              </a:rPr>
+              <a:t>Filter known retailers only</a:t>
+            </a:r>
+            <a:endParaRPr lang="en-US" sz="950" dirty="0"/>
+          </a:p>
+          <a:p>
+            <a:pPr marL="342900" indent="-342900">
+              <a:spcAft>
+                <a:spcPts val="200"/>
+              </a:spcAft>
+              <a:buSzPct val="100000"/>
+              <a:buChar char="•"/>
+            </a:pPr>
+            <a:r>
+              <a:rPr lang="en-US" sz="950" dirty="0">
+                <a:solidFill>
+                  <a:srgbClr val="64748B"/>
+                </a:solidFill>
+                <a:latin typeface="Calibri" pitchFamily="34" charset="0"/>
+                <a:ea typeface="Calibri" pitchFamily="34" charset="-122"/>
+                <a:cs typeface="Calibri" pitchFamily="34" charset="-120"/>
+              </a:rPr>
+              <a:t>Extract price: snippets → meta → JSON-LD → HTML</a:t>
+            </a:r>
+            <a:endParaRPr lang="en-US" sz="950" dirty="0"/>
+          </a:p>
+          <a:p>
+            <a:pPr marL="342900" indent="-342900">
+              <a:spcAft>
+                <a:spcPts val="200"/>
+              </a:spcAft>
+              <a:buSzPct val="100000"/>
+              <a:buChar char="•"/>
+            </a:pPr>
+            <a:r>
+              <a:rPr lang="en-US" sz="950" dirty="0">
+                <a:solidFill>
+                  <a:srgbClr val="64748B"/>
+                </a:solidFill>
+                <a:latin typeface="Calibri" pitchFamily="34" charset="0"/>
+                <a:ea typeface="Calibri" pitchFamily="34" charset="-122"/>
+                <a:cs typeface="Calibri" pitchFamily="34" charset="-120"/>
+              </a:rPr>
+              <a:t>Validate: 30%-250% of base price</a:t>
+            </a:r>
+            <a:endParaRPr lang="en-US" sz="950" dirty="0"/>
+          </a:p>
+        </p:txBody>
+      </p:sp>
+      <p:sp>
+        <p:nvSpPr>
+          <p:cNvPr id="15" name="Shape 11"/>
+          <p:cNvSpPr/>
+          <p:nvPr/>
+        </p:nvSpPr>
+        <p:spPr>
+          <a:xfrm>
+            <a:off x="4663440" y="2148840"/>
+            <a:ext cx="3108960" cy="1645920"/>
           </a:xfrm>
           <a:prstGeom prst="rect">
             <a:avLst/>
@@ -6030,16 +6808,16 @@
       </p:sp>
       <p:sp>
         <p:nvSpPr>
-          <p:cNvPr id="17" name="Shape 13"/>
-          <p:cNvSpPr/>
-          <p:nvPr/>
-        </p:nvSpPr>
-        <p:spPr>
-          <a:xfrm>
-            <a:off x="5532120" y="1691640"/>
-            <a:ext cx="502920" cy="502920"/>
-          </a:xfrm>
-          <a:prstGeom prst="ellipse">
+          <p:cNvPr id="16" name="Shape 12"/>
+          <p:cNvSpPr/>
+          <p:nvPr/>
+        </p:nvSpPr>
+        <p:spPr>
+          <a:xfrm>
+            <a:off x="4663440" y="2148840"/>
+            <a:ext cx="3108960" cy="45720"/>
+          </a:xfrm>
+          <a:prstGeom prst="rect">
             <a:avLst/>
           </a:prstGeom>
           <a:solidFill>
@@ -6048,143 +6826,9 @@
           <a:ln/>
         </p:spPr>
       </p:sp>
-      <p:sp>
-        <p:nvSpPr>
-          <p:cNvPr id="18" name="Text 14"/>
-          <p:cNvSpPr/>
-          <p:nvPr/>
-        </p:nvSpPr>
-        <p:spPr>
-          <a:xfrm>
-            <a:off x="5532120" y="1691640"/>
-            <a:ext cx="502920" cy="502920"/>
-          </a:xfrm>
-          <a:prstGeom prst="rect">
-            <a:avLst/>
-          </a:prstGeom>
-          <a:noFill/>
-          <a:ln/>
-        </p:spPr>
-        <p:txBody>
-          <a:bodyPr wrap="square" lIns="0" tIns="0" rIns="0" bIns="0" rtlCol="0" anchor="ctr"/>
-          <a:lstStyle/>
-          <a:p>
-            <a:pPr algn="ctr" indent="0" marL="0">
-              <a:buNone/>
-            </a:pPr>
-            <a:r>
-              <a:rPr lang="en-US" sz="1400" b="1" dirty="0">
-                <a:solidFill>
-                  <a:srgbClr val="FFFFFF"/>
-                </a:solidFill>
-                <a:latin typeface="Calibri" pitchFamily="34" charset="0"/>
-                <a:ea typeface="Calibri" pitchFamily="34" charset="-122"/>
-                <a:cs typeface="Calibri" pitchFamily="34" charset="-120"/>
-              </a:rPr>
-              <a:t>03</a:t>
-            </a:r>
-            <a:endParaRPr lang="en-US" sz="1400" dirty="0"/>
-          </a:p>
-        </p:txBody>
-      </p:sp>
-      <p:sp>
-        <p:nvSpPr>
-          <p:cNvPr id="19" name="Text 15"/>
-          <p:cNvSpPr/>
-          <p:nvPr/>
-        </p:nvSpPr>
-        <p:spPr>
-          <a:xfrm>
-            <a:off x="4983480" y="2331720"/>
-            <a:ext cx="1645920" cy="457200"/>
-          </a:xfrm>
-          <a:prstGeom prst="rect">
-            <a:avLst/>
-          </a:prstGeom>
-          <a:noFill/>
-          <a:ln/>
-        </p:spPr>
-        <p:txBody>
-          <a:bodyPr wrap="square" lIns="0" tIns="0" rIns="0" bIns="0" rtlCol="0" anchor="ctr"/>
-          <a:lstStyle/>
-          <a:p>
-            <a:pPr algn="ctr" indent="0" marL="0">
-              <a:buNone/>
-            </a:pPr>
-            <a:r>
-              <a:rPr lang="en-US" sz="1300" b="1" dirty="0">
-                <a:solidFill>
-                  <a:srgbClr val="1E293B"/>
-                </a:solidFill>
-                <a:latin typeface="Calibri" pitchFamily="34" charset="0"/>
-                <a:ea typeface="Calibri" pitchFamily="34" charset="-122"/>
-                <a:cs typeface="Calibri" pitchFamily="34" charset="-120"/>
-              </a:rPr>
-              <a:t>Product</a:t>
-            </a:r>
-            <a:endParaRPr lang="en-US" sz="1300" dirty="0"/>
-          </a:p>
-          <a:p>
-            <a:pPr algn="ctr" indent="0" marL="0">
-              <a:buNone/>
-            </a:pPr>
-            <a:r>
-              <a:rPr lang="en-US" sz="1300" b="1" dirty="0">
-                <a:solidFill>
-                  <a:srgbClr val="1E293B"/>
-                </a:solidFill>
-                <a:latin typeface="Calibri" pitchFamily="34" charset="0"/>
-                <a:ea typeface="Calibri" pitchFamily="34" charset="-122"/>
-                <a:cs typeface="Calibri" pitchFamily="34" charset="-120"/>
-              </a:rPr>
-              <a:t>Matching</a:t>
-            </a:r>
-            <a:endParaRPr lang="en-US" sz="1300" dirty="0"/>
-          </a:p>
-        </p:txBody>
-      </p:sp>
-      <p:sp>
-        <p:nvSpPr>
-          <p:cNvPr id="20" name="Text 16"/>
-          <p:cNvSpPr/>
-          <p:nvPr/>
-        </p:nvSpPr>
-        <p:spPr>
-          <a:xfrm>
-            <a:off x="4983480" y="2834640"/>
-            <a:ext cx="1645920" cy="822960"/>
-          </a:xfrm>
-          <a:prstGeom prst="rect">
-            <a:avLst/>
-          </a:prstGeom>
-          <a:noFill/>
-          <a:ln/>
-        </p:spPr>
-        <p:txBody>
-          <a:bodyPr wrap="square" lIns="0" tIns="0" rIns="0" bIns="0" rtlCol="0" anchor="ctr"/>
-          <a:lstStyle/>
-          <a:p>
-            <a:pPr algn="ctr" indent="0" marL="0">
-              <a:buNone/>
-            </a:pPr>
-            <a:r>
-              <a:rPr lang="en-US" sz="1050" dirty="0">
-                <a:solidFill>
-                  <a:srgbClr val="64748B"/>
-                </a:solidFill>
-                <a:latin typeface="Calibri" pitchFamily="34" charset="0"/>
-                <a:ea typeface="Calibri" pitchFamily="34" charset="-122"/>
-                <a:cs typeface="Calibri" pitchFamily="34" charset="-120"/>
-              </a:rPr>
-              <a:t>Semantic similarity matching to link identical products across stores</a:t>
-            </a:r>
-            <a:endParaRPr lang="en-US" sz="1050" dirty="0"/>
-          </a:p>
-        </p:txBody>
-      </p:sp>
       <p:pic>
         <p:nvPicPr>
-          <p:cNvPr id="21" name="Image 2" descr="preencoded.png">    </p:cNvPr>
+          <p:cNvPr id="17" name="Image 2" descr="preencoded.png">    </p:cNvPr>
           <p:cNvPicPr>
             <a:picLocks noChangeAspect="1"/>
           </p:cNvPicPr>
@@ -6198,8 +6842,8 @@
         </p:blipFill>
         <p:spPr>
           <a:xfrm>
-            <a:off x="6766560" y="2468880"/>
-            <a:ext cx="274320" cy="274320"/>
+            <a:off x="4846320" y="2331720"/>
+            <a:ext cx="320040" cy="320040"/>
           </a:xfrm>
           <a:prstGeom prst="rect">
             <a:avLst/>
@@ -6208,50 +6852,325 @@
       </p:pic>
       <p:sp>
         <p:nvSpPr>
-          <p:cNvPr id="22" name="Shape 17"/>
-          <p:cNvSpPr/>
-          <p:nvPr/>
-        </p:nvSpPr>
-        <p:spPr>
-          <a:xfrm>
-            <a:off x="7040880" y="1554480"/>
-            <a:ext cx="1920240" cy="2286000"/>
-          </a:xfrm>
-          <a:prstGeom prst="rect">
-            <a:avLst/>
-          </a:prstGeom>
-          <a:solidFill>
-            <a:srgbClr val="FFFFFF"/>
-          </a:solidFill>
-          <a:ln/>
-          <a:effectLst>
-            <a:outerShdw sx="100000" sy="100000" kx="0" ky="0" algn="bl" rotWithShape="0" blurRad="50800" dist="25400" dir="8100000">
-              <a:srgbClr val="000000">
-                <a:alpha val="10000"/>
-              </a:srgbClr>
-            </a:outerShdw>
-          </a:effectLst>
-        </p:spPr>
-      </p:sp>
-      <p:sp>
-        <p:nvSpPr>
-          <p:cNvPr id="23" name="Shape 18"/>
-          <p:cNvSpPr/>
-          <p:nvPr/>
-        </p:nvSpPr>
-        <p:spPr>
-          <a:xfrm>
-            <a:off x="7726680" y="1691640"/>
-            <a:ext cx="502920" cy="502920"/>
-          </a:xfrm>
-          <a:prstGeom prst="ellipse">
-            <a:avLst/>
-          </a:prstGeom>
-          <a:solidFill>
-            <a:srgbClr val="D97706"/>
-          </a:solidFill>
-          <a:ln/>
-        </p:spPr>
+          <p:cNvPr id="18" name="Text 13"/>
+          <p:cNvSpPr/>
+          <p:nvPr/>
+        </p:nvSpPr>
+        <p:spPr>
+          <a:xfrm>
+            <a:off x="5257800" y="2331720"/>
+            <a:ext cx="2331720" cy="320040"/>
+          </a:xfrm>
+          <a:prstGeom prst="rect">
+            <a:avLst/>
+          </a:prstGeom>
+          <a:noFill/>
+          <a:ln/>
+        </p:spPr>
+        <p:txBody>
+          <a:bodyPr wrap="square" lIns="0" tIns="0" rIns="0" bIns="0" rtlCol="0" anchor="ctr"/>
+          <a:lstStyle/>
+          <a:p>
+            <a:pPr indent="0" marL="0">
+              <a:buNone/>
+            </a:pPr>
+            <a:r>
+              <a:rPr lang="en-US" sz="1200" b="1" dirty="0">
+                <a:solidFill>
+                  <a:srgbClr val="1E293B"/>
+                </a:solidFill>
+                <a:latin typeface="Calibri" pitchFamily="34" charset="0"/>
+                <a:ea typeface="Calibri" pitchFamily="34" charset="-122"/>
+                <a:cs typeface="Calibri" pitchFamily="34" charset="-120"/>
+              </a:rPr>
+              <a:t>ai_agents.py — Claude AI Team</a:t>
+            </a:r>
+            <a:endParaRPr lang="en-US" sz="1200" dirty="0"/>
+          </a:p>
+        </p:txBody>
+      </p:sp>
+      <p:sp>
+        <p:nvSpPr>
+          <p:cNvPr id="19" name="Text 14"/>
+          <p:cNvSpPr/>
+          <p:nvPr/>
+        </p:nvSpPr>
+        <p:spPr>
+          <a:xfrm>
+            <a:off x="4846320" y="2743200"/>
+            <a:ext cx="2743200" cy="822960"/>
+          </a:xfrm>
+          <a:prstGeom prst="rect">
+            <a:avLst/>
+          </a:prstGeom>
+          <a:noFill/>
+          <a:ln/>
+        </p:spPr>
+        <p:txBody>
+          <a:bodyPr wrap="square" lIns="0" tIns="0" rIns="0" bIns="0" rtlCol="0" anchor="ctr"/>
+          <a:lstStyle/>
+          <a:p>
+            <a:pPr marL="342900" indent="-342900">
+              <a:spcAft>
+                <a:spcPts val="200"/>
+              </a:spcAft>
+              <a:buSzPct val="100000"/>
+              <a:buChar char="•"/>
+            </a:pPr>
+            <a:r>
+              <a:rPr lang="en-US" sz="950" dirty="0">
+                <a:solidFill>
+                  <a:srgbClr val="64748B"/>
+                </a:solidFill>
+                <a:latin typeface="Calibri" pitchFamily="34" charset="0"/>
+                <a:ea typeface="Calibri" pitchFamily="34" charset="-122"/>
+                <a:cs typeface="Calibri" pitchFamily="34" charset="-120"/>
+              </a:rPr>
+              <a:t>Agent 1: Market Analyst — insights &amp; risks</a:t>
+            </a:r>
+            <a:endParaRPr lang="en-US" sz="950" dirty="0"/>
+          </a:p>
+          <a:p>
+            <a:pPr marL="342900" indent="-342900">
+              <a:spcAft>
+                <a:spcPts val="200"/>
+              </a:spcAft>
+              <a:buSzPct val="100000"/>
+              <a:buChar char="•"/>
+            </a:pPr>
+            <a:r>
+              <a:rPr lang="en-US" sz="950" dirty="0">
+                <a:solidFill>
+                  <a:srgbClr val="64748B"/>
+                </a:solidFill>
+                <a:latin typeface="Calibri" pitchFamily="34" charset="0"/>
+                <a:ea typeface="Calibri" pitchFamily="34" charset="-122"/>
+                <a:cs typeface="Calibri" pitchFamily="34" charset="-120"/>
+              </a:rPr>
+              <a:t>Agent 2: Pricing Strategist — actions &amp; margins</a:t>
+            </a:r>
+            <a:endParaRPr lang="en-US" sz="950" dirty="0"/>
+          </a:p>
+          <a:p>
+            <a:pPr marL="342900" indent="-342900">
+              <a:spcAft>
+                <a:spcPts val="200"/>
+              </a:spcAft>
+              <a:buSzPct val="100000"/>
+              <a:buChar char="•"/>
+            </a:pPr>
+            <a:r>
+              <a:rPr lang="en-US" sz="950" dirty="0">
+                <a:solidFill>
+                  <a:srgbClr val="64748B"/>
+                </a:solidFill>
+                <a:latin typeface="Calibri" pitchFamily="34" charset="0"/>
+                <a:ea typeface="Calibri" pitchFamily="34" charset="-122"/>
+                <a:cs typeface="Calibri" pitchFamily="34" charset="-120"/>
+              </a:rPr>
+              <a:t>Agent 3: Match Validator — confidence scoring</a:t>
+            </a:r>
+            <a:endParaRPr lang="en-US" sz="950" dirty="0"/>
+          </a:p>
+        </p:txBody>
+      </p:sp>
+      <p:sp>
+        <p:nvSpPr>
+          <p:cNvPr id="20" name="Text 15"/>
+          <p:cNvSpPr/>
+          <p:nvPr/>
+        </p:nvSpPr>
+        <p:spPr>
+          <a:xfrm>
+            <a:off x="640080" y="3977640"/>
+            <a:ext cx="2743200" cy="274320"/>
+          </a:xfrm>
+          <a:prstGeom prst="rect">
+            <a:avLst/>
+          </a:prstGeom>
+          <a:noFill/>
+          <a:ln/>
+        </p:spPr>
+        <p:txBody>
+          <a:bodyPr wrap="square" lIns="0" tIns="0" rIns="0" bIns="0" rtlCol="0" anchor="ctr"/>
+          <a:lstStyle/>
+          <a:p>
+            <a:pPr indent="0" marL="0">
+              <a:buNone/>
+            </a:pPr>
+            <a:r>
+              <a:rPr lang="en-US" sz="1300" b="1" dirty="0">
+                <a:solidFill>
+                  <a:srgbClr val="1E293B"/>
+                </a:solidFill>
+                <a:latin typeface="Calibri" pitchFamily="34" charset="0"/>
+                <a:ea typeface="Calibri" pitchFamily="34" charset="-122"/>
+                <a:cs typeface="Calibri" pitchFamily="34" charset="-120"/>
+              </a:rPr>
+              <a:t>Key Design Decisions</a:t>
+            </a:r>
+            <a:endParaRPr lang="en-US" sz="1300" dirty="0"/>
+          </a:p>
+        </p:txBody>
+      </p:sp>
+      <p:sp>
+        <p:nvSpPr>
+          <p:cNvPr id="21" name="Text 16"/>
+          <p:cNvSpPr/>
+          <p:nvPr/>
+        </p:nvSpPr>
+        <p:spPr>
+          <a:xfrm>
+            <a:off x="640080" y="4297680"/>
+            <a:ext cx="3931920" cy="228600"/>
+          </a:xfrm>
+          <a:prstGeom prst="rect">
+            <a:avLst/>
+          </a:prstGeom>
+          <a:noFill/>
+          <a:ln/>
+        </p:spPr>
+        <p:txBody>
+          <a:bodyPr wrap="square" lIns="0" tIns="0" rIns="0" bIns="0" rtlCol="0" anchor="ctr"/>
+          <a:lstStyle/>
+          <a:p>
+            <a:pPr indent="0" marL="0">
+              <a:buNone/>
+            </a:pPr>
+            <a:r>
+              <a:rPr lang="en-US" sz="900" b="1" dirty="0">
+                <a:solidFill>
+                  <a:srgbClr val="1E293B"/>
+                </a:solidFill>
+                <a:latin typeface="Calibri" pitchFamily="34" charset="0"/>
+                <a:ea typeface="Calibri" pitchFamily="34" charset="-122"/>
+                <a:cs typeface="Calibri" pitchFamily="34" charset="-120"/>
+              </a:rPr>
+              <a:t>DDG for discovery: </a:t>
+            </a:r>
+            <a:pPr indent="0" marL="0">
+              <a:buNone/>
+            </a:pPr>
+            <a:r>
+              <a:rPr lang="en-US" sz="900" dirty="0">
+                <a:solidFill>
+                  <a:srgbClr val="64748B"/>
+                </a:solidFill>
+                <a:latin typeface="Calibri" pitchFamily="34" charset="0"/>
+                <a:ea typeface="Calibri" pitchFamily="34" charset="-122"/>
+                <a:cs typeface="Calibri" pitchFamily="34" charset="-120"/>
+              </a:rPr>
+              <a:t>No API keys needed, covers all retailers</a:t>
+            </a:r>
+            <a:endParaRPr lang="en-US" sz="900" dirty="0"/>
+          </a:p>
+        </p:txBody>
+      </p:sp>
+      <p:sp>
+        <p:nvSpPr>
+          <p:cNvPr id="22" name="Text 17"/>
+          <p:cNvSpPr/>
+          <p:nvPr/>
+        </p:nvSpPr>
+        <p:spPr>
+          <a:xfrm>
+            <a:off x="640080" y="4544568"/>
+            <a:ext cx="3931920" cy="228600"/>
+          </a:xfrm>
+          <a:prstGeom prst="rect">
+            <a:avLst/>
+          </a:prstGeom>
+          <a:noFill/>
+          <a:ln/>
+        </p:spPr>
+        <p:txBody>
+          <a:bodyPr wrap="square" lIns="0" tIns="0" rIns="0" bIns="0" rtlCol="0" anchor="ctr"/>
+          <a:lstStyle/>
+          <a:p>
+            <a:pPr indent="0" marL="0">
+              <a:buNone/>
+            </a:pPr>
+            <a:r>
+              <a:rPr lang="en-US" sz="900" b="1" dirty="0">
+                <a:solidFill>
+                  <a:srgbClr val="1E293B"/>
+                </a:solidFill>
+                <a:latin typeface="Calibri" pitchFamily="34" charset="0"/>
+                <a:ea typeface="Calibri" pitchFamily="34" charset="-122"/>
+                <a:cs typeface="Calibri" pitchFamily="34" charset="-120"/>
+              </a:rPr>
+              <a:t>Known retailers only: </a:t>
+            </a:r>
+            <a:pPr indent="0" marL="0">
+              <a:buNone/>
+            </a:pPr>
+            <a:r>
+              <a:rPr lang="en-US" sz="900" dirty="0">
+                <a:solidFill>
+                  <a:srgbClr val="64748B"/>
+                </a:solidFill>
+                <a:latin typeface="Calibri" pitchFamily="34" charset="0"/>
+                <a:ea typeface="Calibri" pitchFamily="34" charset="-122"/>
+                <a:cs typeface="Calibri" pitchFamily="34" charset="-120"/>
+              </a:rPr>
+              <a:t>Filters unreliable sources</a:t>
+            </a:r>
+            <a:endParaRPr lang="en-US" sz="900" dirty="0"/>
+          </a:p>
+        </p:txBody>
+      </p:sp>
+      <p:sp>
+        <p:nvSpPr>
+          <p:cNvPr id="23" name="Text 18"/>
+          <p:cNvSpPr/>
+          <p:nvPr/>
+        </p:nvSpPr>
+        <p:spPr>
+          <a:xfrm>
+            <a:off x="640080" y="4791456"/>
+            <a:ext cx="3931920" cy="228600"/>
+          </a:xfrm>
+          <a:prstGeom prst="rect">
+            <a:avLst/>
+          </a:prstGeom>
+          <a:noFill/>
+          <a:ln/>
+        </p:spPr>
+        <p:txBody>
+          <a:bodyPr wrap="square" lIns="0" tIns="0" rIns="0" bIns="0" rtlCol="0" anchor="ctr"/>
+          <a:lstStyle/>
+          <a:p>
+            <a:pPr indent="0" marL="0">
+              <a:buNone/>
+            </a:pPr>
+            <a:r>
+              <a:rPr lang="en-US" sz="900" b="1" dirty="0">
+                <a:solidFill>
+                  <a:srgbClr val="1E293B"/>
+                </a:solidFill>
+                <a:latin typeface="Calibri" pitchFamily="34" charset="0"/>
+                <a:ea typeface="Calibri" pitchFamily="34" charset="-122"/>
+                <a:cs typeface="Calibri" pitchFamily="34" charset="-120"/>
+              </a:rPr>
+              <a:t>Parallel scraping: </a:t>
+            </a:r>
+            <a:pPr indent="0" marL="0">
+              <a:buNone/>
+            </a:pPr>
+            <a:r>
+              <a:rPr lang="en-US" sz="900" dirty="0">
+                <a:solidFill>
+                  <a:srgbClr val="64748B"/>
+                </a:solidFill>
+                <a:latin typeface="Calibri" pitchFamily="34" charset="0"/>
+                <a:ea typeface="Calibri" pitchFamily="34" charset="-122"/>
+                <a:cs typeface="Calibri" pitchFamily="34" charset="-120"/>
+              </a:rPr>
+              <a:t>4 products + 6 pages concurrently</a:t>
+            </a:r>
+            <a:endParaRPr lang="en-US" sz="900" dirty="0"/>
+          </a:p>
+        </p:txBody>
       </p:sp>
       <p:sp>
         <p:nvSpPr>
@@ -6261,34 +7180,48 @@
         </p:nvSpPr>
         <p:spPr>
           <a:xfrm>
-            <a:off x="7726680" y="1691640"/>
-            <a:ext cx="502920" cy="502920"/>
-          </a:xfrm>
-          <a:prstGeom prst="rect">
-            <a:avLst/>
-          </a:prstGeom>
-          <a:noFill/>
-          <a:ln/>
-        </p:spPr>
-        <p:txBody>
-          <a:bodyPr wrap="square" lIns="0" tIns="0" rIns="0" bIns="0" rtlCol="0" anchor="ctr"/>
-          <a:lstStyle/>
-          <a:p>
-            <a:pPr algn="ctr" indent="0" marL="0">
-              <a:buNone/>
-            </a:pPr>
-            <a:r>
-              <a:rPr lang="en-US" sz="1400" b="1" dirty="0">
-                <a:solidFill>
-                  <a:srgbClr val="FFFFFF"/>
-                </a:solidFill>
-                <a:latin typeface="Calibri" pitchFamily="34" charset="0"/>
-                <a:ea typeface="Calibri" pitchFamily="34" charset="-122"/>
-                <a:cs typeface="Calibri" pitchFamily="34" charset="-120"/>
-              </a:rPr>
-              <a:t>04</a:t>
-            </a:r>
-            <a:endParaRPr lang="en-US" sz="1400" dirty="0"/>
+            <a:off x="4846320" y="4297680"/>
+            <a:ext cx="3931920" cy="228600"/>
+          </a:xfrm>
+          <a:prstGeom prst="rect">
+            <a:avLst/>
+          </a:prstGeom>
+          <a:noFill/>
+          <a:ln/>
+        </p:spPr>
+        <p:txBody>
+          <a:bodyPr wrap="square" lIns="0" tIns="0" rIns="0" bIns="0" rtlCol="0" anchor="ctr"/>
+          <a:lstStyle/>
+          <a:p>
+            <a:pPr indent="0" marL="0">
+              <a:buNone/>
+            </a:pPr>
+            <a:r>
+              <a:rPr lang="en-US" sz="900" b="1" dirty="0">
+                <a:solidFill>
+                  <a:srgbClr val="1E293B"/>
+                </a:solidFill>
+                <a:latin typeface="Calibri" pitchFamily="34" charset="0"/>
+                <a:ea typeface="Calibri" pitchFamily="34" charset="-122"/>
+                <a:cs typeface="Calibri" pitchFamily="34" charset="-120"/>
+              </a:rPr>
+              <a:t>Page fetch fallback: </a:t>
+            </a:r>
+            <a:pPr indent="0" marL="0">
+              <a:buNone/>
+            </a:pPr>
+            <a:r>
+              <a:rPr lang="en-US" sz="900" dirty="0">
+                <a:solidFill>
+                  <a:srgbClr val="64748B"/>
+                </a:solidFill>
+                <a:latin typeface="Calibri" pitchFamily="34" charset="0"/>
+                <a:ea typeface="Calibri" pitchFamily="34" charset="-122"/>
+                <a:cs typeface="Calibri" pitchFamily="34" charset="-120"/>
+              </a:rPr>
+              <a:t>Amazon/Best Buy omit snippet prices</a:t>
+            </a:r>
+            <a:endParaRPr lang="en-US" sz="900" dirty="0"/>
           </a:p>
         </p:txBody>
       </p:sp>
@@ -6300,24 +7233,24 @@
         </p:nvSpPr>
         <p:spPr>
           <a:xfrm>
-            <a:off x="7178040" y="2331720"/>
-            <a:ext cx="1645920" cy="457200"/>
-          </a:xfrm>
-          <a:prstGeom prst="rect">
-            <a:avLst/>
-          </a:prstGeom>
-          <a:noFill/>
-          <a:ln/>
-        </p:spPr>
-        <p:txBody>
-          <a:bodyPr wrap="square" lIns="0" tIns="0" rIns="0" bIns="0" rtlCol="0" anchor="ctr"/>
-          <a:lstStyle/>
-          <a:p>
-            <a:pPr algn="ctr" indent="0" marL="0">
-              <a:buNone/>
-            </a:pPr>
-            <a:r>
-              <a:rPr lang="en-US" sz="1300" b="1" dirty="0">
+            <a:off x="4846320" y="4544568"/>
+            <a:ext cx="3931920" cy="228600"/>
+          </a:xfrm>
+          <a:prstGeom prst="rect">
+            <a:avLst/>
+          </a:prstGeom>
+          <a:noFill/>
+          <a:ln/>
+        </p:spPr>
+        <p:txBody>
+          <a:bodyPr wrap="square" lIns="0" tIns="0" rIns="0" bIns="0" rtlCol="0" anchor="ctr"/>
+          <a:lstStyle/>
+          <a:p>
+            <a:pPr indent="0" marL="0">
+              <a:buNone/>
+            </a:pPr>
+            <a:r>
+              <a:rPr lang="en-US" sz="900" b="1" dirty="0">
                 <a:solidFill>
                   <a:srgbClr val="1E293B"/>
                 </a:solidFill>
@@ -6325,16 +7258,52 @@
                 <a:ea typeface="Calibri" pitchFamily="34" charset="-122"/>
                 <a:cs typeface="Calibri" pitchFamily="34" charset="-120"/>
               </a:rPr>
-              <a:t>Dashboard</a:t>
-            </a:r>
-            <a:endParaRPr lang="en-US" sz="1300" dirty="0"/>
-          </a:p>
-          <a:p>
-            <a:pPr algn="ctr" indent="0" marL="0">
-              <a:buNone/>
-            </a:pPr>
-            <a:r>
-              <a:rPr lang="en-US" sz="1300" b="1" dirty="0">
+              <a:t>30-250% price range: </a:t>
+            </a:r>
+            <a:pPr indent="0" marL="0">
+              <a:buNone/>
+            </a:pPr>
+            <a:r>
+              <a:rPr lang="en-US" sz="900" dirty="0">
+                <a:solidFill>
+                  <a:srgbClr val="64748B"/>
+                </a:solidFill>
+                <a:latin typeface="Calibri" pitchFamily="34" charset="0"/>
+                <a:ea typeface="Calibri" pitchFamily="34" charset="-122"/>
+                <a:cs typeface="Calibri" pitchFamily="34" charset="-120"/>
+              </a:rPr>
+              <a:t>Eliminates wrong products/bundles</a:t>
+            </a:r>
+            <a:endParaRPr lang="en-US" sz="900" dirty="0"/>
+          </a:p>
+        </p:txBody>
+      </p:sp>
+      <p:sp>
+        <p:nvSpPr>
+          <p:cNvPr id="26" name="Text 21"/>
+          <p:cNvSpPr/>
+          <p:nvPr/>
+        </p:nvSpPr>
+        <p:spPr>
+          <a:xfrm>
+            <a:off x="4846320" y="4791456"/>
+            <a:ext cx="3931920" cy="228600"/>
+          </a:xfrm>
+          <a:prstGeom prst="rect">
+            <a:avLst/>
+          </a:prstGeom>
+          <a:noFill/>
+          <a:ln/>
+        </p:spPr>
+        <p:txBody>
+          <a:bodyPr wrap="square" lIns="0" tIns="0" rIns="0" bIns="0" rtlCol="0" anchor="ctr"/>
+          <a:lstStyle/>
+          <a:p>
+            <a:pPr indent="0" marL="0">
+              <a:buNone/>
+            </a:pPr>
+            <a:r>
+              <a:rPr lang="en-US" sz="900" b="1" dirty="0">
                 <a:solidFill>
                   <a:srgbClr val="1E293B"/>
                 </a:solidFill>
@@ -6342,38 +7311,13 @@
                 <a:ea typeface="Calibri" pitchFamily="34" charset="-122"/>
                 <a:cs typeface="Calibri" pitchFamily="34" charset="-120"/>
               </a:rPr>
-              <a:t>&amp; Alerts</a:t>
-            </a:r>
-            <a:endParaRPr lang="en-US" sz="1300" dirty="0"/>
-          </a:p>
-        </p:txBody>
-      </p:sp>
-      <p:sp>
-        <p:nvSpPr>
-          <p:cNvPr id="26" name="Text 21"/>
-          <p:cNvSpPr/>
-          <p:nvPr/>
-        </p:nvSpPr>
-        <p:spPr>
-          <a:xfrm>
-            <a:off x="7178040" y="2834640"/>
-            <a:ext cx="1645920" cy="822960"/>
-          </a:xfrm>
-          <a:prstGeom prst="rect">
-            <a:avLst/>
-          </a:prstGeom>
-          <a:noFill/>
-          <a:ln/>
-        </p:spPr>
-        <p:txBody>
-          <a:bodyPr wrap="square" lIns="0" tIns="0" rIns="0" bIns="0" rtlCol="0" anchor="ctr"/>
-          <a:lstStyle/>
-          <a:p>
-            <a:pPr algn="ctr" indent="0" marL="0">
-              <a:buNone/>
-            </a:pPr>
-            <a:r>
-              <a:rPr lang="en-US" sz="1050" dirty="0">
+              <a:t>3 specialized AI agents: </a:t>
+            </a:r>
+            <a:pPr indent="0" marL="0">
+              <a:buNone/>
+            </a:pPr>
+            <a:r>
+              <a:rPr lang="en-US" sz="900" dirty="0">
                 <a:solidFill>
                   <a:srgbClr val="64748B"/>
                 </a:solidFill>
@@ -6381,114 +7325,9 @@
                 <a:ea typeface="Calibri" pitchFamily="34" charset="-122"/>
                 <a:cs typeface="Calibri" pitchFamily="34" charset="-120"/>
               </a:rPr>
-              <a:t>Interactive comparison view with price trend charts &amp; drop alerts</a:t>
-            </a:r>
-            <a:endParaRPr lang="en-US" sz="1050" dirty="0"/>
-          </a:p>
-        </p:txBody>
-      </p:sp>
-      <p:sp>
-        <p:nvSpPr>
-          <p:cNvPr id="27" name="Shape 22"/>
-          <p:cNvSpPr/>
-          <p:nvPr/>
-        </p:nvSpPr>
-        <p:spPr>
-          <a:xfrm>
-            <a:off x="457200" y="4114800"/>
-            <a:ext cx="8229600" cy="731520"/>
-          </a:xfrm>
-          <a:prstGeom prst="rect">
-            <a:avLst/>
-          </a:prstGeom>
-          <a:solidFill>
-            <a:srgbClr val="FFFFFF"/>
-          </a:solidFill>
-          <a:ln/>
-          <a:effectLst>
-            <a:outerShdw sx="100000" sy="100000" kx="0" ky="0" algn="bl" rotWithShape="0" blurRad="50800" dist="25400" dir="8100000">
-              <a:srgbClr val="000000">
-                <a:alpha val="10000"/>
-              </a:srgbClr>
-            </a:outerShdw>
-          </a:effectLst>
-        </p:spPr>
-      </p:sp>
-      <p:sp>
-        <p:nvSpPr>
-          <p:cNvPr id="28" name="Text 23"/>
-          <p:cNvSpPr/>
-          <p:nvPr/>
-        </p:nvSpPr>
-        <p:spPr>
-          <a:xfrm>
-            <a:off x="640080" y="4160520"/>
-            <a:ext cx="1097280" cy="320040"/>
-          </a:xfrm>
-          <a:prstGeom prst="rect">
-            <a:avLst/>
-          </a:prstGeom>
-          <a:noFill/>
-          <a:ln/>
-        </p:spPr>
-        <p:txBody>
-          <a:bodyPr wrap="square" lIns="0" tIns="0" rIns="0" bIns="0" rtlCol="0" anchor="ctr"/>
-          <a:lstStyle/>
-          <a:p>
-            <a:pPr indent="0" marL="0">
-              <a:buNone/>
-            </a:pPr>
-            <a:r>
-              <a:rPr lang="en-US" sz="1200" b="1" dirty="0">
-                <a:solidFill>
-                  <a:srgbClr val="1E293B"/>
-                </a:solidFill>
-                <a:latin typeface="Calibri" pitchFamily="34" charset="0"/>
-                <a:ea typeface="Calibri" pitchFamily="34" charset="-122"/>
-                <a:cs typeface="Calibri" pitchFamily="34" charset="-120"/>
-              </a:rPr>
-              <a:t>Tech Stack:</a:t>
-            </a:r>
-            <a:endParaRPr lang="en-US" sz="1200" dirty="0"/>
-          </a:p>
-        </p:txBody>
-      </p:sp>
-      <p:sp>
-        <p:nvSpPr>
-          <p:cNvPr id="29" name="Text 24"/>
-          <p:cNvSpPr/>
-          <p:nvPr/>
-        </p:nvSpPr>
-        <p:spPr>
-          <a:xfrm>
-            <a:off x="640080" y="4434840"/>
-            <a:ext cx="7772400" cy="274320"/>
-          </a:xfrm>
-          <a:prstGeom prst="rect">
-            <a:avLst/>
-          </a:prstGeom>
-          <a:noFill/>
-          <a:ln/>
-        </p:spPr>
-        <p:txBody>
-          <a:bodyPr wrap="square" lIns="0" tIns="0" rIns="0" bIns="0" rtlCol="0" anchor="ctr"/>
-          <a:lstStyle/>
-          <a:p>
-            <a:pPr indent="0" marL="0">
-              <a:buNone/>
-            </a:pPr>
-            <a:r>
-              <a:rPr lang="en-US" sz="1200" dirty="0">
-                <a:solidFill>
-                  <a:srgbClr val="64748B"/>
-                </a:solidFill>
-                <a:latin typeface="Calibri" pitchFamily="34" charset="0"/>
-                <a:ea typeface="Calibri" pitchFamily="34" charset="-122"/>
-                <a:cs typeface="Calibri" pitchFamily="34" charset="-120"/>
-              </a:rPr>
-              <a:t>Python  •  BERT / Sentence Transformers  •  BeautifulSoup  •  Pandas  •  Streamlit  •  Plotly</a:t>
-            </a:r>
-            <a:endParaRPr lang="en-US" sz="1200" dirty="0"/>
+              <a:t>Validation, analysis, strategy</a:t>
+            </a:r>
+            <a:endParaRPr lang="en-US" sz="900" dirty="0"/>
           </a:p>
         </p:txBody>
       </p:sp>
@@ -6532,8 +7371,8 @@
         </p:nvSpPr>
         <p:spPr>
           <a:xfrm>
-            <a:off x="640080" y="365760"/>
-            <a:ext cx="2743200" cy="320040"/>
+            <a:off x="640080" y="320040"/>
+            <a:ext cx="2743200" cy="274320"/>
           </a:xfrm>
           <a:prstGeom prst="rect">
             <a:avLst/>
@@ -6557,7 +7396,7 @@
                 <a:ea typeface="Calibri" pitchFamily="34" charset="-122"/>
                 <a:cs typeface="Calibri" pitchFamily="34" charset="-120"/>
               </a:rPr>
-              <a:t>PROTOTYPE DEMO</a:t>
+              <a:t>TECHNICAL FLOW</a:t>
             </a:r>
             <a:endParaRPr lang="en-US" sz="1100" dirty="0"/>
           </a:p>
@@ -6571,24 +7410,24 @@
         </p:nvSpPr>
         <p:spPr>
           <a:xfrm>
-            <a:off x="640080" y="685800"/>
-            <a:ext cx="7772400" cy="640080"/>
-          </a:xfrm>
-          <a:prstGeom prst="rect">
-            <a:avLst/>
-          </a:prstGeom>
-          <a:noFill/>
-          <a:ln/>
-        </p:spPr>
-        <p:txBody>
-          <a:bodyPr wrap="square" lIns="0" tIns="0" rIns="0" bIns="0" rtlCol="0" anchor="ctr"/>
-          <a:lstStyle/>
-          <a:p>
-            <a:pPr indent="0" marL="0">
-              <a:buNone/>
-            </a:pPr>
-            <a:r>
-              <a:rPr lang="en-US" sz="3200" b="1" dirty="0">
+            <a:off x="640080" y="640080"/>
+            <a:ext cx="7772400" cy="457200"/>
+          </a:xfrm>
+          <a:prstGeom prst="rect">
+            <a:avLst/>
+          </a:prstGeom>
+          <a:noFill/>
+          <a:ln/>
+        </p:spPr>
+        <p:txBody>
+          <a:bodyPr wrap="square" lIns="0" tIns="0" rIns="0" bIns="0" rtlCol="0" anchor="ctr"/>
+          <a:lstStyle/>
+          <a:p>
+            <a:pPr indent="0" marL="0">
+              <a:buNone/>
+            </a:pPr>
+            <a:r>
+              <a:rPr lang="en-US" sz="2800" b="1" dirty="0">
                 <a:solidFill>
                   <a:srgbClr val="1E293B"/>
                 </a:solidFill>
@@ -6596,9 +7435,9 @@
                 <a:ea typeface="Georgia" pitchFamily="34" charset="-122"/>
                 <a:cs typeface="Georgia" pitchFamily="34" charset="-120"/>
               </a:rPr>
-              <a:t>PriceHawk in Action</a:t>
-            </a:r>
-            <a:endParaRPr lang="en-US" sz="3200" dirty="0"/>
+              <a:t>How It Works: 6 Steps</a:t>
+            </a:r>
+            <a:endParaRPr lang="en-US" sz="2800" dirty="0"/>
           </a:p>
         </p:txBody>
       </p:sp>
@@ -6610,8 +7449,8 @@
         </p:nvSpPr>
         <p:spPr>
           <a:xfrm>
-            <a:off x="640080" y="1417320"/>
-            <a:ext cx="7863840" cy="2377440"/>
+            <a:off x="457200" y="1280160"/>
+            <a:ext cx="2606040" cy="1645920"/>
           </a:xfrm>
           <a:prstGeom prst="rect">
             <a:avLst/>
@@ -6637,14 +7476,14 @@
         </p:nvSpPr>
         <p:spPr>
           <a:xfrm>
-            <a:off x="640080" y="1417320"/>
-            <a:ext cx="7863840" cy="384048"/>
-          </a:xfrm>
-          <a:prstGeom prst="rect">
+            <a:off x="594360" y="1417320"/>
+            <a:ext cx="411480" cy="411480"/>
+          </a:xfrm>
+          <a:prstGeom prst="ellipse">
             <a:avLst/>
           </a:prstGeom>
           <a:solidFill>
-            <a:srgbClr val="1E3A5F"/>
+            <a:srgbClr val="D97706"/>
           </a:solidFill>
           <a:ln/>
         </p:spPr>
@@ -6657,8 +7496,47 @@
         </p:nvSpPr>
         <p:spPr>
           <a:xfrm>
-            <a:off x="822960" y="1444752"/>
-            <a:ext cx="3657600" cy="329184"/>
+            <a:off x="594360" y="1417320"/>
+            <a:ext cx="411480" cy="411480"/>
+          </a:xfrm>
+          <a:prstGeom prst="rect">
+            <a:avLst/>
+          </a:prstGeom>
+          <a:noFill/>
+          <a:ln/>
+        </p:spPr>
+        <p:txBody>
+          <a:bodyPr wrap="square" lIns="0" tIns="0" rIns="0" bIns="0" rtlCol="0" anchor="ctr"/>
+          <a:lstStyle/>
+          <a:p>
+            <a:pPr algn="ctr" indent="0" marL="0">
+              <a:buNone/>
+            </a:pPr>
+            <a:r>
+              <a:rPr lang="en-US" sz="1600" b="1" dirty="0">
+                <a:solidFill>
+                  <a:srgbClr val="FFFFFF"/>
+                </a:solidFill>
+                <a:latin typeface="Calibri" pitchFamily="34" charset="0"/>
+                <a:ea typeface="Calibri" pitchFamily="34" charset="-122"/>
+                <a:cs typeface="Calibri" pitchFamily="34" charset="-120"/>
+              </a:rPr>
+              <a:t>1</a:t>
+            </a:r>
+            <a:endParaRPr lang="en-US" sz="1600" dirty="0"/>
+          </a:p>
+        </p:txBody>
+      </p:sp>
+      <p:sp>
+        <p:nvSpPr>
+          <p:cNvPr id="7" name="Text 5"/>
+          <p:cNvSpPr/>
+          <p:nvPr/>
+        </p:nvSpPr>
+        <p:spPr>
+          <a:xfrm>
+            <a:off x="1097280" y="1444752"/>
+            <a:ext cx="1828800" cy="365760"/>
           </a:xfrm>
           <a:prstGeom prst="rect">
             <a:avLst/>
@@ -6676,13 +7554,177 @@
             <a:r>
               <a:rPr lang="en-US" sz="1300" b="1" dirty="0">
                 <a:solidFill>
+                  <a:srgbClr val="1E293B"/>
+                </a:solidFill>
+                <a:latin typeface="Calibri" pitchFamily="34" charset="0"/>
+                <a:ea typeface="Calibri" pitchFamily="34" charset="-122"/>
+                <a:cs typeface="Calibri" pitchFamily="34" charset="-120"/>
+              </a:rPr>
+              <a:t>Upload &amp; Parse</a:t>
+            </a:r>
+            <a:endParaRPr lang="en-US" sz="1300" dirty="0"/>
+          </a:p>
+        </p:txBody>
+      </p:sp>
+      <p:sp>
+        <p:nvSpPr>
+          <p:cNvPr id="8" name="Text 6"/>
+          <p:cNvSpPr/>
+          <p:nvPr/>
+        </p:nvSpPr>
+        <p:spPr>
+          <a:xfrm>
+            <a:off x="594360" y="1920240"/>
+            <a:ext cx="2331720" cy="868680"/>
+          </a:xfrm>
+          <a:prstGeom prst="rect">
+            <a:avLst/>
+          </a:prstGeom>
+          <a:noFill/>
+          <a:ln/>
+        </p:spPr>
+        <p:txBody>
+          <a:bodyPr wrap="square" lIns="0" tIns="0" rIns="0" bIns="0" rtlCol="0" anchor="ctr"/>
+          <a:lstStyle/>
+          <a:p>
+            <a:pPr indent="0" marL="0">
+              <a:buNone/>
+            </a:pPr>
+            <a:r>
+              <a:rPr lang="en-US" sz="1000" dirty="0">
+                <a:solidFill>
+                  <a:srgbClr val="64748B"/>
+                </a:solidFill>
+                <a:latin typeface="Calibri" pitchFamily="34" charset="0"/>
+                <a:ea typeface="Calibri" pitchFamily="34" charset="-122"/>
+                <a:cs typeface="Calibri" pitchFamily="34" charset="-120"/>
+              </a:rPr>
+              <a:t>User uploads CSV with product data (SKU, Name, Brand, Category, Price). Column names normalized flexibly.</a:t>
+            </a:r>
+            <a:endParaRPr lang="en-US" sz="1000" dirty="0"/>
+          </a:p>
+        </p:txBody>
+      </p:sp>
+      <p:sp>
+        <p:nvSpPr>
+          <p:cNvPr id="9" name="Shape 7"/>
+          <p:cNvSpPr/>
+          <p:nvPr/>
+        </p:nvSpPr>
+        <p:spPr>
+          <a:xfrm>
+            <a:off x="3337560" y="1280160"/>
+            <a:ext cx="2606040" cy="1645920"/>
+          </a:xfrm>
+          <a:prstGeom prst="rect">
+            <a:avLst/>
+          </a:prstGeom>
+          <a:solidFill>
+            <a:srgbClr val="FFFFFF"/>
+          </a:solidFill>
+          <a:ln/>
+          <a:effectLst>
+            <a:outerShdw sx="100000" sy="100000" kx="0" ky="0" algn="bl" rotWithShape="0" blurRad="50800" dist="25400" dir="8100000">
+              <a:srgbClr val="000000">
+                <a:alpha val="10000"/>
+              </a:srgbClr>
+            </a:outerShdw>
+          </a:effectLst>
+        </p:spPr>
+      </p:sp>
+      <p:sp>
+        <p:nvSpPr>
+          <p:cNvPr id="10" name="Shape 8"/>
+          <p:cNvSpPr/>
+          <p:nvPr/>
+        </p:nvSpPr>
+        <p:spPr>
+          <a:xfrm>
+            <a:off x="3474720" y="1417320"/>
+            <a:ext cx="411480" cy="411480"/>
+          </a:xfrm>
+          <a:prstGeom prst="ellipse">
+            <a:avLst/>
+          </a:prstGeom>
+          <a:solidFill>
+            <a:srgbClr val="D97706"/>
+          </a:solidFill>
+          <a:ln/>
+        </p:spPr>
+      </p:sp>
+      <p:sp>
+        <p:nvSpPr>
+          <p:cNvPr id="11" name="Text 9"/>
+          <p:cNvSpPr/>
+          <p:nvPr/>
+        </p:nvSpPr>
+        <p:spPr>
+          <a:xfrm>
+            <a:off x="3474720" y="1417320"/>
+            <a:ext cx="411480" cy="411480"/>
+          </a:xfrm>
+          <a:prstGeom prst="rect">
+            <a:avLst/>
+          </a:prstGeom>
+          <a:noFill/>
+          <a:ln/>
+        </p:spPr>
+        <p:txBody>
+          <a:bodyPr wrap="square" lIns="0" tIns="0" rIns="0" bIns="0" rtlCol="0" anchor="ctr"/>
+          <a:lstStyle/>
+          <a:p>
+            <a:pPr algn="ctr" indent="0" marL="0">
+              <a:buNone/>
+            </a:pPr>
+            <a:r>
+              <a:rPr lang="en-US" sz="1600" b="1" dirty="0">
+                <a:solidFill>
                   <a:srgbClr val="FFFFFF"/>
                 </a:solidFill>
                 <a:latin typeface="Calibri" pitchFamily="34" charset="0"/>
                 <a:ea typeface="Calibri" pitchFamily="34" charset="-122"/>
                 <a:cs typeface="Calibri" pitchFamily="34" charset="-120"/>
               </a:rPr>
-              <a:t>PriceHawk Dashboard</a:t>
+              <a:t>2</a:t>
+            </a:r>
+            <a:endParaRPr lang="en-US" sz="1600" dirty="0"/>
+          </a:p>
+        </p:txBody>
+      </p:sp>
+      <p:sp>
+        <p:nvSpPr>
+          <p:cNvPr id="12" name="Text 10"/>
+          <p:cNvSpPr/>
+          <p:nvPr/>
+        </p:nvSpPr>
+        <p:spPr>
+          <a:xfrm>
+            <a:off x="3977640" y="1444752"/>
+            <a:ext cx="1828800" cy="365760"/>
+          </a:xfrm>
+          <a:prstGeom prst="rect">
+            <a:avLst/>
+          </a:prstGeom>
+          <a:noFill/>
+          <a:ln/>
+        </p:spPr>
+        <p:txBody>
+          <a:bodyPr wrap="square" lIns="0" tIns="0" rIns="0" bIns="0" rtlCol="0" anchor="ctr"/>
+          <a:lstStyle/>
+          <a:p>
+            <a:pPr indent="0" marL="0">
+              <a:buNone/>
+            </a:pPr>
+            <a:r>
+              <a:rPr lang="en-US" sz="1300" b="1" dirty="0">
+                <a:solidFill>
+                  <a:srgbClr val="1E293B"/>
+                </a:solidFill>
+                <a:latin typeface="Calibri" pitchFamily="34" charset="0"/>
+                <a:ea typeface="Calibri" pitchFamily="34" charset="-122"/>
+                <a:cs typeface="Calibri" pitchFamily="34" charset="-120"/>
+              </a:rPr>
+              <a:t>Filter &amp; Configure</a:t>
             </a:r>
             <a:endParaRPr lang="en-US" sz="1300" dirty="0"/>
           </a:p>
@@ -6690,14 +7732,100 @@
       </p:sp>
       <p:sp>
         <p:nvSpPr>
-          <p:cNvPr id="7" name="Text 5"/>
-          <p:cNvSpPr/>
-          <p:nvPr/>
-        </p:nvSpPr>
-        <p:spPr>
-          <a:xfrm>
-            <a:off x="1371600" y="2011680"/>
-            <a:ext cx="6400800" cy="1188720"/>
+          <p:cNvPr id="13" name="Text 11"/>
+          <p:cNvSpPr/>
+          <p:nvPr/>
+        </p:nvSpPr>
+        <p:spPr>
+          <a:xfrm>
+            <a:off x="3474720" y="1920240"/>
+            <a:ext cx="2331720" cy="868680"/>
+          </a:xfrm>
+          <a:prstGeom prst="rect">
+            <a:avLst/>
+          </a:prstGeom>
+          <a:noFill/>
+          <a:ln/>
+        </p:spPr>
+        <p:txBody>
+          <a:bodyPr wrap="square" lIns="0" tIns="0" rIns="0" bIns="0" rtlCol="0" anchor="ctr"/>
+          <a:lstStyle/>
+          <a:p>
+            <a:pPr indent="0" marL="0">
+              <a:buNone/>
+            </a:pPr>
+            <a:r>
+              <a:rPr lang="en-US" sz="1000" dirty="0">
+                <a:solidFill>
+                  <a:srgbClr val="64748B"/>
+                </a:solidFill>
+                <a:latin typeface="Calibri" pitchFamily="34" charset="0"/>
+                <a:ea typeface="Calibri" pitchFamily="34" charset="-122"/>
+                <a:cs typeface="Calibri" pitchFamily="34" charset="-120"/>
+              </a:rPr>
+              <a:t>Filter by category, brand, search query. Set max competitors (3-10) and request delay.</a:t>
+            </a:r>
+            <a:endParaRPr lang="en-US" sz="1000" dirty="0"/>
+          </a:p>
+        </p:txBody>
+      </p:sp>
+      <p:sp>
+        <p:nvSpPr>
+          <p:cNvPr id="14" name="Shape 12"/>
+          <p:cNvSpPr/>
+          <p:nvPr/>
+        </p:nvSpPr>
+        <p:spPr>
+          <a:xfrm>
+            <a:off x="6217920" y="1280160"/>
+            <a:ext cx="2606040" cy="1645920"/>
+          </a:xfrm>
+          <a:prstGeom prst="rect">
+            <a:avLst/>
+          </a:prstGeom>
+          <a:solidFill>
+            <a:srgbClr val="FFFFFF"/>
+          </a:solidFill>
+          <a:ln/>
+          <a:effectLst>
+            <a:outerShdw sx="100000" sy="100000" kx="0" ky="0" algn="bl" rotWithShape="0" blurRad="50800" dist="25400" dir="8100000">
+              <a:srgbClr val="000000">
+                <a:alpha val="10000"/>
+              </a:srgbClr>
+            </a:outerShdw>
+          </a:effectLst>
+        </p:spPr>
+      </p:sp>
+      <p:sp>
+        <p:nvSpPr>
+          <p:cNvPr id="15" name="Shape 13"/>
+          <p:cNvSpPr/>
+          <p:nvPr/>
+        </p:nvSpPr>
+        <p:spPr>
+          <a:xfrm>
+            <a:off x="6355080" y="1417320"/>
+            <a:ext cx="411480" cy="411480"/>
+          </a:xfrm>
+          <a:prstGeom prst="ellipse">
+            <a:avLst/>
+          </a:prstGeom>
+          <a:solidFill>
+            <a:srgbClr val="D97706"/>
+          </a:solidFill>
+          <a:ln/>
+        </p:spPr>
+      </p:sp>
+      <p:sp>
+        <p:nvSpPr>
+          <p:cNvPr id="16" name="Text 14"/>
+          <p:cNvSpPr/>
+          <p:nvPr/>
+        </p:nvSpPr>
+        <p:spPr>
+          <a:xfrm>
+            <a:off x="6355080" y="1417320"/>
+            <a:ext cx="411480" cy="411480"/>
           </a:xfrm>
           <a:prstGeom prst="rect">
             <a:avLst/>
@@ -6713,46 +7841,46 @@
               <a:buNone/>
             </a:pPr>
             <a:r>
-              <a:rPr lang="en-US" sz="2200" dirty="0">
-                <a:solidFill>
-                  <a:srgbClr val="CBD5E1"/>
-                </a:solidFill>
-                <a:latin typeface="Calibri" pitchFamily="34" charset="0"/>
-                <a:ea typeface="Calibri" pitchFamily="34" charset="-122"/>
-                <a:cs typeface="Calibri" pitchFamily="34" charset="-120"/>
-              </a:rPr>
-              <a:t>[  Insert Live Demo Screenshot Here  ]</a:t>
-            </a:r>
-            <a:endParaRPr lang="en-US" sz="2200" dirty="0"/>
-          </a:p>
-        </p:txBody>
-      </p:sp>
-      <p:sp>
-        <p:nvSpPr>
-          <p:cNvPr id="8" name="Text 6"/>
-          <p:cNvSpPr/>
-          <p:nvPr/>
-        </p:nvSpPr>
-        <p:spPr>
-          <a:xfrm>
-            <a:off x="640080" y="3977640"/>
-            <a:ext cx="2743200" cy="320040"/>
-          </a:xfrm>
-          <a:prstGeom prst="rect">
-            <a:avLst/>
-          </a:prstGeom>
-          <a:noFill/>
-          <a:ln/>
-        </p:spPr>
-        <p:txBody>
-          <a:bodyPr wrap="square" lIns="0" tIns="0" rIns="0" bIns="0" rtlCol="0" anchor="ctr"/>
-          <a:lstStyle/>
-          <a:p>
-            <a:pPr indent="0" marL="0">
-              <a:buNone/>
-            </a:pPr>
-            <a:r>
-              <a:rPr lang="en-US" sz="1400" b="1" dirty="0">
+              <a:rPr lang="en-US" sz="1600" b="1" dirty="0">
+                <a:solidFill>
+                  <a:srgbClr val="FFFFFF"/>
+                </a:solidFill>
+                <a:latin typeface="Calibri" pitchFamily="34" charset="0"/>
+                <a:ea typeface="Calibri" pitchFamily="34" charset="-122"/>
+                <a:cs typeface="Calibri" pitchFamily="34" charset="-120"/>
+              </a:rPr>
+              <a:t>3</a:t>
+            </a:r>
+            <a:endParaRPr lang="en-US" sz="1600" dirty="0"/>
+          </a:p>
+        </p:txBody>
+      </p:sp>
+      <p:sp>
+        <p:nvSpPr>
+          <p:cNvPr id="17" name="Text 15"/>
+          <p:cNvSpPr/>
+          <p:nvPr/>
+        </p:nvSpPr>
+        <p:spPr>
+          <a:xfrm>
+            <a:off x="6858000" y="1444752"/>
+            <a:ext cx="1828800" cy="365760"/>
+          </a:xfrm>
+          <a:prstGeom prst="rect">
+            <a:avLst/>
+          </a:prstGeom>
+          <a:noFill/>
+          <a:ln/>
+        </p:spPr>
+        <p:txBody>
+          <a:bodyPr wrap="square" lIns="0" tIns="0" rIns="0" bIns="0" rtlCol="0" anchor="ctr"/>
+          <a:lstStyle/>
+          <a:p>
+            <a:pPr indent="0" marL="0">
+              <a:buNone/>
+            </a:pPr>
+            <a:r>
+              <a:rPr lang="en-US" sz="1300" b="1" dirty="0">
                 <a:solidFill>
                   <a:srgbClr val="1E293B"/>
                 </a:solidFill>
@@ -6760,42 +7888,163 @@
                 <a:ea typeface="Calibri" pitchFamily="34" charset="-122"/>
                 <a:cs typeface="Calibri" pitchFamily="34" charset="-120"/>
               </a:rPr>
-              <a:t>Key Demo Features</a:t>
-            </a:r>
-            <a:endParaRPr lang="en-US" sz="1400" dirty="0"/>
-          </a:p>
-        </p:txBody>
-      </p:sp>
-      <p:sp>
-        <p:nvSpPr>
-          <p:cNvPr id="9" name="Text 7"/>
-          <p:cNvSpPr/>
-          <p:nvPr/>
-        </p:nvSpPr>
-        <p:spPr>
-          <a:xfrm>
-            <a:off x="640080" y="4343400"/>
-            <a:ext cx="7772400" cy="640080"/>
-          </a:xfrm>
-          <a:prstGeom prst="rect">
-            <a:avLst/>
-          </a:prstGeom>
-          <a:noFill/>
-          <a:ln/>
-        </p:spPr>
-        <p:txBody>
-          <a:bodyPr wrap="square" lIns="0" tIns="0" rIns="0" bIns="0" rtlCol="0" anchor="ctr"/>
-          <a:lstStyle/>
-          <a:p>
-            <a:pPr marL="342900" indent="-342900">
-              <a:spcAft>
-                <a:spcPts val="400"/>
-              </a:spcAft>
-              <a:buSzPct val="100000"/>
-              <a:buChar char="•"/>
-            </a:pPr>
-            <a:r>
-              <a:rPr lang="en-US" sz="1100" dirty="0">
+              <a:t>Parallel Scraping</a:t>
+            </a:r>
+            <a:endParaRPr lang="en-US" sz="1300" dirty="0"/>
+          </a:p>
+        </p:txBody>
+      </p:sp>
+      <p:sp>
+        <p:nvSpPr>
+          <p:cNvPr id="18" name="Text 16"/>
+          <p:cNvSpPr/>
+          <p:nvPr/>
+        </p:nvSpPr>
+        <p:spPr>
+          <a:xfrm>
+            <a:off x="6355080" y="1920240"/>
+            <a:ext cx="2331720" cy="868680"/>
+          </a:xfrm>
+          <a:prstGeom prst="rect">
+            <a:avLst/>
+          </a:prstGeom>
+          <a:noFill/>
+          <a:ln/>
+        </p:spPr>
+        <p:txBody>
+          <a:bodyPr wrap="square" lIns="0" tIns="0" rIns="0" bIns="0" rtlCol="0" anchor="ctr"/>
+          <a:lstStyle/>
+          <a:p>
+            <a:pPr indent="0" marL="0">
+              <a:buNone/>
+            </a:pPr>
+            <a:r>
+              <a:rPr lang="en-US" sz="1000" dirty="0">
+                <a:solidFill>
+                  <a:srgbClr val="64748B"/>
+                </a:solidFill>
+                <a:latin typeface="Calibri" pitchFamily="34" charset="0"/>
+                <a:ea typeface="Calibri" pitchFamily="34" charset="-122"/>
+                <a:cs typeface="Calibri" pitchFamily="34" charset="-120"/>
+              </a:rPr>
+              <a:t>4 products scraped concurrently, 3 DDG search strategies each, 6 page fetches in parallel.</a:t>
+            </a:r>
+            <a:endParaRPr lang="en-US" sz="1000" dirty="0"/>
+          </a:p>
+        </p:txBody>
+      </p:sp>
+      <p:sp>
+        <p:nvSpPr>
+          <p:cNvPr id="19" name="Shape 17"/>
+          <p:cNvSpPr/>
+          <p:nvPr/>
+        </p:nvSpPr>
+        <p:spPr>
+          <a:xfrm>
+            <a:off x="457200" y="3154680"/>
+            <a:ext cx="2606040" cy="1645920"/>
+          </a:xfrm>
+          <a:prstGeom prst="rect">
+            <a:avLst/>
+          </a:prstGeom>
+          <a:solidFill>
+            <a:srgbClr val="FFFFFF"/>
+          </a:solidFill>
+          <a:ln/>
+          <a:effectLst>
+            <a:outerShdw sx="100000" sy="100000" kx="0" ky="0" algn="bl" rotWithShape="0" blurRad="50800" dist="25400" dir="8100000">
+              <a:srgbClr val="000000">
+                <a:alpha val="10000"/>
+              </a:srgbClr>
+            </a:outerShdw>
+          </a:effectLst>
+        </p:spPr>
+      </p:sp>
+      <p:sp>
+        <p:nvSpPr>
+          <p:cNvPr id="20" name="Shape 18"/>
+          <p:cNvSpPr/>
+          <p:nvPr/>
+        </p:nvSpPr>
+        <p:spPr>
+          <a:xfrm>
+            <a:off x="594360" y="3291840"/>
+            <a:ext cx="411480" cy="411480"/>
+          </a:xfrm>
+          <a:prstGeom prst="ellipse">
+            <a:avLst/>
+          </a:prstGeom>
+          <a:solidFill>
+            <a:srgbClr val="D97706"/>
+          </a:solidFill>
+          <a:ln/>
+        </p:spPr>
+      </p:sp>
+      <p:sp>
+        <p:nvSpPr>
+          <p:cNvPr id="21" name="Text 19"/>
+          <p:cNvSpPr/>
+          <p:nvPr/>
+        </p:nvSpPr>
+        <p:spPr>
+          <a:xfrm>
+            <a:off x="594360" y="3291840"/>
+            <a:ext cx="411480" cy="411480"/>
+          </a:xfrm>
+          <a:prstGeom prst="rect">
+            <a:avLst/>
+          </a:prstGeom>
+          <a:noFill/>
+          <a:ln/>
+        </p:spPr>
+        <p:txBody>
+          <a:bodyPr wrap="square" lIns="0" tIns="0" rIns="0" bIns="0" rtlCol="0" anchor="ctr"/>
+          <a:lstStyle/>
+          <a:p>
+            <a:pPr algn="ctr" indent="0" marL="0">
+              <a:buNone/>
+            </a:pPr>
+            <a:r>
+              <a:rPr lang="en-US" sz="1600" b="1" dirty="0">
+                <a:solidFill>
+                  <a:srgbClr val="FFFFFF"/>
+                </a:solidFill>
+                <a:latin typeface="Calibri" pitchFamily="34" charset="0"/>
+                <a:ea typeface="Calibri" pitchFamily="34" charset="-122"/>
+                <a:cs typeface="Calibri" pitchFamily="34" charset="-120"/>
+              </a:rPr>
+              <a:t>4</a:t>
+            </a:r>
+            <a:endParaRPr lang="en-US" sz="1600" dirty="0"/>
+          </a:p>
+        </p:txBody>
+      </p:sp>
+      <p:sp>
+        <p:nvSpPr>
+          <p:cNvPr id="22" name="Text 20"/>
+          <p:cNvSpPr/>
+          <p:nvPr/>
+        </p:nvSpPr>
+        <p:spPr>
+          <a:xfrm>
+            <a:off x="1097280" y="3319272"/>
+            <a:ext cx="1828800" cy="365760"/>
+          </a:xfrm>
+          <a:prstGeom prst="rect">
+            <a:avLst/>
+          </a:prstGeom>
+          <a:noFill/>
+          <a:ln/>
+        </p:spPr>
+        <p:txBody>
+          <a:bodyPr wrap="square" lIns="0" tIns="0" rIns="0" bIns="0" rtlCol="0" anchor="ctr"/>
+          <a:lstStyle/>
+          <a:p>
+            <a:pPr indent="0" marL="0">
+              <a:buNone/>
+            </a:pPr>
+            <a:r>
+              <a:rPr lang="en-US" sz="1300" b="1" dirty="0">
                 <a:solidFill>
                   <a:srgbClr val="1E293B"/>
                 </a:solidFill>
@@ -6803,20 +8052,163 @@
                 <a:ea typeface="Calibri" pitchFamily="34" charset="-122"/>
                 <a:cs typeface="Calibri" pitchFamily="34" charset="-120"/>
               </a:rPr>
-              <a:t>Retailer view: monitor competitor prices and get alerts on market shifts</a:t>
-            </a:r>
-            <a:endParaRPr lang="en-US" sz="1100" dirty="0"/>
-          </a:p>
-          <a:p>
-            <a:pPr marL="342900" indent="-342900">
-              <a:spcAft>
-                <a:spcPts val="400"/>
-              </a:spcAft>
-              <a:buSzPct val="100000"/>
-              <a:buChar char="•"/>
-            </a:pPr>
-            <a:r>
-              <a:rPr lang="en-US" sz="1100" dirty="0">
+              <a:t>Results Dashboard</a:t>
+            </a:r>
+            <a:endParaRPr lang="en-US" sz="1300" dirty="0"/>
+          </a:p>
+        </p:txBody>
+      </p:sp>
+      <p:sp>
+        <p:nvSpPr>
+          <p:cNvPr id="23" name="Text 21"/>
+          <p:cNvSpPr/>
+          <p:nvPr/>
+        </p:nvSpPr>
+        <p:spPr>
+          <a:xfrm>
+            <a:off x="594360" y="3794760"/>
+            <a:ext cx="2331720" cy="868680"/>
+          </a:xfrm>
+          <a:prstGeom prst="rect">
+            <a:avLst/>
+          </a:prstGeom>
+          <a:noFill/>
+          <a:ln/>
+        </p:spPr>
+        <p:txBody>
+          <a:bodyPr wrap="square" lIns="0" tIns="0" rIns="0" bIns="0" rtlCol="0" anchor="ctr"/>
+          <a:lstStyle/>
+          <a:p>
+            <a:pPr indent="0" marL="0">
+              <a:buNone/>
+            </a:pPr>
+            <a:r>
+              <a:rPr lang="en-US" sz="1000" dirty="0">
+                <a:solidFill>
+                  <a:srgbClr val="64748B"/>
+                </a:solidFill>
+                <a:latin typeface="Calibri" pitchFamily="34" charset="0"/>
+                <a:ea typeface="Calibri" pitchFamily="34" charset="-122"/>
+                <a:cs typeface="Calibri" pitchFamily="34" charset="-120"/>
+              </a:rPr>
+              <a:t>KPIs, summary table, per-product deep dive, 6 Plotly charts (bar, donut, scatter, etc.).</a:t>
+            </a:r>
+            <a:endParaRPr lang="en-US" sz="1000" dirty="0"/>
+          </a:p>
+        </p:txBody>
+      </p:sp>
+      <p:sp>
+        <p:nvSpPr>
+          <p:cNvPr id="24" name="Shape 22"/>
+          <p:cNvSpPr/>
+          <p:nvPr/>
+        </p:nvSpPr>
+        <p:spPr>
+          <a:xfrm>
+            <a:off x="3337560" y="3154680"/>
+            <a:ext cx="2606040" cy="1645920"/>
+          </a:xfrm>
+          <a:prstGeom prst="rect">
+            <a:avLst/>
+          </a:prstGeom>
+          <a:solidFill>
+            <a:srgbClr val="FFFFFF"/>
+          </a:solidFill>
+          <a:ln/>
+          <a:effectLst>
+            <a:outerShdw sx="100000" sy="100000" kx="0" ky="0" algn="bl" rotWithShape="0" blurRad="50800" dist="25400" dir="8100000">
+              <a:srgbClr val="000000">
+                <a:alpha val="10000"/>
+              </a:srgbClr>
+            </a:outerShdw>
+          </a:effectLst>
+        </p:spPr>
+      </p:sp>
+      <p:sp>
+        <p:nvSpPr>
+          <p:cNvPr id="25" name="Shape 23"/>
+          <p:cNvSpPr/>
+          <p:nvPr/>
+        </p:nvSpPr>
+        <p:spPr>
+          <a:xfrm>
+            <a:off x="3474720" y="3291840"/>
+            <a:ext cx="411480" cy="411480"/>
+          </a:xfrm>
+          <a:prstGeom prst="ellipse">
+            <a:avLst/>
+          </a:prstGeom>
+          <a:solidFill>
+            <a:srgbClr val="D97706"/>
+          </a:solidFill>
+          <a:ln/>
+        </p:spPr>
+      </p:sp>
+      <p:sp>
+        <p:nvSpPr>
+          <p:cNvPr id="26" name="Text 24"/>
+          <p:cNvSpPr/>
+          <p:nvPr/>
+        </p:nvSpPr>
+        <p:spPr>
+          <a:xfrm>
+            <a:off x="3474720" y="3291840"/>
+            <a:ext cx="411480" cy="411480"/>
+          </a:xfrm>
+          <a:prstGeom prst="rect">
+            <a:avLst/>
+          </a:prstGeom>
+          <a:noFill/>
+          <a:ln/>
+        </p:spPr>
+        <p:txBody>
+          <a:bodyPr wrap="square" lIns="0" tIns="0" rIns="0" bIns="0" rtlCol="0" anchor="ctr"/>
+          <a:lstStyle/>
+          <a:p>
+            <a:pPr algn="ctr" indent="0" marL="0">
+              <a:buNone/>
+            </a:pPr>
+            <a:r>
+              <a:rPr lang="en-US" sz="1600" b="1" dirty="0">
+                <a:solidFill>
+                  <a:srgbClr val="FFFFFF"/>
+                </a:solidFill>
+                <a:latin typeface="Calibri" pitchFamily="34" charset="0"/>
+                <a:ea typeface="Calibri" pitchFamily="34" charset="-122"/>
+                <a:cs typeface="Calibri" pitchFamily="34" charset="-120"/>
+              </a:rPr>
+              <a:t>5</a:t>
+            </a:r>
+            <a:endParaRPr lang="en-US" sz="1600" dirty="0"/>
+          </a:p>
+        </p:txBody>
+      </p:sp>
+      <p:sp>
+        <p:nvSpPr>
+          <p:cNvPr id="27" name="Text 25"/>
+          <p:cNvSpPr/>
+          <p:nvPr/>
+        </p:nvSpPr>
+        <p:spPr>
+          <a:xfrm>
+            <a:off x="3977640" y="3319272"/>
+            <a:ext cx="1828800" cy="365760"/>
+          </a:xfrm>
+          <a:prstGeom prst="rect">
+            <a:avLst/>
+          </a:prstGeom>
+          <a:noFill/>
+          <a:ln/>
+        </p:spPr>
+        <p:txBody>
+          <a:bodyPr wrap="square" lIns="0" tIns="0" rIns="0" bIns="0" rtlCol="0" anchor="ctr"/>
+          <a:lstStyle/>
+          <a:p>
+            <a:pPr indent="0" marL="0">
+              <a:buNone/>
+            </a:pPr>
+            <a:r>
+              <a:rPr lang="en-US" sz="1300" b="1" dirty="0">
                 <a:solidFill>
                   <a:srgbClr val="1E293B"/>
                 </a:solidFill>
@@ -6824,20 +8216,163 @@
                 <a:ea typeface="Calibri" pitchFamily="34" charset="-122"/>
                 <a:cs typeface="Calibri" pitchFamily="34" charset="-120"/>
               </a:rPr>
-              <a:t>Buyer view: compare sourcing options with price + quality scores</a:t>
-            </a:r>
-            <a:endParaRPr lang="en-US" sz="1100" dirty="0"/>
-          </a:p>
-          <a:p>
-            <a:pPr marL="342900" indent="-342900">
-              <a:spcAft>
-                <a:spcPts val="400"/>
-              </a:spcAft>
-              <a:buSzPct val="100000"/>
-              <a:buChar char="•"/>
-            </a:pPr>
-            <a:r>
-              <a:rPr lang="en-US" sz="1100" dirty="0">
+              <a:t>AI Analysis</a:t>
+            </a:r>
+            <a:endParaRPr lang="en-US" sz="1300" dirty="0"/>
+          </a:p>
+        </p:txBody>
+      </p:sp>
+      <p:sp>
+        <p:nvSpPr>
+          <p:cNvPr id="28" name="Text 26"/>
+          <p:cNvSpPr/>
+          <p:nvPr/>
+        </p:nvSpPr>
+        <p:spPr>
+          <a:xfrm>
+            <a:off x="3474720" y="3794760"/>
+            <a:ext cx="2331720" cy="868680"/>
+          </a:xfrm>
+          <a:prstGeom prst="rect">
+            <a:avLst/>
+          </a:prstGeom>
+          <a:noFill/>
+          <a:ln/>
+        </p:spPr>
+        <p:txBody>
+          <a:bodyPr wrap="square" lIns="0" tIns="0" rIns="0" bIns="0" rtlCol="0" anchor="ctr"/>
+          <a:lstStyle/>
+          <a:p>
+            <a:pPr indent="0" marL="0">
+              <a:buNone/>
+            </a:pPr>
+            <a:r>
+              <a:rPr lang="en-US" sz="1000" dirty="0">
+                <a:solidFill>
+                  <a:srgbClr val="64748B"/>
+                </a:solidFill>
+                <a:latin typeface="Calibri" pitchFamily="34" charset="0"/>
+                <a:ea typeface="Calibri" pitchFamily="34" charset="-122"/>
+                <a:cs typeface="Calibri" pitchFamily="34" charset="-120"/>
+              </a:rPr>
+              <a:t>3 Claude agents: Market Analyst, Pricing Strategist, Match Validator — each specialized.</a:t>
+            </a:r>
+            <a:endParaRPr lang="en-US" sz="1000" dirty="0"/>
+          </a:p>
+        </p:txBody>
+      </p:sp>
+      <p:sp>
+        <p:nvSpPr>
+          <p:cNvPr id="29" name="Shape 27"/>
+          <p:cNvSpPr/>
+          <p:nvPr/>
+        </p:nvSpPr>
+        <p:spPr>
+          <a:xfrm>
+            <a:off x="6217920" y="3154680"/>
+            <a:ext cx="2606040" cy="1645920"/>
+          </a:xfrm>
+          <a:prstGeom prst="rect">
+            <a:avLst/>
+          </a:prstGeom>
+          <a:solidFill>
+            <a:srgbClr val="FFFFFF"/>
+          </a:solidFill>
+          <a:ln/>
+          <a:effectLst>
+            <a:outerShdw sx="100000" sy="100000" kx="0" ky="0" algn="bl" rotWithShape="0" blurRad="50800" dist="25400" dir="8100000">
+              <a:srgbClr val="000000">
+                <a:alpha val="10000"/>
+              </a:srgbClr>
+            </a:outerShdw>
+          </a:effectLst>
+        </p:spPr>
+      </p:sp>
+      <p:sp>
+        <p:nvSpPr>
+          <p:cNvPr id="30" name="Shape 28"/>
+          <p:cNvSpPr/>
+          <p:nvPr/>
+        </p:nvSpPr>
+        <p:spPr>
+          <a:xfrm>
+            <a:off x="6355080" y="3291840"/>
+            <a:ext cx="411480" cy="411480"/>
+          </a:xfrm>
+          <a:prstGeom prst="ellipse">
+            <a:avLst/>
+          </a:prstGeom>
+          <a:solidFill>
+            <a:srgbClr val="D97706"/>
+          </a:solidFill>
+          <a:ln/>
+        </p:spPr>
+      </p:sp>
+      <p:sp>
+        <p:nvSpPr>
+          <p:cNvPr id="31" name="Text 29"/>
+          <p:cNvSpPr/>
+          <p:nvPr/>
+        </p:nvSpPr>
+        <p:spPr>
+          <a:xfrm>
+            <a:off x="6355080" y="3291840"/>
+            <a:ext cx="411480" cy="411480"/>
+          </a:xfrm>
+          <a:prstGeom prst="rect">
+            <a:avLst/>
+          </a:prstGeom>
+          <a:noFill/>
+          <a:ln/>
+        </p:spPr>
+        <p:txBody>
+          <a:bodyPr wrap="square" lIns="0" tIns="0" rIns="0" bIns="0" rtlCol="0" anchor="ctr"/>
+          <a:lstStyle/>
+          <a:p>
+            <a:pPr algn="ctr" indent="0" marL="0">
+              <a:buNone/>
+            </a:pPr>
+            <a:r>
+              <a:rPr lang="en-US" sz="1600" b="1" dirty="0">
+                <a:solidFill>
+                  <a:srgbClr val="FFFFFF"/>
+                </a:solidFill>
+                <a:latin typeface="Calibri" pitchFamily="34" charset="0"/>
+                <a:ea typeface="Calibri" pitchFamily="34" charset="-122"/>
+                <a:cs typeface="Calibri" pitchFamily="34" charset="-120"/>
+              </a:rPr>
+              <a:t>6</a:t>
+            </a:r>
+            <a:endParaRPr lang="en-US" sz="1600" dirty="0"/>
+          </a:p>
+        </p:txBody>
+      </p:sp>
+      <p:sp>
+        <p:nvSpPr>
+          <p:cNvPr id="32" name="Text 30"/>
+          <p:cNvSpPr/>
+          <p:nvPr/>
+        </p:nvSpPr>
+        <p:spPr>
+          <a:xfrm>
+            <a:off x="6858000" y="3319272"/>
+            <a:ext cx="1828800" cy="365760"/>
+          </a:xfrm>
+          <a:prstGeom prst="rect">
+            <a:avLst/>
+          </a:prstGeom>
+          <a:noFill/>
+          <a:ln/>
+        </p:spPr>
+        <p:txBody>
+          <a:bodyPr wrap="square" lIns="0" tIns="0" rIns="0" bIns="0" rtlCol="0" anchor="ctr"/>
+          <a:lstStyle/>
+          <a:p>
+            <a:pPr indent="0" marL="0">
+              <a:buNone/>
+            </a:pPr>
+            <a:r>
+              <a:rPr lang="en-US" sz="1300" b="1" dirty="0">
                 <a:solidFill>
                   <a:srgbClr val="1E293B"/>
                 </a:solidFill>
@@ -6845,9 +8380,48 @@
                 <a:ea typeface="Calibri" pitchFamily="34" charset="-122"/>
                 <a:cs typeface="Calibri" pitchFamily="34" charset="-120"/>
               </a:rPr>
-              <a:t>Consumer view: search products and see best deals across 5+ retailers</a:t>
-            </a:r>
-            <a:endParaRPr lang="en-US" sz="1100" dirty="0"/>
+              <a:t>Export</a:t>
+            </a:r>
+            <a:endParaRPr lang="en-US" sz="1300" dirty="0"/>
+          </a:p>
+        </p:txBody>
+      </p:sp>
+      <p:sp>
+        <p:nvSpPr>
+          <p:cNvPr id="33" name="Text 31"/>
+          <p:cNvSpPr/>
+          <p:nvPr/>
+        </p:nvSpPr>
+        <p:spPr>
+          <a:xfrm>
+            <a:off x="6355080" y="3794760"/>
+            <a:ext cx="2331720" cy="868680"/>
+          </a:xfrm>
+          <a:prstGeom prst="rect">
+            <a:avLst/>
+          </a:prstGeom>
+          <a:noFill/>
+          <a:ln/>
+        </p:spPr>
+        <p:txBody>
+          <a:bodyPr wrap="square" lIns="0" tIns="0" rIns="0" bIns="0" rtlCol="0" anchor="ctr"/>
+          <a:lstStyle/>
+          <a:p>
+            <a:pPr indent="0" marL="0">
+              <a:buNone/>
+            </a:pPr>
+            <a:r>
+              <a:rPr lang="en-US" sz="1000" dirty="0">
+                <a:solidFill>
+                  <a:srgbClr val="64748B"/>
+                </a:solidFill>
+                <a:latin typeface="Calibri" pitchFamily="34" charset="0"/>
+                <a:ea typeface="Calibri" pitchFamily="34" charset="-122"/>
+                <a:cs typeface="Calibri" pitchFamily="34" charset="-120"/>
+              </a:rPr>
+              <a:t>CSV summary, Excel with competitor URLs, JSON AI analysis report.</a:t>
+            </a:r>
+            <a:endParaRPr lang="en-US" sz="1000" dirty="0"/>
           </a:p>
         </p:txBody>
       </p:sp>
@@ -6891,8 +8465,8 @@
         </p:nvSpPr>
         <p:spPr>
           <a:xfrm>
-            <a:off x="640080" y="365760"/>
-            <a:ext cx="3657600" cy="320040"/>
+            <a:off x="640080" y="320040"/>
+            <a:ext cx="2743200" cy="274320"/>
           </a:xfrm>
           <a:prstGeom prst="rect">
             <a:avLst/>
@@ -6916,7 +8490,7 @@
                 <a:ea typeface="Calibri" pitchFamily="34" charset="-122"/>
                 <a:cs typeface="Calibri" pitchFamily="34" charset="-120"/>
               </a:rPr>
-              <a:t>IMPACT &amp; RESULTS</a:t>
+              <a:t>PROTOTYPE DEMO</a:t>
             </a:r>
             <a:endParaRPr lang="en-US" sz="1100" dirty="0"/>
           </a:p>
@@ -6930,24 +8504,24 @@
         </p:nvSpPr>
         <p:spPr>
           <a:xfrm>
-            <a:off x="640080" y="685800"/>
-            <a:ext cx="7772400" cy="640080"/>
-          </a:xfrm>
-          <a:prstGeom prst="rect">
-            <a:avLst/>
-          </a:prstGeom>
-          <a:noFill/>
-          <a:ln/>
-        </p:spPr>
-        <p:txBody>
-          <a:bodyPr wrap="square" lIns="0" tIns="0" rIns="0" bIns="0" rtlCol="0" anchor="ctr"/>
-          <a:lstStyle/>
-          <a:p>
-            <a:pPr indent="0" marL="0">
-              <a:buNone/>
-            </a:pPr>
-            <a:r>
-              <a:rPr lang="en-US" sz="3200" b="1" dirty="0">
+            <a:off x="640080" y="640080"/>
+            <a:ext cx="7772400" cy="457200"/>
+          </a:xfrm>
+          <a:prstGeom prst="rect">
+            <a:avLst/>
+          </a:prstGeom>
+          <a:noFill/>
+          <a:ln/>
+        </p:spPr>
+        <p:txBody>
+          <a:bodyPr wrap="square" lIns="0" tIns="0" rIns="0" bIns="0" rtlCol="0" anchor="ctr"/>
+          <a:lstStyle/>
+          <a:p>
+            <a:pPr indent="0" marL="0">
+              <a:buNone/>
+            </a:pPr>
+            <a:r>
+              <a:rPr lang="en-US" sz="2800" b="1" dirty="0">
                 <a:solidFill>
                   <a:srgbClr val="1E293B"/>
                 </a:solidFill>
@@ -6955,9 +8529,9 @@
                 <a:ea typeface="Georgia" pitchFamily="34" charset="-122"/>
                 <a:cs typeface="Georgia" pitchFamily="34" charset="-120"/>
               </a:rPr>
-              <a:t>Why PriceHawk Matters</a:t>
-            </a:r>
-            <a:endParaRPr lang="en-US" sz="3200" dirty="0"/>
+              <a:t>PriceHawk in Action</a:t>
+            </a:r>
+            <a:endParaRPr lang="en-US" sz="2800" dirty="0"/>
           </a:p>
         </p:txBody>
       </p:sp>
@@ -6969,8 +8543,8 @@
         </p:nvSpPr>
         <p:spPr>
           <a:xfrm>
-            <a:off x="640080" y="1508760"/>
-            <a:ext cx="2514600" cy="1645920"/>
+            <a:off x="640080" y="1234440"/>
+            <a:ext cx="7863840" cy="2560320"/>
           </a:xfrm>
           <a:prstGeom prst="rect">
             <a:avLst/>
@@ -6988,506 +8562,173 @@
           </a:effectLst>
         </p:spPr>
       </p:sp>
-      <p:pic>
-        <p:nvPicPr>
-          <p:cNvPr id="5" name="Image 0" descr="preencoded.png">    </p:cNvPr>
-          <p:cNvPicPr>
-            <a:picLocks noChangeAspect="1"/>
-          </p:cNvPicPr>
-          <p:nvPr/>
-        </p:nvPicPr>
-        <p:blipFill>
-          <a:blip r:embed="rId1"/>
-          <a:stretch>
-            <a:fillRect/>
-          </a:stretch>
-        </p:blipFill>
-        <p:spPr>
-          <a:xfrm>
-            <a:off x="822960" y="1691640"/>
-            <a:ext cx="365760" cy="365760"/>
-          </a:xfrm>
-          <a:prstGeom prst="rect">
-            <a:avLst/>
-          </a:prstGeom>
-        </p:spPr>
-      </p:pic>
-      <p:sp>
-        <p:nvSpPr>
-          <p:cNvPr id="6" name="Text 3"/>
-          <p:cNvSpPr/>
-          <p:nvPr/>
-        </p:nvSpPr>
-        <p:spPr>
-          <a:xfrm>
-            <a:off x="822960" y="2148840"/>
-            <a:ext cx="2148840" cy="457200"/>
-          </a:xfrm>
-          <a:prstGeom prst="rect">
-            <a:avLst/>
-          </a:prstGeom>
-          <a:noFill/>
-          <a:ln/>
-        </p:spPr>
-        <p:txBody>
-          <a:bodyPr wrap="square" lIns="0" tIns="0" rIns="0" bIns="0" rtlCol="0" anchor="ctr"/>
-          <a:lstStyle/>
-          <a:p>
-            <a:pPr indent="0" marL="0">
-              <a:buNone/>
-            </a:pPr>
-            <a:r>
-              <a:rPr lang="en-US" sz="3200" b="1" dirty="0">
-                <a:solidFill>
-                  <a:srgbClr val="D97706"/>
-                </a:solidFill>
-                <a:latin typeface="Georgia" pitchFamily="34" charset="0"/>
-                <a:ea typeface="Georgia" pitchFamily="34" charset="-122"/>
-                <a:cs typeface="Georgia" pitchFamily="34" charset="-120"/>
-              </a:rPr>
-              <a:t>~23%</a:t>
-            </a:r>
-            <a:endParaRPr lang="en-US" sz="3200" dirty="0"/>
-          </a:p>
-        </p:txBody>
-      </p:sp>
-      <p:sp>
-        <p:nvSpPr>
-          <p:cNvPr id="7" name="Text 4"/>
-          <p:cNvSpPr/>
-          <p:nvPr/>
-        </p:nvSpPr>
-        <p:spPr>
-          <a:xfrm>
-            <a:off x="822960" y="2606040"/>
-            <a:ext cx="2148840" cy="411480"/>
-          </a:xfrm>
-          <a:prstGeom prst="rect">
-            <a:avLst/>
-          </a:prstGeom>
-          <a:noFill/>
-          <a:ln/>
-        </p:spPr>
-        <p:txBody>
-          <a:bodyPr wrap="square" lIns="0" tIns="0" rIns="0" bIns="0" rtlCol="0" anchor="ctr"/>
-          <a:lstStyle/>
-          <a:p>
-            <a:pPr indent="0" marL="0">
-              <a:buNone/>
-            </a:pPr>
-            <a:r>
-              <a:rPr lang="en-US" sz="1200" dirty="0">
-                <a:solidFill>
-                  <a:srgbClr val="64748B"/>
-                </a:solidFill>
-                <a:latin typeface="Calibri" pitchFamily="34" charset="0"/>
-                <a:ea typeface="Calibri" pitchFamily="34" charset="-122"/>
-                <a:cs typeface="Calibri" pitchFamily="34" charset="-120"/>
-              </a:rPr>
-              <a:t>Average savings</a:t>
-            </a:r>
-            <a:endParaRPr lang="en-US" sz="1200" dirty="0"/>
-          </a:p>
-          <a:p>
-            <a:pPr indent="0" marL="0">
-              <a:buNone/>
-            </a:pPr>
-            <a:r>
-              <a:rPr lang="en-US" sz="1200" dirty="0">
-                <a:solidFill>
-                  <a:srgbClr val="64748B"/>
-                </a:solidFill>
-                <a:latin typeface="Calibri" pitchFamily="34" charset="0"/>
-                <a:ea typeface="Calibri" pitchFamily="34" charset="-122"/>
-                <a:cs typeface="Calibri" pitchFamily="34" charset="-120"/>
-              </a:rPr>
-              <a:t>identified for buyers</a:t>
-            </a:r>
-            <a:endParaRPr lang="en-US" sz="1200" dirty="0"/>
-          </a:p>
-        </p:txBody>
-      </p:sp>
-      <p:sp>
-        <p:nvSpPr>
-          <p:cNvPr id="8" name="Shape 5"/>
-          <p:cNvSpPr/>
-          <p:nvPr/>
-        </p:nvSpPr>
-        <p:spPr>
-          <a:xfrm>
-            <a:off x="3429000" y="1508760"/>
-            <a:ext cx="2514600" cy="1645920"/>
+      <p:sp>
+        <p:nvSpPr>
+          <p:cNvPr id="5" name="Shape 3"/>
+          <p:cNvSpPr/>
+          <p:nvPr/>
+        </p:nvSpPr>
+        <p:spPr>
+          <a:xfrm>
+            <a:off x="640080" y="1234440"/>
+            <a:ext cx="7863840" cy="384048"/>
           </a:xfrm>
           <a:prstGeom prst="rect">
             <a:avLst/>
           </a:prstGeom>
           <a:solidFill>
-            <a:srgbClr val="FFFFFF"/>
+            <a:srgbClr val="1E3A5F"/>
           </a:solidFill>
           <a:ln/>
-          <a:effectLst>
-            <a:outerShdw sx="100000" sy="100000" kx="0" ky="0" algn="bl" rotWithShape="0" blurRad="50800" dist="25400" dir="8100000">
-              <a:srgbClr val="000000">
-                <a:alpha val="10000"/>
-              </a:srgbClr>
-            </a:outerShdw>
-          </a:effectLst>
-        </p:spPr>
-      </p:sp>
-      <p:pic>
-        <p:nvPicPr>
-          <p:cNvPr id="9" name="Image 1" descr="preencoded.png">    </p:cNvPr>
-          <p:cNvPicPr>
-            <a:picLocks noChangeAspect="1"/>
-          </p:cNvPicPr>
-          <p:nvPr/>
-        </p:nvPicPr>
-        <p:blipFill>
-          <a:blip r:embed="rId2"/>
-          <a:stretch>
-            <a:fillRect/>
-          </a:stretch>
-        </p:blipFill>
-        <p:spPr>
-          <a:xfrm>
-            <a:off x="3611880" y="1691640"/>
-            <a:ext cx="365760" cy="365760"/>
-          </a:xfrm>
-          <a:prstGeom prst="rect">
-            <a:avLst/>
-          </a:prstGeom>
-        </p:spPr>
-      </p:pic>
-      <p:sp>
-        <p:nvSpPr>
-          <p:cNvPr id="10" name="Text 6"/>
-          <p:cNvSpPr/>
-          <p:nvPr/>
-        </p:nvSpPr>
-        <p:spPr>
-          <a:xfrm>
-            <a:off x="3611880" y="2148840"/>
-            <a:ext cx="2148840" cy="457200"/>
-          </a:xfrm>
-          <a:prstGeom prst="rect">
-            <a:avLst/>
-          </a:prstGeom>
-          <a:noFill/>
-          <a:ln/>
-        </p:spPr>
-        <p:txBody>
-          <a:bodyPr wrap="square" lIns="0" tIns="0" rIns="0" bIns="0" rtlCol="0" anchor="ctr"/>
-          <a:lstStyle/>
-          <a:p>
-            <a:pPr indent="0" marL="0">
-              <a:buNone/>
-            </a:pPr>
-            <a:r>
-              <a:rPr lang="en-US" sz="3200" b="1" dirty="0">
-                <a:solidFill>
-                  <a:srgbClr val="D97706"/>
-                </a:solidFill>
-                <a:latin typeface="Georgia" pitchFamily="34" charset="0"/>
-                <a:ea typeface="Georgia" pitchFamily="34" charset="-122"/>
-                <a:cs typeface="Georgia" pitchFamily="34" charset="-120"/>
-              </a:rPr>
-              <a:t>90%+</a:t>
-            </a:r>
-            <a:endParaRPr lang="en-US" sz="3200" dirty="0"/>
-          </a:p>
-        </p:txBody>
-      </p:sp>
-      <p:sp>
-        <p:nvSpPr>
-          <p:cNvPr id="11" name="Text 7"/>
-          <p:cNvSpPr/>
-          <p:nvPr/>
-        </p:nvSpPr>
-        <p:spPr>
-          <a:xfrm>
-            <a:off x="3611880" y="2606040"/>
-            <a:ext cx="2148840" cy="411480"/>
-          </a:xfrm>
-          <a:prstGeom prst="rect">
-            <a:avLst/>
-          </a:prstGeom>
-          <a:noFill/>
-          <a:ln/>
-        </p:spPr>
-        <p:txBody>
-          <a:bodyPr wrap="square" lIns="0" tIns="0" rIns="0" bIns="0" rtlCol="0" anchor="ctr"/>
-          <a:lstStyle/>
-          <a:p>
-            <a:pPr indent="0" marL="0">
-              <a:buNone/>
-            </a:pPr>
-            <a:r>
-              <a:rPr lang="en-US" sz="1200" dirty="0">
-                <a:solidFill>
-                  <a:srgbClr val="64748B"/>
-                </a:solidFill>
-                <a:latin typeface="Calibri" pitchFamily="34" charset="0"/>
-                <a:ea typeface="Calibri" pitchFamily="34" charset="-122"/>
-                <a:cs typeface="Calibri" pitchFamily="34" charset="-120"/>
-              </a:rPr>
-              <a:t>Product matching</a:t>
-            </a:r>
-            <a:endParaRPr lang="en-US" sz="1200" dirty="0"/>
-          </a:p>
-          <a:p>
-            <a:pPr indent="0" marL="0">
-              <a:buNone/>
-            </a:pPr>
-            <a:r>
-              <a:rPr lang="en-US" sz="1200" dirty="0">
-                <a:solidFill>
-                  <a:srgbClr val="64748B"/>
-                </a:solidFill>
-                <a:latin typeface="Calibri" pitchFamily="34" charset="0"/>
-                <a:ea typeface="Calibri" pitchFamily="34" charset="-122"/>
-                <a:cs typeface="Calibri" pitchFamily="34" charset="-120"/>
-              </a:rPr>
-              <a:t>accuracy with BERT</a:t>
-            </a:r>
-            <a:endParaRPr lang="en-US" sz="1200" dirty="0"/>
-          </a:p>
-        </p:txBody>
-      </p:sp>
-      <p:sp>
-        <p:nvSpPr>
-          <p:cNvPr id="12" name="Shape 8"/>
-          <p:cNvSpPr/>
-          <p:nvPr/>
-        </p:nvSpPr>
-        <p:spPr>
-          <a:xfrm>
-            <a:off x="6217920" y="1508760"/>
-            <a:ext cx="2514600" cy="1645920"/>
-          </a:xfrm>
-          <a:prstGeom prst="rect">
-            <a:avLst/>
-          </a:prstGeom>
-          <a:solidFill>
-            <a:srgbClr val="FFFFFF"/>
-          </a:solidFill>
-          <a:ln/>
-          <a:effectLst>
-            <a:outerShdw sx="100000" sy="100000" kx="0" ky="0" algn="bl" rotWithShape="0" blurRad="50800" dist="25400" dir="8100000">
-              <a:srgbClr val="000000">
-                <a:alpha val="10000"/>
-              </a:srgbClr>
-            </a:outerShdw>
-          </a:effectLst>
-        </p:spPr>
-      </p:sp>
-      <p:pic>
-        <p:nvPicPr>
-          <p:cNvPr id="13" name="Image 2" descr="preencoded.png">    </p:cNvPr>
-          <p:cNvPicPr>
-            <a:picLocks noChangeAspect="1"/>
-          </p:cNvPicPr>
-          <p:nvPr/>
-        </p:nvPicPr>
-        <p:blipFill>
-          <a:blip r:embed="rId3"/>
-          <a:stretch>
-            <a:fillRect/>
-          </a:stretch>
-        </p:blipFill>
-        <p:spPr>
-          <a:xfrm>
-            <a:off x="6400800" y="1691640"/>
-            <a:ext cx="365760" cy="365760"/>
-          </a:xfrm>
-          <a:prstGeom prst="rect">
-            <a:avLst/>
-          </a:prstGeom>
-        </p:spPr>
-      </p:pic>
-      <p:sp>
-        <p:nvSpPr>
-          <p:cNvPr id="14" name="Text 9"/>
-          <p:cNvSpPr/>
-          <p:nvPr/>
-        </p:nvSpPr>
-        <p:spPr>
-          <a:xfrm>
-            <a:off x="6400800" y="2148840"/>
-            <a:ext cx="2148840" cy="457200"/>
-          </a:xfrm>
-          <a:prstGeom prst="rect">
-            <a:avLst/>
-          </a:prstGeom>
-          <a:noFill/>
-          <a:ln/>
-        </p:spPr>
-        <p:txBody>
-          <a:bodyPr wrap="square" lIns="0" tIns="0" rIns="0" bIns="0" rtlCol="0" anchor="ctr"/>
-          <a:lstStyle/>
-          <a:p>
-            <a:pPr indent="0" marL="0">
-              <a:buNone/>
-            </a:pPr>
-            <a:r>
-              <a:rPr lang="en-US" sz="3200" b="1" dirty="0">
-                <a:solidFill>
-                  <a:srgbClr val="D97706"/>
-                </a:solidFill>
-                <a:latin typeface="Georgia" pitchFamily="34" charset="0"/>
-                <a:ea typeface="Georgia" pitchFamily="34" charset="-122"/>
-                <a:cs typeface="Georgia" pitchFamily="34" charset="-120"/>
-              </a:rPr>
-              <a:t>&lt; 3 sec</a:t>
-            </a:r>
-            <a:endParaRPr lang="en-US" sz="3200" dirty="0"/>
-          </a:p>
-        </p:txBody>
-      </p:sp>
-      <p:sp>
-        <p:nvSpPr>
-          <p:cNvPr id="15" name="Text 10"/>
-          <p:cNvSpPr/>
-          <p:nvPr/>
-        </p:nvSpPr>
-        <p:spPr>
-          <a:xfrm>
-            <a:off x="6400800" y="2606040"/>
-            <a:ext cx="2148840" cy="411480"/>
-          </a:xfrm>
-          <a:prstGeom prst="rect">
-            <a:avLst/>
-          </a:prstGeom>
-          <a:noFill/>
-          <a:ln/>
-        </p:spPr>
-        <p:txBody>
-          <a:bodyPr wrap="square" lIns="0" tIns="0" rIns="0" bIns="0" rtlCol="0" anchor="ctr"/>
-          <a:lstStyle/>
-          <a:p>
-            <a:pPr indent="0" marL="0">
-              <a:buNone/>
-            </a:pPr>
-            <a:r>
-              <a:rPr lang="en-US" sz="1200" dirty="0">
-                <a:solidFill>
-                  <a:srgbClr val="64748B"/>
-                </a:solidFill>
-                <a:latin typeface="Calibri" pitchFamily="34" charset="0"/>
-                <a:ea typeface="Calibri" pitchFamily="34" charset="-122"/>
-                <a:cs typeface="Calibri" pitchFamily="34" charset="-120"/>
-              </a:rPr>
-              <a:t>Competitive price</a:t>
-            </a:r>
-            <a:endParaRPr lang="en-US" sz="1200" dirty="0"/>
-          </a:p>
-          <a:p>
-            <a:pPr indent="0" marL="0">
-              <a:buNone/>
-            </a:pPr>
-            <a:r>
-              <a:rPr lang="en-US" sz="1200" dirty="0">
-                <a:solidFill>
-                  <a:srgbClr val="64748B"/>
-                </a:solidFill>
-                <a:latin typeface="Calibri" pitchFamily="34" charset="0"/>
-                <a:ea typeface="Calibri" pitchFamily="34" charset="-122"/>
-                <a:cs typeface="Calibri" pitchFamily="34" charset="-120"/>
-              </a:rPr>
-              <a:t>intelligence delivered</a:t>
-            </a:r>
-            <a:endParaRPr lang="en-US" sz="1200" dirty="0"/>
-          </a:p>
-        </p:txBody>
-      </p:sp>
-      <p:sp>
-        <p:nvSpPr>
-          <p:cNvPr id="16" name="Text 11"/>
-          <p:cNvSpPr/>
-          <p:nvPr/>
-        </p:nvSpPr>
-        <p:spPr>
-          <a:xfrm>
-            <a:off x="640080" y="3383280"/>
-            <a:ext cx="2743200" cy="320040"/>
-          </a:xfrm>
-          <a:prstGeom prst="rect">
-            <a:avLst/>
-          </a:prstGeom>
-          <a:noFill/>
-          <a:ln/>
-        </p:spPr>
-        <p:txBody>
-          <a:bodyPr wrap="square" lIns="0" tIns="0" rIns="0" bIns="0" rtlCol="0" anchor="ctr"/>
-          <a:lstStyle/>
-          <a:p>
-            <a:pPr indent="0" marL="0">
-              <a:buNone/>
-            </a:pPr>
-            <a:r>
-              <a:rPr lang="en-US" sz="1600" b="1" dirty="0">
+        </p:spPr>
+      </p:sp>
+      <p:sp>
+        <p:nvSpPr>
+          <p:cNvPr id="6" name="Text 4"/>
+          <p:cNvSpPr/>
+          <p:nvPr/>
+        </p:nvSpPr>
+        <p:spPr>
+          <a:xfrm>
+            <a:off x="822960" y="1261872"/>
+            <a:ext cx="3657600" cy="329184"/>
+          </a:xfrm>
+          <a:prstGeom prst="rect">
+            <a:avLst/>
+          </a:prstGeom>
+          <a:noFill/>
+          <a:ln/>
+        </p:spPr>
+        <p:txBody>
+          <a:bodyPr wrap="square" lIns="0" tIns="0" rIns="0" bIns="0" rtlCol="0" anchor="ctr"/>
+          <a:lstStyle/>
+          <a:p>
+            <a:pPr indent="0" marL="0">
+              <a:buNone/>
+            </a:pPr>
+            <a:r>
+              <a:rPr lang="en-US" sz="1300" b="1" dirty="0">
+                <a:solidFill>
+                  <a:srgbClr val="FFFFFF"/>
+                </a:solidFill>
+                <a:latin typeface="Calibri" pitchFamily="34" charset="0"/>
+                <a:ea typeface="Calibri" pitchFamily="34" charset="-122"/>
+                <a:cs typeface="Calibri" pitchFamily="34" charset="-120"/>
+              </a:rPr>
+              <a:t>PriceHawk Dashboard</a:t>
+            </a:r>
+            <a:endParaRPr lang="en-US" sz="1300" dirty="0"/>
+          </a:p>
+        </p:txBody>
+      </p:sp>
+      <p:sp>
+        <p:nvSpPr>
+          <p:cNvPr id="7" name="Text 5"/>
+          <p:cNvSpPr/>
+          <p:nvPr/>
+        </p:nvSpPr>
+        <p:spPr>
+          <a:xfrm>
+            <a:off x="1371600" y="1920240"/>
+            <a:ext cx="6400800" cy="1280160"/>
+          </a:xfrm>
+          <a:prstGeom prst="rect">
+            <a:avLst/>
+          </a:prstGeom>
+          <a:noFill/>
+          <a:ln/>
+        </p:spPr>
+        <p:txBody>
+          <a:bodyPr wrap="square" lIns="0" tIns="0" rIns="0" bIns="0" rtlCol="0" anchor="ctr"/>
+          <a:lstStyle/>
+          <a:p>
+            <a:pPr algn="ctr" indent="0" marL="0">
+              <a:buNone/>
+            </a:pPr>
+            <a:r>
+              <a:rPr lang="en-US" sz="2200" dirty="0">
+                <a:solidFill>
+                  <a:srgbClr val="CBD5E1"/>
+                </a:solidFill>
+                <a:latin typeface="Calibri" pitchFamily="34" charset="0"/>
+                <a:ea typeface="Calibri" pitchFamily="34" charset="-122"/>
+                <a:cs typeface="Calibri" pitchFamily="34" charset="-120"/>
+              </a:rPr>
+              <a:t>[  Insert Live Demo Screenshot Here  ]</a:t>
+            </a:r>
+            <a:endParaRPr lang="en-US" sz="2200" dirty="0"/>
+          </a:p>
+        </p:txBody>
+      </p:sp>
+      <p:sp>
+        <p:nvSpPr>
+          <p:cNvPr id="8" name="Text 6"/>
+          <p:cNvSpPr/>
+          <p:nvPr/>
+        </p:nvSpPr>
+        <p:spPr>
+          <a:xfrm>
+            <a:off x="640080" y="3977640"/>
+            <a:ext cx="2743200" cy="274320"/>
+          </a:xfrm>
+          <a:prstGeom prst="rect">
+            <a:avLst/>
+          </a:prstGeom>
+          <a:noFill/>
+          <a:ln/>
+        </p:spPr>
+        <p:txBody>
+          <a:bodyPr wrap="square" lIns="0" tIns="0" rIns="0" bIns="0" rtlCol="0" anchor="ctr"/>
+          <a:lstStyle/>
+          <a:p>
+            <a:pPr indent="0" marL="0">
+              <a:buNone/>
+            </a:pPr>
+            <a:r>
+              <a:rPr lang="en-US" sz="1300" b="1" dirty="0">
                 <a:solidFill>
                   <a:srgbClr val="1E293B"/>
                 </a:solidFill>
-                <a:latin typeface="Georgia" pitchFamily="34" charset="0"/>
-                <a:ea typeface="Georgia" pitchFamily="34" charset="-122"/>
-                <a:cs typeface="Georgia" pitchFamily="34" charset="-120"/>
-              </a:rPr>
-              <a:t>Business Value</a:t>
-            </a:r>
-            <a:endParaRPr lang="en-US" sz="1600" dirty="0"/>
-          </a:p>
-        </p:txBody>
-      </p:sp>
-      <p:pic>
-        <p:nvPicPr>
-          <p:cNvPr id="17" name="Image 3" descr="preencoded.png">    </p:cNvPr>
-          <p:cNvPicPr>
-            <a:picLocks noChangeAspect="1"/>
-          </p:cNvPicPr>
-          <p:nvPr/>
-        </p:nvPicPr>
-        <p:blipFill>
-          <a:blip r:embed="rId4"/>
-          <a:stretch>
-            <a:fillRect/>
-          </a:stretch>
-        </p:blipFill>
-        <p:spPr>
-          <a:xfrm>
-            <a:off x="640080" y="3822192"/>
-            <a:ext cx="201168" cy="201168"/>
-          </a:xfrm>
-          <a:prstGeom prst="rect">
-            <a:avLst/>
-          </a:prstGeom>
-        </p:spPr>
-      </p:pic>
-      <p:sp>
-        <p:nvSpPr>
-          <p:cNvPr id="18" name="Text 12"/>
-          <p:cNvSpPr/>
-          <p:nvPr/>
-        </p:nvSpPr>
-        <p:spPr>
-          <a:xfrm>
-            <a:off x="960120" y="3794760"/>
-            <a:ext cx="7498080" cy="274320"/>
-          </a:xfrm>
-          <a:prstGeom prst="rect">
-            <a:avLst/>
-          </a:prstGeom>
-          <a:noFill/>
-          <a:ln/>
-        </p:spPr>
-        <p:txBody>
-          <a:bodyPr wrap="square" lIns="0" tIns="0" rIns="0" bIns="0" rtlCol="0" anchor="ctr"/>
-          <a:lstStyle/>
-          <a:p>
-            <a:pPr indent="0" marL="0">
-              <a:buNone/>
-            </a:pPr>
-            <a:r>
-              <a:rPr lang="en-US" sz="1200" dirty="0">
+                <a:latin typeface="Calibri" pitchFamily="34" charset="0"/>
+                <a:ea typeface="Calibri" pitchFamily="34" charset="-122"/>
+                <a:cs typeface="Calibri" pitchFamily="34" charset="-120"/>
+              </a:rPr>
+              <a:t>Key Demo Features</a:t>
+            </a:r>
+            <a:endParaRPr lang="en-US" sz="1300" dirty="0"/>
+          </a:p>
+        </p:txBody>
+      </p:sp>
+      <p:sp>
+        <p:nvSpPr>
+          <p:cNvPr id="9" name="Text 7"/>
+          <p:cNvSpPr/>
+          <p:nvPr/>
+        </p:nvSpPr>
+        <p:spPr>
+          <a:xfrm>
+            <a:off x="640080" y="4297680"/>
+            <a:ext cx="7772400" cy="731520"/>
+          </a:xfrm>
+          <a:prstGeom prst="rect">
+            <a:avLst/>
+          </a:prstGeom>
+          <a:noFill/>
+          <a:ln/>
+        </p:spPr>
+        <p:txBody>
+          <a:bodyPr wrap="square" lIns="0" tIns="0" rIns="0" bIns="0" rtlCol="0" anchor="ctr"/>
+          <a:lstStyle/>
+          <a:p>
+            <a:pPr marL="342900" indent="-342900">
+              <a:spcAft>
+                <a:spcPts val="300"/>
+              </a:spcAft>
+              <a:buSzPct val="100000"/>
+              <a:buChar char="•"/>
+            </a:pPr>
+            <a:r>
+              <a:rPr lang="en-US" sz="1050" dirty="0">
                 <a:solidFill>
                   <a:srgbClr val="1E293B"/>
                 </a:solidFill>
@@ -7495,62 +8736,20 @@
                 <a:ea typeface="Calibri" pitchFamily="34" charset="-122"/>
                 <a:cs typeface="Calibri" pitchFamily="34" charset="-120"/>
               </a:rPr>
-              <a:t>Retailers gain real-time competitor intelligence to optimize pricing strategies</a:t>
-            </a:r>
-            <a:endParaRPr lang="en-US" sz="1200" dirty="0"/>
-          </a:p>
-        </p:txBody>
-      </p:sp>
-      <p:pic>
-        <p:nvPicPr>
-          <p:cNvPr id="19" name="Image 4" descr="preencoded.png">    </p:cNvPr>
-          <p:cNvPicPr>
-            <a:picLocks noChangeAspect="1"/>
-          </p:cNvPicPr>
-          <p:nvPr/>
-        </p:nvPicPr>
-        <p:blipFill>
-          <a:blip r:embed="rId5"/>
-          <a:stretch>
-            <a:fillRect/>
-          </a:stretch>
-        </p:blipFill>
-        <p:spPr>
-          <a:xfrm>
-            <a:off x="640080" y="4142232"/>
-            <a:ext cx="201168" cy="201168"/>
-          </a:xfrm>
-          <a:prstGeom prst="rect">
-            <a:avLst/>
-          </a:prstGeom>
-        </p:spPr>
-      </p:pic>
-      <p:sp>
-        <p:nvSpPr>
-          <p:cNvPr id="20" name="Text 13"/>
-          <p:cNvSpPr/>
-          <p:nvPr/>
-        </p:nvSpPr>
-        <p:spPr>
-          <a:xfrm>
-            <a:off x="960120" y="4114800"/>
-            <a:ext cx="7498080" cy="274320"/>
-          </a:xfrm>
-          <a:prstGeom prst="rect">
-            <a:avLst/>
-          </a:prstGeom>
-          <a:noFill/>
-          <a:ln/>
-        </p:spPr>
-        <p:txBody>
-          <a:bodyPr wrap="square" lIns="0" tIns="0" rIns="0" bIns="0" rtlCol="0" anchor="ctr"/>
-          <a:lstStyle/>
-          <a:p>
-            <a:pPr indent="0" marL="0">
-              <a:buNone/>
-            </a:pPr>
-            <a:r>
-              <a:rPr lang="en-US" sz="1200" dirty="0">
+              <a:t>Retailer view: monitor competitor prices and get alerts on market shifts</a:t>
+            </a:r>
+            <a:endParaRPr lang="en-US" sz="1050" dirty="0"/>
+          </a:p>
+          <a:p>
+            <a:pPr marL="342900" indent="-342900">
+              <a:spcAft>
+                <a:spcPts val="300"/>
+              </a:spcAft>
+              <a:buSzPct val="100000"/>
+              <a:buChar char="•"/>
+            </a:pPr>
+            <a:r>
+              <a:rPr lang="en-US" sz="1050" dirty="0">
                 <a:solidFill>
                   <a:srgbClr val="1E293B"/>
                 </a:solidFill>
@@ -7558,62 +8757,20 @@
                 <a:ea typeface="Calibri" pitchFamily="34" charset="-122"/>
                 <a:cs typeface="Calibri" pitchFamily="34" charset="-120"/>
               </a:rPr>
-              <a:t>Retail buyers identify best sourcing options faster, cutting procurement costs</a:t>
-            </a:r>
-            <a:endParaRPr lang="en-US" sz="1200" dirty="0"/>
-          </a:p>
-        </p:txBody>
-      </p:sp>
-      <p:pic>
-        <p:nvPicPr>
-          <p:cNvPr id="21" name="Image 5" descr="preencoded.png">    </p:cNvPr>
-          <p:cNvPicPr>
-            <a:picLocks noChangeAspect="1"/>
-          </p:cNvPicPr>
-          <p:nvPr/>
-        </p:nvPicPr>
-        <p:blipFill>
-          <a:blip r:embed="rId6"/>
-          <a:stretch>
-            <a:fillRect/>
-          </a:stretch>
-        </p:blipFill>
-        <p:spPr>
-          <a:xfrm>
-            <a:off x="640080" y="4462272"/>
-            <a:ext cx="201168" cy="201168"/>
-          </a:xfrm>
-          <a:prstGeom prst="rect">
-            <a:avLst/>
-          </a:prstGeom>
-        </p:spPr>
-      </p:pic>
-      <p:sp>
-        <p:nvSpPr>
-          <p:cNvPr id="22" name="Text 14"/>
-          <p:cNvSpPr/>
-          <p:nvPr/>
-        </p:nvSpPr>
-        <p:spPr>
-          <a:xfrm>
-            <a:off x="960120" y="4434840"/>
-            <a:ext cx="7498080" cy="274320"/>
-          </a:xfrm>
-          <a:prstGeom prst="rect">
-            <a:avLst/>
-          </a:prstGeom>
-          <a:noFill/>
-          <a:ln/>
-        </p:spPr>
-        <p:txBody>
-          <a:bodyPr wrap="square" lIns="0" tIns="0" rIns="0" bIns="0" rtlCol="0" anchor="ctr"/>
-          <a:lstStyle/>
-          <a:p>
-            <a:pPr indent="0" marL="0">
-              <a:buNone/>
-            </a:pPr>
-            <a:r>
-              <a:rPr lang="en-US" sz="1200" dirty="0">
+              <a:t>Buyer view: compare sourcing options with price + quality scores</a:t>
+            </a:r>
+            <a:endParaRPr lang="en-US" sz="1050" dirty="0"/>
+          </a:p>
+          <a:p>
+            <a:pPr marL="342900" indent="-342900">
+              <a:spcAft>
+                <a:spcPts val="300"/>
+              </a:spcAft>
+              <a:buSzPct val="100000"/>
+              <a:buChar char="•"/>
+            </a:pPr>
+            <a:r>
+              <a:rPr lang="en-US" sz="1050" dirty="0">
                 <a:solidFill>
                   <a:srgbClr val="1E293B"/>
                 </a:solidFill>
@@ -7621,62 +8778,20 @@
                 <a:ea typeface="Calibri" pitchFamily="34" charset="-122"/>
                 <a:cs typeface="Calibri" pitchFamily="34" charset="-120"/>
               </a:rPr>
-              <a:t>Consumers make data-driven purchasing decisions with price + quality insights</a:t>
-            </a:r>
-            <a:endParaRPr lang="en-US" sz="1200" dirty="0"/>
-          </a:p>
-        </p:txBody>
-      </p:sp>
-      <p:pic>
-        <p:nvPicPr>
-          <p:cNvPr id="23" name="Image 6" descr="preencoded.png">    </p:cNvPr>
-          <p:cNvPicPr>
-            <a:picLocks noChangeAspect="1"/>
-          </p:cNvPicPr>
-          <p:nvPr/>
-        </p:nvPicPr>
-        <p:blipFill>
-          <a:blip r:embed="rId7"/>
-          <a:stretch>
-            <a:fillRect/>
-          </a:stretch>
-        </p:blipFill>
-        <p:spPr>
-          <a:xfrm>
-            <a:off x="640080" y="4782312"/>
-            <a:ext cx="201168" cy="201168"/>
-          </a:xfrm>
-          <a:prstGeom prst="rect">
-            <a:avLst/>
-          </a:prstGeom>
-        </p:spPr>
-      </p:pic>
-      <p:sp>
-        <p:nvSpPr>
-          <p:cNvPr id="24" name="Text 15"/>
-          <p:cNvSpPr/>
-          <p:nvPr/>
-        </p:nvSpPr>
-        <p:spPr>
-          <a:xfrm>
-            <a:off x="960120" y="4754880"/>
-            <a:ext cx="7498080" cy="274320"/>
-          </a:xfrm>
-          <a:prstGeom prst="rect">
-            <a:avLst/>
-          </a:prstGeom>
-          <a:noFill/>
-          <a:ln/>
-        </p:spPr>
-        <p:txBody>
-          <a:bodyPr wrap="square" lIns="0" tIns="0" rIns="0" bIns="0" rtlCol="0" anchor="ctr"/>
-          <a:lstStyle/>
-          <a:p>
-            <a:pPr indent="0" marL="0">
-              <a:buNone/>
-            </a:pPr>
-            <a:r>
-              <a:rPr lang="en-US" sz="1200" dirty="0">
+              <a:t>Consumer view: search products and see best deals across 5+ retailers</a:t>
+            </a:r>
+            <a:endParaRPr lang="en-US" sz="1050" dirty="0"/>
+          </a:p>
+          <a:p>
+            <a:pPr marL="342900" indent="-342900">
+              <a:spcAft>
+                <a:spcPts val="300"/>
+              </a:spcAft>
+              <a:buSzPct val="100000"/>
+              <a:buChar char="•"/>
+            </a:pPr>
+            <a:r>
+              <a:rPr lang="en-US" sz="1050" dirty="0">
                 <a:solidFill>
                   <a:srgbClr val="1E293B"/>
                 </a:solidFill>
@@ -7684,9 +8799,9 @@
                 <a:ea typeface="Calibri" pitchFamily="34" charset="-122"/>
                 <a:cs typeface="Calibri" pitchFamily="34" charset="-120"/>
               </a:rPr>
-              <a:t>NLP-based matching outperforms keyword-only tools across all user segments</a:t>
-            </a:r>
-            <a:endParaRPr lang="en-US" sz="1200" dirty="0"/>
+              <a:t>AI agents: market analysis, pricing strategy, and match validation</a:t>
+            </a:r>
+            <a:endParaRPr lang="en-US" sz="1050" dirty="0"/>
           </a:p>
         </p:txBody>
       </p:sp>
@@ -7731,7 +8846,7 @@
         <p:spPr>
           <a:xfrm>
             <a:off x="640080" y="365760"/>
-            <a:ext cx="2743200" cy="320040"/>
+            <a:ext cx="3657600" cy="320040"/>
           </a:xfrm>
           <a:prstGeom prst="rect">
             <a:avLst/>
@@ -7755,7 +8870,7 @@
                 <a:ea typeface="Calibri" pitchFamily="34" charset="-122"/>
                 <a:cs typeface="Calibri" pitchFamily="34" charset="-120"/>
               </a:rPr>
-              <a:t>FUTURE ROADMAP</a:t>
+              <a:t>IMPACT &amp; RESULTS</a:t>
             </a:r>
             <a:endParaRPr lang="en-US" sz="1100" dirty="0"/>
           </a:p>
@@ -7794,7 +8909,7 @@
                 <a:ea typeface="Georgia" pitchFamily="34" charset="-122"/>
                 <a:cs typeface="Georgia" pitchFamily="34" charset="-120"/>
               </a:rPr>
-              <a:t>What's Next for PriceHawk</a:t>
+              <a:t>Why PriceHawk Matters</a:t>
             </a:r>
             <a:endParaRPr lang="en-US" sz="3200" dirty="0"/>
           </a:p>
@@ -7808,41 +8923,28 @@
         </p:nvSpPr>
         <p:spPr>
           <a:xfrm>
-            <a:off x="1051560" y="2240280"/>
-            <a:ext cx="36576" cy="457200"/>
+            <a:off x="640080" y="1508760"/>
+            <a:ext cx="2514600" cy="1645920"/>
           </a:xfrm>
           <a:prstGeom prst="rect">
             <a:avLst/>
           </a:prstGeom>
           <a:solidFill>
-            <a:srgbClr val="D97706"/>
+            <a:srgbClr val="FFFFFF"/>
           </a:solidFill>
           <a:ln/>
-        </p:spPr>
-      </p:sp>
-      <p:sp>
-        <p:nvSpPr>
-          <p:cNvPr id="5" name="Shape 3"/>
-          <p:cNvSpPr/>
-          <p:nvPr/>
-        </p:nvSpPr>
-        <p:spPr>
-          <a:xfrm>
-            <a:off x="777240" y="1645920"/>
-            <a:ext cx="594360" cy="594360"/>
-          </a:xfrm>
-          <a:prstGeom prst="ellipse">
-            <a:avLst/>
-          </a:prstGeom>
-          <a:solidFill>
-            <a:srgbClr val="D97706"/>
-          </a:solidFill>
-          <a:ln/>
+          <a:effectLst>
+            <a:outerShdw sx="100000" sy="100000" kx="0" ky="0" algn="bl" rotWithShape="0" blurRad="50800" dist="25400" dir="8100000">
+              <a:srgbClr val="000000">
+                <a:alpha val="10000"/>
+              </a:srgbClr>
+            </a:outerShdw>
+          </a:effectLst>
         </p:spPr>
       </p:sp>
       <p:pic>
         <p:nvPicPr>
-          <p:cNvPr id="6" name="Image 0" descr="preencoded.png">    </p:cNvPr>
+          <p:cNvPr id="5" name="Image 0" descr="preencoded.png">    </p:cNvPr>
           <p:cNvPicPr>
             <a:picLocks noChangeAspect="1"/>
           </p:cNvPicPr>
@@ -7856,7 +8958,7 @@
         </p:blipFill>
         <p:spPr>
           <a:xfrm>
-            <a:off x="886968" y="1755648"/>
+            <a:off x="822960" y="1691640"/>
             <a:ext cx="365760" cy="365760"/>
           </a:xfrm>
           <a:prstGeom prst="rect">
@@ -7866,14 +8968,109 @@
       </p:pic>
       <p:sp>
         <p:nvSpPr>
-          <p:cNvPr id="7" name="Shape 4"/>
-          <p:cNvSpPr/>
-          <p:nvPr/>
-        </p:nvSpPr>
-        <p:spPr>
-          <a:xfrm>
-            <a:off x="1645920" y="1508760"/>
-            <a:ext cx="6675120" cy="868680"/>
+          <p:cNvPr id="6" name="Text 3"/>
+          <p:cNvSpPr/>
+          <p:nvPr/>
+        </p:nvSpPr>
+        <p:spPr>
+          <a:xfrm>
+            <a:off x="822960" y="2148840"/>
+            <a:ext cx="2148840" cy="457200"/>
+          </a:xfrm>
+          <a:prstGeom prst="rect">
+            <a:avLst/>
+          </a:prstGeom>
+          <a:noFill/>
+          <a:ln/>
+        </p:spPr>
+        <p:txBody>
+          <a:bodyPr wrap="square" lIns="0" tIns="0" rIns="0" bIns="0" rtlCol="0" anchor="ctr"/>
+          <a:lstStyle/>
+          <a:p>
+            <a:pPr indent="0" marL="0">
+              <a:buNone/>
+            </a:pPr>
+            <a:r>
+              <a:rPr lang="en-US" sz="3200" b="1" dirty="0">
+                <a:solidFill>
+                  <a:srgbClr val="D97706"/>
+                </a:solidFill>
+                <a:latin typeface="Georgia" pitchFamily="34" charset="0"/>
+                <a:ea typeface="Georgia" pitchFamily="34" charset="-122"/>
+                <a:cs typeface="Georgia" pitchFamily="34" charset="-120"/>
+              </a:rPr>
+              <a:t>~23%</a:t>
+            </a:r>
+            <a:endParaRPr lang="en-US" sz="3200" dirty="0"/>
+          </a:p>
+        </p:txBody>
+      </p:sp>
+      <p:sp>
+        <p:nvSpPr>
+          <p:cNvPr id="7" name="Text 4"/>
+          <p:cNvSpPr/>
+          <p:nvPr/>
+        </p:nvSpPr>
+        <p:spPr>
+          <a:xfrm>
+            <a:off x="822960" y="2606040"/>
+            <a:ext cx="2148840" cy="411480"/>
+          </a:xfrm>
+          <a:prstGeom prst="rect">
+            <a:avLst/>
+          </a:prstGeom>
+          <a:noFill/>
+          <a:ln/>
+        </p:spPr>
+        <p:txBody>
+          <a:bodyPr wrap="square" lIns="0" tIns="0" rIns="0" bIns="0" rtlCol="0" anchor="ctr"/>
+          <a:lstStyle/>
+          <a:p>
+            <a:pPr indent="0" marL="0">
+              <a:buNone/>
+            </a:pPr>
+            <a:r>
+              <a:rPr lang="en-US" sz="1200" dirty="0">
+                <a:solidFill>
+                  <a:srgbClr val="64748B"/>
+                </a:solidFill>
+                <a:latin typeface="Calibri" pitchFamily="34" charset="0"/>
+                <a:ea typeface="Calibri" pitchFamily="34" charset="-122"/>
+                <a:cs typeface="Calibri" pitchFamily="34" charset="-120"/>
+              </a:rPr>
+              <a:t>Average savings</a:t>
+            </a:r>
+            <a:endParaRPr lang="en-US" sz="1200" dirty="0"/>
+          </a:p>
+          <a:p>
+            <a:pPr indent="0" marL="0">
+              <a:buNone/>
+            </a:pPr>
+            <a:r>
+              <a:rPr lang="en-US" sz="1200" dirty="0">
+                <a:solidFill>
+                  <a:srgbClr val="64748B"/>
+                </a:solidFill>
+                <a:latin typeface="Calibri" pitchFamily="34" charset="0"/>
+                <a:ea typeface="Calibri" pitchFamily="34" charset="-122"/>
+                <a:cs typeface="Calibri" pitchFamily="34" charset="-120"/>
+              </a:rPr>
+              <a:t>identified for buyers</a:t>
+            </a:r>
+            <a:endParaRPr lang="en-US" sz="1200" dirty="0"/>
+          </a:p>
+        </p:txBody>
+      </p:sp>
+      <p:sp>
+        <p:nvSpPr>
+          <p:cNvPr id="8" name="Shape 5"/>
+          <p:cNvSpPr/>
+          <p:nvPr/>
+        </p:nvSpPr>
+        <p:spPr>
+          <a:xfrm>
+            <a:off x="3429000" y="1508760"/>
+            <a:ext cx="2514600" cy="1645920"/>
           </a:xfrm>
           <a:prstGeom prst="rect">
             <a:avLst/>
@@ -7891,166 +9088,9 @@
           </a:effectLst>
         </p:spPr>
       </p:sp>
-      <p:sp>
-        <p:nvSpPr>
-          <p:cNvPr id="8" name="Text 5"/>
-          <p:cNvSpPr/>
-          <p:nvPr/>
-        </p:nvSpPr>
-        <p:spPr>
-          <a:xfrm>
-            <a:off x="1828800" y="1581912"/>
-            <a:ext cx="1097280" cy="228600"/>
-          </a:xfrm>
-          <a:prstGeom prst="rect">
-            <a:avLst/>
-          </a:prstGeom>
-          <a:noFill/>
-          <a:ln/>
-        </p:spPr>
-        <p:txBody>
-          <a:bodyPr wrap="square" lIns="0" tIns="0" rIns="0" bIns="0" rtlCol="0" anchor="ctr"/>
-          <a:lstStyle/>
-          <a:p>
-            <a:pPr indent="0" marL="0">
-              <a:buNone/>
-            </a:pPr>
-            <a:r>
-              <a:rPr lang="en-US" sz="1000" b="1" dirty="0">
-                <a:solidFill>
-                  <a:srgbClr val="D97706"/>
-                </a:solidFill>
-                <a:latin typeface="Calibri" pitchFamily="34" charset="0"/>
-                <a:ea typeface="Calibri" pitchFamily="34" charset="-122"/>
-                <a:cs typeface="Calibri" pitchFamily="34" charset="-120"/>
-              </a:rPr>
-              <a:t>Phase 1</a:t>
-            </a:r>
-            <a:endParaRPr lang="en-US" sz="1000" dirty="0"/>
-          </a:p>
-        </p:txBody>
-      </p:sp>
-      <p:sp>
-        <p:nvSpPr>
-          <p:cNvPr id="9" name="Text 6"/>
-          <p:cNvSpPr/>
-          <p:nvPr/>
-        </p:nvSpPr>
-        <p:spPr>
-          <a:xfrm>
-            <a:off x="1828800" y="1783080"/>
-            <a:ext cx="6309360" cy="274320"/>
-          </a:xfrm>
-          <a:prstGeom prst="rect">
-            <a:avLst/>
-          </a:prstGeom>
-          <a:noFill/>
-          <a:ln/>
-        </p:spPr>
-        <p:txBody>
-          <a:bodyPr wrap="square" lIns="0" tIns="0" rIns="0" bIns="0" rtlCol="0" anchor="ctr"/>
-          <a:lstStyle/>
-          <a:p>
-            <a:pPr indent="0" marL="0">
-              <a:buNone/>
-            </a:pPr>
-            <a:r>
-              <a:rPr lang="en-US" sz="1400" b="1" dirty="0">
-                <a:solidFill>
-                  <a:srgbClr val="1E293B"/>
-                </a:solidFill>
-                <a:latin typeface="Calibri" pitchFamily="34" charset="0"/>
-                <a:ea typeface="Calibri" pitchFamily="34" charset="-122"/>
-                <a:cs typeface="Calibri" pitchFamily="34" charset="-120"/>
-              </a:rPr>
-              <a:t>Expand Retailer Coverage</a:t>
-            </a:r>
-            <a:endParaRPr lang="en-US" sz="1400" dirty="0"/>
-          </a:p>
-        </p:txBody>
-      </p:sp>
-      <p:sp>
-        <p:nvSpPr>
-          <p:cNvPr id="10" name="Text 7"/>
-          <p:cNvSpPr/>
-          <p:nvPr/>
-        </p:nvSpPr>
-        <p:spPr>
-          <a:xfrm>
-            <a:off x="1828800" y="2057400"/>
-            <a:ext cx="6309360" cy="274320"/>
-          </a:xfrm>
-          <a:prstGeom prst="rect">
-            <a:avLst/>
-          </a:prstGeom>
-          <a:noFill/>
-          <a:ln/>
-        </p:spPr>
-        <p:txBody>
-          <a:bodyPr wrap="square" lIns="0" tIns="0" rIns="0" bIns="0" rtlCol="0" anchor="ctr"/>
-          <a:lstStyle/>
-          <a:p>
-            <a:pPr indent="0" marL="0">
-              <a:buNone/>
-            </a:pPr>
-            <a:r>
-              <a:rPr lang="en-US" sz="1100" dirty="0">
-                <a:solidFill>
-                  <a:srgbClr val="64748B"/>
-                </a:solidFill>
-                <a:latin typeface="Calibri" pitchFamily="34" charset="0"/>
-                <a:ea typeface="Calibri" pitchFamily="34" charset="-122"/>
-                <a:cs typeface="Calibri" pitchFamily="34" charset="-120"/>
-              </a:rPr>
-              <a:t>Add 10+ additional retailers and international market support.</a:t>
-            </a:r>
-            <a:endParaRPr lang="en-US" sz="1100" dirty="0"/>
-          </a:p>
-        </p:txBody>
-      </p:sp>
-      <p:sp>
-        <p:nvSpPr>
-          <p:cNvPr id="11" name="Shape 8"/>
-          <p:cNvSpPr/>
-          <p:nvPr/>
-        </p:nvSpPr>
-        <p:spPr>
-          <a:xfrm>
-            <a:off x="1051560" y="3383280"/>
-            <a:ext cx="36576" cy="457200"/>
-          </a:xfrm>
-          <a:prstGeom prst="rect">
-            <a:avLst/>
-          </a:prstGeom>
-          <a:solidFill>
-            <a:srgbClr val="D97706"/>
-          </a:solidFill>
-          <a:ln/>
-        </p:spPr>
-      </p:sp>
-      <p:sp>
-        <p:nvSpPr>
-          <p:cNvPr id="12" name="Shape 9"/>
-          <p:cNvSpPr/>
-          <p:nvPr/>
-        </p:nvSpPr>
-        <p:spPr>
-          <a:xfrm>
-            <a:off x="777240" y="2788920"/>
-            <a:ext cx="594360" cy="594360"/>
-          </a:xfrm>
-          <a:prstGeom prst="ellipse">
-            <a:avLst/>
-          </a:prstGeom>
-          <a:solidFill>
-            <a:srgbClr val="D97706"/>
-          </a:solidFill>
-          <a:ln/>
-        </p:spPr>
-      </p:sp>
       <p:pic>
         <p:nvPicPr>
-          <p:cNvPr id="13" name="Image 1" descr="preencoded.png">    </p:cNvPr>
+          <p:cNvPr id="9" name="Image 1" descr="preencoded.png">    </p:cNvPr>
           <p:cNvPicPr>
             <a:picLocks noChangeAspect="1"/>
           </p:cNvPicPr>
@@ -8064,7 +9104,7 @@
         </p:blipFill>
         <p:spPr>
           <a:xfrm>
-            <a:off x="886968" y="2898648"/>
+            <a:off x="3611880" y="1691640"/>
             <a:ext cx="365760" cy="365760"/>
           </a:xfrm>
           <a:prstGeom prst="rect">
@@ -8074,14 +9114,109 @@
       </p:pic>
       <p:sp>
         <p:nvSpPr>
-          <p:cNvPr id="14" name="Shape 10"/>
-          <p:cNvSpPr/>
-          <p:nvPr/>
-        </p:nvSpPr>
-        <p:spPr>
-          <a:xfrm>
-            <a:off x="1645920" y="2651760"/>
-            <a:ext cx="6675120" cy="868680"/>
+          <p:cNvPr id="10" name="Text 6"/>
+          <p:cNvSpPr/>
+          <p:nvPr/>
+        </p:nvSpPr>
+        <p:spPr>
+          <a:xfrm>
+            <a:off x="3611880" y="2148840"/>
+            <a:ext cx="2148840" cy="457200"/>
+          </a:xfrm>
+          <a:prstGeom prst="rect">
+            <a:avLst/>
+          </a:prstGeom>
+          <a:noFill/>
+          <a:ln/>
+        </p:spPr>
+        <p:txBody>
+          <a:bodyPr wrap="square" lIns="0" tIns="0" rIns="0" bIns="0" rtlCol="0" anchor="ctr"/>
+          <a:lstStyle/>
+          <a:p>
+            <a:pPr indent="0" marL="0">
+              <a:buNone/>
+            </a:pPr>
+            <a:r>
+              <a:rPr lang="en-US" sz="3200" b="1" dirty="0">
+                <a:solidFill>
+                  <a:srgbClr val="D97706"/>
+                </a:solidFill>
+                <a:latin typeface="Georgia" pitchFamily="34" charset="0"/>
+                <a:ea typeface="Georgia" pitchFamily="34" charset="-122"/>
+                <a:cs typeface="Georgia" pitchFamily="34" charset="-120"/>
+              </a:rPr>
+              <a:t>90%+</a:t>
+            </a:r>
+            <a:endParaRPr lang="en-US" sz="3200" dirty="0"/>
+          </a:p>
+        </p:txBody>
+      </p:sp>
+      <p:sp>
+        <p:nvSpPr>
+          <p:cNvPr id="11" name="Text 7"/>
+          <p:cNvSpPr/>
+          <p:nvPr/>
+        </p:nvSpPr>
+        <p:spPr>
+          <a:xfrm>
+            <a:off x="3611880" y="2606040"/>
+            <a:ext cx="2148840" cy="411480"/>
+          </a:xfrm>
+          <a:prstGeom prst="rect">
+            <a:avLst/>
+          </a:prstGeom>
+          <a:noFill/>
+          <a:ln/>
+        </p:spPr>
+        <p:txBody>
+          <a:bodyPr wrap="square" lIns="0" tIns="0" rIns="0" bIns="0" rtlCol="0" anchor="ctr"/>
+          <a:lstStyle/>
+          <a:p>
+            <a:pPr indent="0" marL="0">
+              <a:buNone/>
+            </a:pPr>
+            <a:r>
+              <a:rPr lang="en-US" sz="1200" dirty="0">
+                <a:solidFill>
+                  <a:srgbClr val="64748B"/>
+                </a:solidFill>
+                <a:latin typeface="Calibri" pitchFamily="34" charset="0"/>
+                <a:ea typeface="Calibri" pitchFamily="34" charset="-122"/>
+                <a:cs typeface="Calibri" pitchFamily="34" charset="-120"/>
+              </a:rPr>
+              <a:t>Product matching</a:t>
+            </a:r>
+            <a:endParaRPr lang="en-US" sz="1200" dirty="0"/>
+          </a:p>
+          <a:p>
+            <a:pPr indent="0" marL="0">
+              <a:buNone/>
+            </a:pPr>
+            <a:r>
+              <a:rPr lang="en-US" sz="1200" dirty="0">
+                <a:solidFill>
+                  <a:srgbClr val="64748B"/>
+                </a:solidFill>
+                <a:latin typeface="Calibri" pitchFamily="34" charset="0"/>
+                <a:ea typeface="Calibri" pitchFamily="34" charset="-122"/>
+                <a:cs typeface="Calibri" pitchFamily="34" charset="-120"/>
+              </a:rPr>
+              <a:t>accuracy with BERT</a:t>
+            </a:r>
+            <a:endParaRPr lang="en-US" sz="1200" dirty="0"/>
+          </a:p>
+        </p:txBody>
+      </p:sp>
+      <p:sp>
+        <p:nvSpPr>
+          <p:cNvPr id="12" name="Shape 8"/>
+          <p:cNvSpPr/>
+          <p:nvPr/>
+        </p:nvSpPr>
+        <p:spPr>
+          <a:xfrm>
+            <a:off x="6217920" y="1508760"/>
+            <a:ext cx="2514600" cy="1645920"/>
           </a:xfrm>
           <a:prstGeom prst="rect">
             <a:avLst/>
@@ -8099,146 +9234,9 @@
           </a:effectLst>
         </p:spPr>
       </p:sp>
-      <p:sp>
-        <p:nvSpPr>
-          <p:cNvPr id="15" name="Text 11"/>
-          <p:cNvSpPr/>
-          <p:nvPr/>
-        </p:nvSpPr>
-        <p:spPr>
-          <a:xfrm>
-            <a:off x="1828800" y="2724912"/>
-            <a:ext cx="1097280" cy="228600"/>
-          </a:xfrm>
-          <a:prstGeom prst="rect">
-            <a:avLst/>
-          </a:prstGeom>
-          <a:noFill/>
-          <a:ln/>
-        </p:spPr>
-        <p:txBody>
-          <a:bodyPr wrap="square" lIns="0" tIns="0" rIns="0" bIns="0" rtlCol="0" anchor="ctr"/>
-          <a:lstStyle/>
-          <a:p>
-            <a:pPr indent="0" marL="0">
-              <a:buNone/>
-            </a:pPr>
-            <a:r>
-              <a:rPr lang="en-US" sz="1000" b="1" dirty="0">
-                <a:solidFill>
-                  <a:srgbClr val="D97706"/>
-                </a:solidFill>
-                <a:latin typeface="Calibri" pitchFamily="34" charset="0"/>
-                <a:ea typeface="Calibri" pitchFamily="34" charset="-122"/>
-                <a:cs typeface="Calibri" pitchFamily="34" charset="-120"/>
-              </a:rPr>
-              <a:t>Phase 2</a:t>
-            </a:r>
-            <a:endParaRPr lang="en-US" sz="1000" dirty="0"/>
-          </a:p>
-        </p:txBody>
-      </p:sp>
-      <p:sp>
-        <p:nvSpPr>
-          <p:cNvPr id="16" name="Text 12"/>
-          <p:cNvSpPr/>
-          <p:nvPr/>
-        </p:nvSpPr>
-        <p:spPr>
-          <a:xfrm>
-            <a:off x="1828800" y="2926080"/>
-            <a:ext cx="6309360" cy="274320"/>
-          </a:xfrm>
-          <a:prstGeom prst="rect">
-            <a:avLst/>
-          </a:prstGeom>
-          <a:noFill/>
-          <a:ln/>
-        </p:spPr>
-        <p:txBody>
-          <a:bodyPr wrap="square" lIns="0" tIns="0" rIns="0" bIns="0" rtlCol="0" anchor="ctr"/>
-          <a:lstStyle/>
-          <a:p>
-            <a:pPr indent="0" marL="0">
-              <a:buNone/>
-            </a:pPr>
-            <a:r>
-              <a:rPr lang="en-US" sz="1400" b="1" dirty="0">
-                <a:solidFill>
-                  <a:srgbClr val="1E293B"/>
-                </a:solidFill>
-                <a:latin typeface="Calibri" pitchFamily="34" charset="0"/>
-                <a:ea typeface="Calibri" pitchFamily="34" charset="-122"/>
-                <a:cs typeface="Calibri" pitchFamily="34" charset="-120"/>
-              </a:rPr>
-              <a:t>Personalized Recommendations</a:t>
-            </a:r>
-            <a:endParaRPr lang="en-US" sz="1400" dirty="0"/>
-          </a:p>
-        </p:txBody>
-      </p:sp>
-      <p:sp>
-        <p:nvSpPr>
-          <p:cNvPr id="17" name="Text 13"/>
-          <p:cNvSpPr/>
-          <p:nvPr/>
-        </p:nvSpPr>
-        <p:spPr>
-          <a:xfrm>
-            <a:off x="1828800" y="3200400"/>
-            <a:ext cx="6309360" cy="274320"/>
-          </a:xfrm>
-          <a:prstGeom prst="rect">
-            <a:avLst/>
-          </a:prstGeom>
-          <a:noFill/>
-          <a:ln/>
-        </p:spPr>
-        <p:txBody>
-          <a:bodyPr wrap="square" lIns="0" tIns="0" rIns="0" bIns="0" rtlCol="0" anchor="ctr"/>
-          <a:lstStyle/>
-          <a:p>
-            <a:pPr indent="0" marL="0">
-              <a:buNone/>
-            </a:pPr>
-            <a:r>
-              <a:rPr lang="en-US" sz="1100" dirty="0">
-                <a:solidFill>
-                  <a:srgbClr val="64748B"/>
-                </a:solidFill>
-                <a:latin typeface="Calibri" pitchFamily="34" charset="0"/>
-                <a:ea typeface="Calibri" pitchFamily="34" charset="-122"/>
-                <a:cs typeface="Calibri" pitchFamily="34" charset="-120"/>
-              </a:rPr>
-              <a:t>ML-powered suggestions based on purchase history and preferences.</a:t>
-            </a:r>
-            <a:endParaRPr lang="en-US" sz="1100" dirty="0"/>
-          </a:p>
-        </p:txBody>
-      </p:sp>
-      <p:sp>
-        <p:nvSpPr>
-          <p:cNvPr id="18" name="Shape 14"/>
-          <p:cNvSpPr/>
-          <p:nvPr/>
-        </p:nvSpPr>
-        <p:spPr>
-          <a:xfrm>
-            <a:off x="777240" y="3931920"/>
-            <a:ext cx="594360" cy="594360"/>
-          </a:xfrm>
-          <a:prstGeom prst="ellipse">
-            <a:avLst/>
-          </a:prstGeom>
-          <a:solidFill>
-            <a:srgbClr val="D97706"/>
-          </a:solidFill>
-          <a:ln/>
-        </p:spPr>
-      </p:sp>
       <p:pic>
         <p:nvPicPr>
-          <p:cNvPr id="19" name="Image 2" descr="preencoded.png">    </p:cNvPr>
+          <p:cNvPr id="13" name="Image 2" descr="preencoded.png">    </p:cNvPr>
           <p:cNvPicPr>
             <a:picLocks noChangeAspect="1"/>
           </p:cNvPicPr>
@@ -8252,7 +9250,7 @@
         </p:blipFill>
         <p:spPr>
           <a:xfrm>
-            <a:off x="886968" y="4041648"/>
+            <a:off x="6400800" y="1691640"/>
             <a:ext cx="365760" cy="365760"/>
           </a:xfrm>
           <a:prstGeom prst="rect">
@@ -8262,145 +9260,387 @@
       </p:pic>
       <p:sp>
         <p:nvSpPr>
-          <p:cNvPr id="20" name="Shape 15"/>
-          <p:cNvSpPr/>
-          <p:nvPr/>
-        </p:nvSpPr>
-        <p:spPr>
-          <a:xfrm>
-            <a:off x="1645920" y="3794760"/>
-            <a:ext cx="6675120" cy="868680"/>
-          </a:xfrm>
-          <a:prstGeom prst="rect">
-            <a:avLst/>
-          </a:prstGeom>
-          <a:solidFill>
-            <a:srgbClr val="FFFFFF"/>
-          </a:solidFill>
-          <a:ln/>
-          <a:effectLst>
-            <a:outerShdw sx="100000" sy="100000" kx="0" ky="0" algn="bl" rotWithShape="0" blurRad="50800" dist="25400" dir="8100000">
-              <a:srgbClr val="000000">
-                <a:alpha val="10000"/>
-              </a:srgbClr>
-            </a:outerShdw>
-          </a:effectLst>
-        </p:spPr>
-      </p:sp>
-      <p:sp>
-        <p:nvSpPr>
-          <p:cNvPr id="21" name="Text 16"/>
-          <p:cNvSpPr/>
-          <p:nvPr/>
-        </p:nvSpPr>
-        <p:spPr>
-          <a:xfrm>
-            <a:off x="1828800" y="3867912"/>
-            <a:ext cx="1097280" cy="228600"/>
-          </a:xfrm>
-          <a:prstGeom prst="rect">
-            <a:avLst/>
-          </a:prstGeom>
-          <a:noFill/>
-          <a:ln/>
-        </p:spPr>
-        <p:txBody>
-          <a:bodyPr wrap="square" lIns="0" tIns="0" rIns="0" bIns="0" rtlCol="0" anchor="ctr"/>
-          <a:lstStyle/>
-          <a:p>
-            <a:pPr indent="0" marL="0">
-              <a:buNone/>
-            </a:pPr>
-            <a:r>
-              <a:rPr lang="en-US" sz="1000" b="1" dirty="0">
+          <p:cNvPr id="14" name="Text 9"/>
+          <p:cNvSpPr/>
+          <p:nvPr/>
+        </p:nvSpPr>
+        <p:spPr>
+          <a:xfrm>
+            <a:off x="6400800" y="2148840"/>
+            <a:ext cx="2148840" cy="457200"/>
+          </a:xfrm>
+          <a:prstGeom prst="rect">
+            <a:avLst/>
+          </a:prstGeom>
+          <a:noFill/>
+          <a:ln/>
+        </p:spPr>
+        <p:txBody>
+          <a:bodyPr wrap="square" lIns="0" tIns="0" rIns="0" bIns="0" rtlCol="0" anchor="ctr"/>
+          <a:lstStyle/>
+          <a:p>
+            <a:pPr indent="0" marL="0">
+              <a:buNone/>
+            </a:pPr>
+            <a:r>
+              <a:rPr lang="en-US" sz="3200" b="1" dirty="0">
                 <a:solidFill>
                   <a:srgbClr val="D97706"/>
                 </a:solidFill>
-                <a:latin typeface="Calibri" pitchFamily="34" charset="0"/>
-                <a:ea typeface="Calibri" pitchFamily="34" charset="-122"/>
-                <a:cs typeface="Calibri" pitchFamily="34" charset="-120"/>
-              </a:rPr>
-              <a:t>Phase 3</a:t>
-            </a:r>
-            <a:endParaRPr lang="en-US" sz="1000" dirty="0"/>
-          </a:p>
-        </p:txBody>
-      </p:sp>
-      <p:sp>
-        <p:nvSpPr>
-          <p:cNvPr id="22" name="Text 17"/>
-          <p:cNvSpPr/>
-          <p:nvPr/>
-        </p:nvSpPr>
-        <p:spPr>
-          <a:xfrm>
-            <a:off x="1828800" y="4069080"/>
-            <a:ext cx="6309360" cy="274320"/>
-          </a:xfrm>
-          <a:prstGeom prst="rect">
-            <a:avLst/>
-          </a:prstGeom>
-          <a:noFill/>
-          <a:ln/>
-        </p:spPr>
-        <p:txBody>
-          <a:bodyPr wrap="square" lIns="0" tIns="0" rIns="0" bIns="0" rtlCol="0" anchor="ctr"/>
-          <a:lstStyle/>
-          <a:p>
-            <a:pPr indent="0" marL="0">
-              <a:buNone/>
-            </a:pPr>
-            <a:r>
-              <a:rPr lang="en-US" sz="1400" b="1" dirty="0">
+                <a:latin typeface="Georgia" pitchFamily="34" charset="0"/>
+                <a:ea typeface="Georgia" pitchFamily="34" charset="-122"/>
+                <a:cs typeface="Georgia" pitchFamily="34" charset="-120"/>
+              </a:rPr>
+              <a:t>&lt; 3 sec</a:t>
+            </a:r>
+            <a:endParaRPr lang="en-US" sz="3200" dirty="0"/>
+          </a:p>
+        </p:txBody>
+      </p:sp>
+      <p:sp>
+        <p:nvSpPr>
+          <p:cNvPr id="15" name="Text 10"/>
+          <p:cNvSpPr/>
+          <p:nvPr/>
+        </p:nvSpPr>
+        <p:spPr>
+          <a:xfrm>
+            <a:off x="6400800" y="2606040"/>
+            <a:ext cx="2148840" cy="411480"/>
+          </a:xfrm>
+          <a:prstGeom prst="rect">
+            <a:avLst/>
+          </a:prstGeom>
+          <a:noFill/>
+          <a:ln/>
+        </p:spPr>
+        <p:txBody>
+          <a:bodyPr wrap="square" lIns="0" tIns="0" rIns="0" bIns="0" rtlCol="0" anchor="ctr"/>
+          <a:lstStyle/>
+          <a:p>
+            <a:pPr indent="0" marL="0">
+              <a:buNone/>
+            </a:pPr>
+            <a:r>
+              <a:rPr lang="en-US" sz="1200" dirty="0">
+                <a:solidFill>
+                  <a:srgbClr val="64748B"/>
+                </a:solidFill>
+                <a:latin typeface="Calibri" pitchFamily="34" charset="0"/>
+                <a:ea typeface="Calibri" pitchFamily="34" charset="-122"/>
+                <a:cs typeface="Calibri" pitchFamily="34" charset="-120"/>
+              </a:rPr>
+              <a:t>Competitive price</a:t>
+            </a:r>
+            <a:endParaRPr lang="en-US" sz="1200" dirty="0"/>
+          </a:p>
+          <a:p>
+            <a:pPr indent="0" marL="0">
+              <a:buNone/>
+            </a:pPr>
+            <a:r>
+              <a:rPr lang="en-US" sz="1200" dirty="0">
+                <a:solidFill>
+                  <a:srgbClr val="64748B"/>
+                </a:solidFill>
+                <a:latin typeface="Calibri" pitchFamily="34" charset="0"/>
+                <a:ea typeface="Calibri" pitchFamily="34" charset="-122"/>
+                <a:cs typeface="Calibri" pitchFamily="34" charset="-120"/>
+              </a:rPr>
+              <a:t>intelligence delivered</a:t>
+            </a:r>
+            <a:endParaRPr lang="en-US" sz="1200" dirty="0"/>
+          </a:p>
+        </p:txBody>
+      </p:sp>
+      <p:sp>
+        <p:nvSpPr>
+          <p:cNvPr id="16" name="Text 11"/>
+          <p:cNvSpPr/>
+          <p:nvPr/>
+        </p:nvSpPr>
+        <p:spPr>
+          <a:xfrm>
+            <a:off x="640080" y="3383280"/>
+            <a:ext cx="2743200" cy="320040"/>
+          </a:xfrm>
+          <a:prstGeom prst="rect">
+            <a:avLst/>
+          </a:prstGeom>
+          <a:noFill/>
+          <a:ln/>
+        </p:spPr>
+        <p:txBody>
+          <a:bodyPr wrap="square" lIns="0" tIns="0" rIns="0" bIns="0" rtlCol="0" anchor="ctr"/>
+          <a:lstStyle/>
+          <a:p>
+            <a:pPr indent="0" marL="0">
+              <a:buNone/>
+            </a:pPr>
+            <a:r>
+              <a:rPr lang="en-US" sz="1600" b="1" dirty="0">
                 <a:solidFill>
                   <a:srgbClr val="1E293B"/>
                 </a:solidFill>
-                <a:latin typeface="Calibri" pitchFamily="34" charset="0"/>
-                <a:ea typeface="Calibri" pitchFamily="34" charset="-122"/>
-                <a:cs typeface="Calibri" pitchFamily="34" charset="-120"/>
-              </a:rPr>
-              <a:t>Mobile App &amp; Browser Extension</a:t>
-            </a:r>
-            <a:endParaRPr lang="en-US" sz="1400" dirty="0"/>
-          </a:p>
-        </p:txBody>
-      </p:sp>
-      <p:sp>
-        <p:nvSpPr>
-          <p:cNvPr id="23" name="Text 18"/>
-          <p:cNvSpPr/>
-          <p:nvPr/>
-        </p:nvSpPr>
-        <p:spPr>
-          <a:xfrm>
-            <a:off x="1828800" y="4343400"/>
-            <a:ext cx="6309360" cy="274320"/>
-          </a:xfrm>
-          <a:prstGeom prst="rect">
-            <a:avLst/>
-          </a:prstGeom>
-          <a:noFill/>
-          <a:ln/>
-        </p:spPr>
-        <p:txBody>
-          <a:bodyPr wrap="square" lIns="0" tIns="0" rIns="0" bIns="0" rtlCol="0" anchor="ctr"/>
-          <a:lstStyle/>
-          <a:p>
-            <a:pPr indent="0" marL="0">
-              <a:buNone/>
-            </a:pPr>
-            <a:r>
-              <a:rPr lang="en-US" sz="1100" dirty="0">
-                <a:solidFill>
-                  <a:srgbClr val="64748B"/>
-                </a:solidFill>
-                <a:latin typeface="Calibri" pitchFamily="34" charset="0"/>
-                <a:ea typeface="Calibri" pitchFamily="34" charset="-122"/>
-                <a:cs typeface="Calibri" pitchFamily="34" charset="-120"/>
-              </a:rPr>
-              <a:t>Real-time price alerts and one-click comparison while browsing.</a:t>
-            </a:r>
-            <a:endParaRPr lang="en-US" sz="1100" dirty="0"/>
+                <a:latin typeface="Georgia" pitchFamily="34" charset="0"/>
+                <a:ea typeface="Georgia" pitchFamily="34" charset="-122"/>
+                <a:cs typeface="Georgia" pitchFamily="34" charset="-120"/>
+              </a:rPr>
+              <a:t>Business Value</a:t>
+            </a:r>
+            <a:endParaRPr lang="en-US" sz="1600" dirty="0"/>
+          </a:p>
+        </p:txBody>
+      </p:sp>
+      <p:pic>
+        <p:nvPicPr>
+          <p:cNvPr id="17" name="Image 3" descr="preencoded.png">    </p:cNvPr>
+          <p:cNvPicPr>
+            <a:picLocks noChangeAspect="1"/>
+          </p:cNvPicPr>
+          <p:nvPr/>
+        </p:nvPicPr>
+        <p:blipFill>
+          <a:blip r:embed="rId4"/>
+          <a:stretch>
+            <a:fillRect/>
+          </a:stretch>
+        </p:blipFill>
+        <p:spPr>
+          <a:xfrm>
+            <a:off x="640080" y="3822192"/>
+            <a:ext cx="201168" cy="201168"/>
+          </a:xfrm>
+          <a:prstGeom prst="rect">
+            <a:avLst/>
+          </a:prstGeom>
+        </p:spPr>
+      </p:pic>
+      <p:sp>
+        <p:nvSpPr>
+          <p:cNvPr id="18" name="Text 12"/>
+          <p:cNvSpPr/>
+          <p:nvPr/>
+        </p:nvSpPr>
+        <p:spPr>
+          <a:xfrm>
+            <a:off x="960120" y="3794760"/>
+            <a:ext cx="7498080" cy="274320"/>
+          </a:xfrm>
+          <a:prstGeom prst="rect">
+            <a:avLst/>
+          </a:prstGeom>
+          <a:noFill/>
+          <a:ln/>
+        </p:spPr>
+        <p:txBody>
+          <a:bodyPr wrap="square" lIns="0" tIns="0" rIns="0" bIns="0" rtlCol="0" anchor="ctr"/>
+          <a:lstStyle/>
+          <a:p>
+            <a:pPr indent="0" marL="0">
+              <a:buNone/>
+            </a:pPr>
+            <a:r>
+              <a:rPr lang="en-US" sz="1200" dirty="0">
+                <a:solidFill>
+                  <a:srgbClr val="1E293B"/>
+                </a:solidFill>
+                <a:latin typeface="Calibri" pitchFamily="34" charset="0"/>
+                <a:ea typeface="Calibri" pitchFamily="34" charset="-122"/>
+                <a:cs typeface="Calibri" pitchFamily="34" charset="-120"/>
+              </a:rPr>
+              <a:t>Retailers gain real-time competitor intelligence to optimize pricing strategies</a:t>
+            </a:r>
+            <a:endParaRPr lang="en-US" sz="1200" dirty="0"/>
+          </a:p>
+        </p:txBody>
+      </p:sp>
+      <p:pic>
+        <p:nvPicPr>
+          <p:cNvPr id="19" name="Image 4" descr="preencoded.png">    </p:cNvPr>
+          <p:cNvPicPr>
+            <a:picLocks noChangeAspect="1"/>
+          </p:cNvPicPr>
+          <p:nvPr/>
+        </p:nvPicPr>
+        <p:blipFill>
+          <a:blip r:embed="rId5"/>
+          <a:stretch>
+            <a:fillRect/>
+          </a:stretch>
+        </p:blipFill>
+        <p:spPr>
+          <a:xfrm>
+            <a:off x="640080" y="4142232"/>
+            <a:ext cx="201168" cy="201168"/>
+          </a:xfrm>
+          <a:prstGeom prst="rect">
+            <a:avLst/>
+          </a:prstGeom>
+        </p:spPr>
+      </p:pic>
+      <p:sp>
+        <p:nvSpPr>
+          <p:cNvPr id="20" name="Text 13"/>
+          <p:cNvSpPr/>
+          <p:nvPr/>
+        </p:nvSpPr>
+        <p:spPr>
+          <a:xfrm>
+            <a:off x="960120" y="4114800"/>
+            <a:ext cx="7498080" cy="274320"/>
+          </a:xfrm>
+          <a:prstGeom prst="rect">
+            <a:avLst/>
+          </a:prstGeom>
+          <a:noFill/>
+          <a:ln/>
+        </p:spPr>
+        <p:txBody>
+          <a:bodyPr wrap="square" lIns="0" tIns="0" rIns="0" bIns="0" rtlCol="0" anchor="ctr"/>
+          <a:lstStyle/>
+          <a:p>
+            <a:pPr indent="0" marL="0">
+              <a:buNone/>
+            </a:pPr>
+            <a:r>
+              <a:rPr lang="en-US" sz="1200" dirty="0">
+                <a:solidFill>
+                  <a:srgbClr val="1E293B"/>
+                </a:solidFill>
+                <a:latin typeface="Calibri" pitchFamily="34" charset="0"/>
+                <a:ea typeface="Calibri" pitchFamily="34" charset="-122"/>
+                <a:cs typeface="Calibri" pitchFamily="34" charset="-120"/>
+              </a:rPr>
+              <a:t>Retail buyers identify best sourcing options faster, cutting procurement costs</a:t>
+            </a:r>
+            <a:endParaRPr lang="en-US" sz="1200" dirty="0"/>
+          </a:p>
+        </p:txBody>
+      </p:sp>
+      <p:pic>
+        <p:nvPicPr>
+          <p:cNvPr id="21" name="Image 5" descr="preencoded.png">    </p:cNvPr>
+          <p:cNvPicPr>
+            <a:picLocks noChangeAspect="1"/>
+          </p:cNvPicPr>
+          <p:nvPr/>
+        </p:nvPicPr>
+        <p:blipFill>
+          <a:blip r:embed="rId6"/>
+          <a:stretch>
+            <a:fillRect/>
+          </a:stretch>
+        </p:blipFill>
+        <p:spPr>
+          <a:xfrm>
+            <a:off x="640080" y="4462272"/>
+            <a:ext cx="201168" cy="201168"/>
+          </a:xfrm>
+          <a:prstGeom prst="rect">
+            <a:avLst/>
+          </a:prstGeom>
+        </p:spPr>
+      </p:pic>
+      <p:sp>
+        <p:nvSpPr>
+          <p:cNvPr id="22" name="Text 14"/>
+          <p:cNvSpPr/>
+          <p:nvPr/>
+        </p:nvSpPr>
+        <p:spPr>
+          <a:xfrm>
+            <a:off x="960120" y="4434840"/>
+            <a:ext cx="7498080" cy="274320"/>
+          </a:xfrm>
+          <a:prstGeom prst="rect">
+            <a:avLst/>
+          </a:prstGeom>
+          <a:noFill/>
+          <a:ln/>
+        </p:spPr>
+        <p:txBody>
+          <a:bodyPr wrap="square" lIns="0" tIns="0" rIns="0" bIns="0" rtlCol="0" anchor="ctr"/>
+          <a:lstStyle/>
+          <a:p>
+            <a:pPr indent="0" marL="0">
+              <a:buNone/>
+            </a:pPr>
+            <a:r>
+              <a:rPr lang="en-US" sz="1200" dirty="0">
+                <a:solidFill>
+                  <a:srgbClr val="1E293B"/>
+                </a:solidFill>
+                <a:latin typeface="Calibri" pitchFamily="34" charset="0"/>
+                <a:ea typeface="Calibri" pitchFamily="34" charset="-122"/>
+                <a:cs typeface="Calibri" pitchFamily="34" charset="-120"/>
+              </a:rPr>
+              <a:t>Consumers make data-driven purchasing decisions with price + quality insights</a:t>
+            </a:r>
+            <a:endParaRPr lang="en-US" sz="1200" dirty="0"/>
+          </a:p>
+        </p:txBody>
+      </p:sp>
+      <p:pic>
+        <p:nvPicPr>
+          <p:cNvPr id="23" name="Image 6" descr="preencoded.png">    </p:cNvPr>
+          <p:cNvPicPr>
+            <a:picLocks noChangeAspect="1"/>
+          </p:cNvPicPr>
+          <p:nvPr/>
+        </p:nvPicPr>
+        <p:blipFill>
+          <a:blip r:embed="rId7"/>
+          <a:stretch>
+            <a:fillRect/>
+          </a:stretch>
+        </p:blipFill>
+        <p:spPr>
+          <a:xfrm>
+            <a:off x="640080" y="4782312"/>
+            <a:ext cx="201168" cy="201168"/>
+          </a:xfrm>
+          <a:prstGeom prst="rect">
+            <a:avLst/>
+          </a:prstGeom>
+        </p:spPr>
+      </p:pic>
+      <p:sp>
+        <p:nvSpPr>
+          <p:cNvPr id="24" name="Text 15"/>
+          <p:cNvSpPr/>
+          <p:nvPr/>
+        </p:nvSpPr>
+        <p:spPr>
+          <a:xfrm>
+            <a:off x="960120" y="4754880"/>
+            <a:ext cx="7498080" cy="274320"/>
+          </a:xfrm>
+          <a:prstGeom prst="rect">
+            <a:avLst/>
+          </a:prstGeom>
+          <a:noFill/>
+          <a:ln/>
+        </p:spPr>
+        <p:txBody>
+          <a:bodyPr wrap="square" lIns="0" tIns="0" rIns="0" bIns="0" rtlCol="0" anchor="ctr"/>
+          <a:lstStyle/>
+          <a:p>
+            <a:pPr indent="0" marL="0">
+              <a:buNone/>
+            </a:pPr>
+            <a:r>
+              <a:rPr lang="en-US" sz="1200" dirty="0">
+                <a:solidFill>
+                  <a:srgbClr val="1E293B"/>
+                </a:solidFill>
+                <a:latin typeface="Calibri" pitchFamily="34" charset="0"/>
+                <a:ea typeface="Calibri" pitchFamily="34" charset="-122"/>
+                <a:cs typeface="Calibri" pitchFamily="34" charset="-120"/>
+              </a:rPr>
+              <a:t>NLP-based matching outperforms keyword-only tools across all user segments</a:t>
+            </a:r>
+            <a:endParaRPr lang="en-US" sz="1200" dirty="0"/>
           </a:p>
         </p:txBody>
       </p:sp>
